--- a/ies-prototype/docs/Shubham_Gaur_IES_Helm.pptx
+++ b/ies-prototype/docs/Shubham_Gaur_IES_Helm.pptx
@@ -9,9 +9,10 @@
     <p:sldId id="257" r:id="rId3"/>
     <p:sldId id="258" r:id="rId4"/>
     <p:sldId id="259" r:id="rId5"/>
+    <p:sldId id="260" r:id="rId6"/>
   </p:sldIdLst>
   <p:notesMasterIdLst>
-    <p:notesMasterId r:id="rId6"/>
+    <p:notesMasterId r:id="rId7"/>
   </p:notesMasterIdLst>
   <p:sldSz cx="12192000" cy="6858000"/>
   <p:notesSz cx="6858000" cy="12192000"/>
@@ -505,11 +506,11 @@
           <a:p>
             <a:r>
               <a:rPr lang="en-US" dirty="0"/>
-              <a:t>Good morning everyone. My name is Shubham Gaur. I have worked as a consultant at Capgemini and I studied civil engineering at IIT Kanpur.
-Today I will present my answer to the Intuit case. I call my product IES Helm. A helm is the wheel that steers a ship. In my product the AI does much of the work but the finance leader always steers.
-Let me start with the business case. Intuit Enterprise Suite serves mid-market companies. These are firms with about fifty to two thousand five hundred employees. They have outgrown small business tools. Yet big ERP systems still feel too slow and too expensive for them.
-The market has changed. Businesses now expect AI agents to do real work. Recording what already happened is not enough anymore. People also want expert help right when they need it.
-So Intuit asked me two things. First, put AI agents and expert help inside daily finance, accounting, workforce and commerce work. Second, open IES so outside developers can build their own apps and agents on it.</a:t>
+              <a:t>Good morning everyone. This presentation is by Shubham Gaur. Shubham has worked as a consultant at Capgemini and holds a B.Tech in Civil Engineering from IIT Kanpur.
+The product is called IES Helm. A helm is the wheel that steers a ship. In this product the AI agents do most of the daily work. The finance leader still holds the wheel and makes the big decisions.
+Intuit Enterprise Suite serves mid-size companies. These firms have outgrown small business tools. At the same time large ERP systems feel too slow and too costly for them.
+The market has changed. Businesses now expect AI to do real work and not only store records. People also want expert help at the moment they need it.
+So IES needs to become an AI platform. Agents and experts should work inside everyday finance tasks. Outside developers should be able to build and sell their own agents on top of IES.</a:t>
             </a:r>
             <a:endParaRPr lang="en-US" dirty="0"/>
           </a:p>
@@ -597,10 +598,10 @@
           <a:p>
             <a:r>
               <a:rPr lang="en-US" dirty="0"/>
-              <a:t>Now let me talk about the people who feel this pain. The case gives two groups and my product serves both.
-The first group is finance leaders. These are CFOs, controllers and business owners. Many of them run several companies in several countries. Their data lives in many separate tools. Closing the books every month takes weeks. Expert advice is expensive. I also believe they will not trust AI with their books unless they can see the proof and stay in control. That last point is my own assumption and I would test it with real customers.
-The second group is developers. These are startups, fintech firms and software companies. They find financial integrations slow and hard. Most accounting APIs only give thin data. There are few safe tools to build AI agents. And it is hard for them to find customers and earn money.
-At the bottom you can see what each group really wants. The finance leader wants the agents to do the heavy work while they keep the final say. The developer wants rich data, a safe place to test, and a way to reach paying customers.</a:t>
+              <a:t>Two groups of people feel these problems every day. IES Helm is built for both of them.
+The first group is finance leaders. These are CFOs, controllers and business owners. Many of them run several companies in several countries. Their data sits in many separate tools. Closing the books every month takes weeks. Expert advice is expensive. They are also careful about AI. They will only trust it when they can see the proof and stay in control.
+The second group is developers and partners. These are startups, fintech firms and software companies. Connecting to financial systems is slow and hard. Most accounting APIs only return thin data. Few tools exist to build AI agents safely. It is also hard for them to find customers and earn money.
+The boxes at the bottom show what each group really wants. Finance leaders want agents to do the heavy work while they keep the final say. Developers want rich data, a safe place to test and a way to reach paying customers.</a:t>
             </a:r>
             <a:endParaRPr lang="en-US" dirty="0"/>
           </a:p>
@@ -688,11 +689,10 @@
           <a:p>
             <a:r>
               <a:rPr lang="en-US" dirty="0"/>
-              <a:t>This is my solution. I call it IES Helm. The big idea is simple. IES should not only record what happened. It should also understand the business, suggest what to do and take action. The finance leader always keeps the final say.
-The solution stands on four pillars. First, AI agents do real work such as closing the books. Second, hard questions go to real human experts with a full case file. Third, outside developers can build and sell their own agents on IES. Fourth, trust is visible. Every action shows its proof, its confidence and who approved it.
-Every agent follows the same five steps. It understands the task. It investigates the data. It decides using company rules. It acts or prepares the action. Then it checks the result.
-The finance leader chooses how much freedom the AI gets. In Assist mode the AI only suggests. In Approve mode it prepares the work and waits for a yes. In Autopilot it finishes small and safe tasks alone. Risky or unclear tasks always go to a person.
-On the right you can see what my working prototype shows. The morning brief warns about cash and starts collections with one click. The close agent moves the books from sixty-two to seventy-three percent ready in a single run. The what-if lab answers a plain English question with three scenarios. A risky one point two four million dollar sale goes to a human expert. A partner agent from the marketplace finds twenty-three thousand dollars of overcharges. And a developer can build an agent, catch a bug in testing and publish it safely.</a:t>
+              <a:t>This is the solution. It is called IES Helm. The idea is simple. IES should not only record what happened. It should also understand the business, suggest what to do and take action. The finance leader stays in charge the whole time.
+The solution rests on four pillars. First, AI agents finish real tasks such as closing the books. Second, hard questions go to real human experts, and the agent sends them the full file. Third, outside developers can build and sell their own agents on IES. Fourth, trust is visible. Every action shows its proof and who approved it, and it can be undone.
+Every agent follows the same five steps. It understands the task. It investigates the data. It decides on a fix that follows company rules. It acts or prepares the action for approval. Then it verifies the result and saves a record. That is what makes it an agent and not a chatbot.
+The finance leader chooses how much freedom the AI gets. In Assist mode the AI only suggests. In Approve mode it prepares the work and waits for a yes. In Autopilot mode it finishes small and safe tasks alone. The safety rule is clear. The AI acts alone only when risk is low, it is at least ninety five percent sure and the amount is ten thousand dollars or less. Below seventy percent it always asks a person.</a:t>
             </a:r>
             <a:endParaRPr lang="en-US" dirty="0"/>
           </a:p>
@@ -780,12 +780,15 @@
           <a:p>
             <a:r>
               <a:rPr lang="en-US" dirty="0"/>
-              <a:t>Let me finish with how this makes money, how I would build it and how I would know it works.
-Intuit earns in five ways. Customers keep paying the normal subscription. Heavy AI use is charged above an included amount. Developers pay for API use beyond a free level. Intuit keeps a share of each marketplace sale. And expert help is sold per case. All prices in my prototype are only examples.
-The case names NetSuite, SAP, Workday and new AI companies. I did not want to invent facts about them. My bet is that the full mix is hard to copy. IES has one shared set of business data. Its agents act inside clear rules. Experts are built in. Developers can sell to IES customers. And trust is visible everywhere. I would test this bet with win and loss interviews.
-My main success measure is simple. I count the hours of finance work that agents finish with proof and without a person fixing it. This one number shows both value and trust. My riskiest belief is that controllers will approve work that an agent prepared. I would test that first with eight controllers using this prototype.
-I would build in four steps. First I validate with real customers. Next I launch the close agent with the Trust Center and core APIs. Then I add the what-if lab, compliance, experts and the full marketplace. Finally I grow the partner ecosystem and turn on Autopilot only where it has proven accurate.
-To close, IES Helm helps Intuit grow from software that records the past into a trusted AI platform that helps businesses decide and act. Thank you. I am happy to take your questions.</a:t>
+              <a:t>This slide walks through every part of the product.
+The AI Command Center is the morning screen. Agents check the business overnight and list the biggest issues with proof. In the demo they warn that cash may drop below the loan limit, and one click starts a collections push that fixes it.
+The Financial Close Agent handles the month end. It matches bank records, fixes gaps between group companies, records unbilled costs and builds group totals. In one run the close moves from sixty two to seventy three percent ready.
+The Scenario Lab answers what-if questions typed in plain English. It shows a normal outlook, a bad outlook and a fixed outlook, so the leader can see the impact right away.
+The Expert Network brings in a qualified person for hard decisions. The agent sends one complete file, so the expert does not need to ask any follow-up questions.
+The Compliance Agent watches tax filings and internal controls and prepares every filing for approval.
+The Marketplace lets customers add agents from other companies. Each one clearly shows what it can read and change before it is installed.
+On the developer side, Agent Studio turns a plain English description into a safe workflow. The Test Lab checks each agent on eight tricky situations before it can be sold. It even proves that the agent asks a human when data is missing.
+Finally, the Trust Center controls every agent in one place, and the Audit Log keeps a record of every action.</a:t>
             </a:r>
             <a:endParaRPr lang="en-US" dirty="0"/>
           </a:p>
@@ -809,6 +812,99 @@
             <a:fld id="{F7021451-1387-4CA6-816F-3879F97B5CBC}" type="slidenum">
               <a:rPr lang="en-US"/>
               <a:t>4</a:t>
+            </a:fld>
+            <a:endParaRPr lang="en-US"/>
+          </a:p>
+        </p:txBody>
+      </p:sp>
+    </p:spTree>
+    <p:extLst>
+      <p:ext uri="{BB962C8B-B14F-4D97-AF65-F5344CB8AC3E}">
+        <p14:creationId xmlns:p14="http://schemas.microsoft.com/office/powerpoint/2010/main" val="1024086991"/>
+      </p:ext>
+    </p:extLst>
+  </p:cSld>
+  <p:clrMapOvr>
+    <a:masterClrMapping/>
+  </p:clrMapOvr>
+</p:notes>
+</file>
+
+<file path=ppt/notesSlides/notesSlide5.xml><?xml version="1.0" encoding="utf-8"?>
+<p:notes xmlns:a="http://schemas.openxmlformats.org/drawingml/2006/main" xmlns:r="http://schemas.openxmlformats.org/officeDocument/2006/relationships" xmlns:p="http://schemas.openxmlformats.org/presentationml/2006/main">
+  <p:cSld>
+    <p:spTree>
+      <p:nvGrpSpPr>
+        <p:cNvPr id="1" name=""/>
+        <p:cNvGrpSpPr/>
+        <p:nvPr/>
+      </p:nvGrpSpPr>
+      <p:grpSpPr>
+        <a:xfrm>
+          <a:off x="0" y="0"/>
+          <a:ext cx="0" cy="0"/>
+          <a:chOff x="0" y="0"/>
+          <a:chExt cx="0" cy="0"/>
+        </a:xfrm>
+      </p:grpSpPr>
+      <p:sp>
+        <p:nvSpPr>
+          <p:cNvPr id="2" name="Slide Image Placeholder 1"/>
+          <p:cNvSpPr>
+            <a:spLocks noGrp="1" noRot="1" noChangeAspect="1"/>
+          </p:cNvSpPr>
+          <p:nvPr>
+            <p:ph type="sldImg"/>
+          </p:nvPr>
+        </p:nvSpPr>
+        <p:spPr/>
+      </p:sp>
+      <p:sp>
+        <p:nvSpPr>
+          <p:cNvPr id="3" name="Notes Placeholder 2"/>
+          <p:cNvSpPr>
+            <a:spLocks noGrp="1"/>
+          </p:cNvSpPr>
+          <p:nvPr>
+            <p:ph type="body" idx="1"/>
+          </p:nvPr>
+        </p:nvSpPr>
+        <p:spPr/>
+        <p:txBody>
+          <a:bodyPr/>
+          <a:lstStyle/>
+          <a:p>
+            <a:r>
+              <a:rPr lang="en-US" dirty="0"/>
+              <a:t>This last slide explains why IES Helm wins and how it grows.
+It wins for six reasons. First, all business data lives in one place, so agents see the full picture. Second, the agents finish real work instead of only answering questions. Third, experts are built in, so hard questions get safe answers. Fourth, partners keep adding new agents, which makes the platform more useful for everyone. Fifth, every action can be checked and undone, which makes finance teams comfortable. Sixth, it is simpler to start than a large ERP system and grows with the company.
+The money comes from five places. There is the normal subscription and extra fees for heavy AI use. Developers pay for API use above a free level. Intuit keeps a share of each marketplace sale and earns fees from expert help.
+Success is measured by one main number. It counts the hours of finance work that agents finish with proof and without a person fixing it. This number shows value and trust together.
+The roadmap has four steps. First, real users try the prototype. Next, the close agent launches with the Trust Center and core APIs. Then the Scenario Lab, compliance help, experts and the marketplace go live. Finally the partner ecosystem grows, and Autopilot turns on only where it has proven accurate.
+In short, IES Helm helps IES grow from software that records the past into a trusted AI platform that helps businesses decide and act. Thank you. Questions are welcome.</a:t>
+            </a:r>
+            <a:endParaRPr lang="en-US" dirty="0"/>
+          </a:p>
+        </p:txBody>
+      </p:sp>
+      <p:sp>
+        <p:nvSpPr>
+          <p:cNvPr id="4" name="Slide Number Placeholder 3"/>
+          <p:cNvSpPr>
+            <a:spLocks noGrp="1"/>
+          </p:cNvSpPr>
+          <p:nvPr>
+            <p:ph type="sldNum" sz="quarter" idx="10"/>
+          </p:nvPr>
+        </p:nvSpPr>
+        <p:spPr/>
+        <p:txBody>
+          <a:bodyPr/>
+          <a:lstStyle/>
+          <a:p>
+            <a:fld id="{F7021451-1387-4CA6-816F-3879F97B5CBC}" type="slidenum">
+              <a:rPr lang="en-US"/>
+              <a:t>5</a:t>
             </a:fld>
             <a:endParaRPr lang="en-US"/>
           </a:p>
@@ -1191,7 +1287,7 @@
                 <a:ea typeface="Calibri" pitchFamily="34" charset="-122"/>
                 <a:cs typeface="Calibri" pitchFamily="34" charset="-120"/>
               </a:rPr>
-              <a:t>INTUIT PRODUCT MANAGEMENT CASE STUDY</a:t>
+              <a:t>PRODUCT STRATEGY AND PROTOTYPE</a:t>
             </a:r>
             <a:endParaRPr lang="en-US" sz="1100" dirty="0"/>
           </a:p>
@@ -1269,7 +1365,7 @@
                 <a:ea typeface="Calibri" pitchFamily="34" charset="-122"/>
                 <a:cs typeface="Calibri" pitchFamily="34" charset="-120"/>
               </a:rPr>
-              <a:t>An AI platform where agents do the work and you stay in control.</a:t>
+              <a:t>An AI platform where agents do the work and people stay in control.</a:t>
             </a:r>
             <a:endParaRPr lang="en-US" sz="1800" dirty="0"/>
           </a:p>
@@ -1284,7 +1380,7 @@
         <p:spPr>
           <a:xfrm>
             <a:off x="548640" y="2606040"/>
-            <a:ext cx="4754880" cy="914400"/>
+            <a:ext cx="4754880" cy="960120"/>
           </a:xfrm>
           <a:prstGeom prst="rect">
             <a:avLst/>
@@ -1297,9 +1393,6 @@
           <a:lstStyle/>
           <a:p>
             <a:pPr indent="0" marL="0">
-              <a:spcAft>
-                <a:spcPts val="400"/>
-              </a:spcAft>
               <a:buNone/>
             </a:pPr>
             <a:r>
@@ -1311,24 +1404,7 @@
                 <a:ea typeface="Calibri" pitchFamily="34" charset="-122"/>
                 <a:cs typeface="Calibri" pitchFamily="34" charset="-120"/>
               </a:rPr>
-              <a:t>A helm is the wheel that steers a ship. </a:t>
-            </a:r>
-            <a:pPr indent="0" marL="0">
-              <a:spcAft>
-                <a:spcPts val="400"/>
-              </a:spcAft>
-              <a:buNone/>
-            </a:pPr>
-            <a:r>
-              <a:rPr lang="en-US" sz="1300" dirty="0">
-                <a:solidFill>
-                  <a:srgbClr val="DCE6F2"/>
-                </a:solidFill>
-                <a:latin typeface="Calibri" pitchFamily="34" charset="0"/>
-                <a:ea typeface="Calibri" pitchFamily="34" charset="-122"/>
-                <a:cs typeface="Calibri" pitchFamily="34" charset="-120"/>
-              </a:rPr>
-              <a:t>In my product the AI agents do much of the rowing. The finance leader always holds the wheel and decides where the business goes.</a:t>
+              <a:t>A helm is the wheel that steers a ship. In IES Helm the AI agents do most of the daily work. The finance leader always holds the wheel and decides where the business goes.</a:t>
             </a:r>
             <a:endParaRPr lang="en-US" sz="1300" dirty="0"/>
           </a:p>
@@ -1343,11 +1419,11 @@
         <p:spPr>
           <a:xfrm>
             <a:off x="548640" y="3840480"/>
-            <a:ext cx="4754880" cy="2103120"/>
+            <a:ext cx="4754880" cy="1920240"/>
           </a:xfrm>
           <a:prstGeom prst="roundRect">
             <a:avLst>
-              <a:gd name="adj" fmla="val 5217"/>
+              <a:gd name="adj" fmla="val 5714"/>
             </a:avLst>
           </a:prstGeom>
           <a:solidFill>
@@ -1496,8 +1572,8 @@
         </p:nvSpPr>
         <p:spPr>
           <a:xfrm>
-            <a:off x="1645920" y="4681728"/>
-            <a:ext cx="3520440" cy="1051560"/>
+            <a:off x="1645920" y="4709160"/>
+            <a:ext cx="3520440" cy="868680"/>
           </a:xfrm>
           <a:prstGeom prst="rect">
             <a:avLst/>
@@ -1511,12 +1587,12 @@
           <a:p>
             <a:pPr indent="0" marL="0">
               <a:spcAft>
-                <a:spcPts val="300"/>
+                <a:spcPts val="400"/>
               </a:spcAft>
               <a:buNone/>
             </a:pPr>
             <a:r>
-              <a:rPr lang="en-US" sz="1150" dirty="0">
+              <a:rPr lang="en-US" sz="1200" dirty="0">
                 <a:solidFill>
                   <a:srgbClr val="DCE6F2"/>
                 </a:solidFill>
@@ -1526,17 +1602,17 @@
               </a:rPr>
               <a:t>Shubham has worked as a consultant at Capgemini.</a:t>
             </a:r>
-            <a:endParaRPr lang="en-US" sz="1150" dirty="0"/>
+            <a:endParaRPr lang="en-US" sz="1200" dirty="0"/>
           </a:p>
           <a:p>
             <a:pPr indent="0" marL="0">
               <a:spcAft>
-                <a:spcPts val="300"/>
+                <a:spcPts val="400"/>
               </a:spcAft>
               <a:buNone/>
             </a:pPr>
             <a:r>
-              <a:rPr lang="en-US" sz="1150" dirty="0">
+              <a:rPr lang="en-US" sz="1200" dirty="0">
                 <a:solidFill>
                   <a:srgbClr val="DCE6F2"/>
                 </a:solidFill>
@@ -1546,27 +1622,7 @@
               </a:rPr>
               <a:t>He holds a B.Tech in Civil Engineering from IIT Kanpur.</a:t>
             </a:r>
-            <a:endParaRPr lang="en-US" sz="1150" dirty="0"/>
-          </a:p>
-          <a:p>
-            <a:pPr indent="0" marL="0">
-              <a:spcAft>
-                <a:spcPts val="300"/>
-              </a:spcAft>
-              <a:buNone/>
-            </a:pPr>
-            <a:r>
-              <a:rPr lang="en-US" sz="1150" dirty="0">
-                <a:solidFill>
-                  <a:srgbClr val="DCE6F2"/>
-                </a:solidFill>
-                <a:latin typeface="Calibri" pitchFamily="34" charset="0"/>
-                <a:ea typeface="Calibri" pitchFamily="34" charset="-122"/>
-                <a:cs typeface="Calibri" pitchFamily="34" charset="-120"/>
-              </a:rPr>
-              <a:t>He enjoys turning messy business problems into simple products that people trust.</a:t>
-            </a:r>
-            <a:endParaRPr lang="en-US" sz="1150" dirty="0"/>
+            <a:endParaRPr lang="en-US" sz="1200" dirty="0"/>
           </a:p>
         </p:txBody>
       </p:sp>
@@ -1578,7 +1634,7 @@
         </p:nvSpPr>
         <p:spPr>
           <a:xfrm>
-            <a:off x="548640" y="6126480"/>
+            <a:off x="548640" y="6035040"/>
             <a:ext cx="4937760" cy="320040"/>
           </a:xfrm>
           <a:prstGeom prst="rect">
@@ -1597,7 +1653,7 @@
             <a:r>
               <a:rPr lang="en-US" sz="1200" b="1" dirty="0">
                 <a:solidFill>
-                  <a:srgbClr val="E8A33D"/>
+                  <a:srgbClr val="F2B75B"/>
                 </a:solidFill>
                 <a:latin typeface="Calibri" pitchFamily="34" charset="0"/>
                 <a:ea typeface="Calibri" pitchFamily="34" charset="-122"/>
@@ -1669,7 +1725,7 @@
                 <a:ea typeface="Cambria" pitchFamily="34" charset="-122"/>
                 <a:cs typeface="Cambria" pitchFamily="34" charset="-120"/>
               </a:rPr>
-              <a:t>The business case</a:t>
+              <a:t>The business context</a:t>
             </a:r>
             <a:endParaRPr lang="en-US" sz="2400" dirty="0"/>
           </a:p>
@@ -1796,7 +1852,7 @@
                 <a:ea typeface="Calibri" pitchFamily="34" charset="-122"/>
                 <a:cs typeface="Calibri" pitchFamily="34" charset="-120"/>
               </a:rPr>
-              <a:t>Intuit Enterprise Suite is built for mid-market companies. These firms have outgrown small business tools. Big ERP systems still feel too slow and too costly for them.</a:t>
+              <a:t>Intuit Enterprise Suite is built for mid-size companies. These firms have outgrown small business tools. Large ERP systems still feel too slow and too costly for them.</a:t>
             </a:r>
             <a:endParaRPr lang="en-US" sz="1200" dirty="0"/>
           </a:p>
@@ -1884,7 +1940,7 @@
                 <a:ea typeface="Calibri" pitchFamily="34" charset="-122"/>
                 <a:cs typeface="Calibri" pitchFamily="34" charset="-120"/>
               </a:rPr>
-              <a:t>What changed</a:t>
+              <a:t>What has changed</a:t>
             </a:r>
             <a:endParaRPr lang="en-US" sz="1400" dirty="0"/>
           </a:p>
@@ -2011,7 +2067,7 @@
                 <a:ea typeface="Calibri" pitchFamily="34" charset="-122"/>
                 <a:cs typeface="Calibri" pitchFamily="34" charset="-120"/>
               </a:rPr>
-              <a:t>What Intuit asked</a:t>
+              <a:t>What IES needs to become</a:t>
             </a:r>
             <a:endParaRPr lang="en-US" sz="1400" dirty="0"/>
           </a:p>
@@ -2050,7 +2106,7 @@
                 <a:ea typeface="Calibri" pitchFamily="34" charset="-122"/>
                 <a:cs typeface="Calibri" pitchFamily="34" charset="-120"/>
               </a:rPr>
-              <a:t>Turn IES into an AI platform for the mid-market. Put agents and expert help inside finance, accounting, workforce and commerce. Let outside developers build their own apps and agents on IES.</a:t>
+              <a:t>IES needs to grow from a set of connected tools into an AI platform. Agents and experts should work inside finance, accounting, payroll and sales. Outside developers should be able to build and sell their own agents on IES.</a:t>
             </a:r>
             <a:endParaRPr lang="en-US" sz="1200" dirty="0"/>
           </a:p>
@@ -2091,8 +2147,8 @@
         </p:nvSpPr>
         <p:spPr>
           <a:xfrm>
-            <a:off x="6217920" y="4956048"/>
-            <a:ext cx="1463040" cy="502920"/>
+            <a:off x="6217920" y="4937760"/>
+            <a:ext cx="1508760" cy="502920"/>
           </a:xfrm>
           <a:prstGeom prst="rect">
             <a:avLst/>
@@ -2130,8 +2186,8 @@
         </p:nvSpPr>
         <p:spPr>
           <a:xfrm>
-            <a:off x="6217920" y="5486400"/>
-            <a:ext cx="1508760" cy="502920"/>
+            <a:off x="6217920" y="5468112"/>
+            <a:ext cx="1508760" cy="548640"/>
           </a:xfrm>
           <a:prstGeom prst="rect">
             <a:avLst/>
@@ -2147,7 +2203,7 @@
               <a:buNone/>
             </a:pPr>
             <a:r>
-              <a:rPr lang="en-US" sz="1100" dirty="0">
+              <a:rPr lang="en-US" sz="1050" dirty="0">
                 <a:solidFill>
                   <a:srgbClr val="5B6576"/>
                 </a:solidFill>
@@ -2155,9 +2211,9 @@
                 <a:ea typeface="Calibri" pitchFamily="34" charset="-122"/>
                 <a:cs typeface="Calibri" pitchFamily="34" charset="-120"/>
               </a:rPr>
-              <a:t>employees in a typical customer</a:t>
-            </a:r>
-            <a:endParaRPr lang="en-US" sz="1100" dirty="0"/>
+              <a:t>people work at a typical customer company.</a:t>
+            </a:r>
+            <a:endParaRPr lang="en-US" sz="1050" dirty="0"/>
           </a:p>
         </p:txBody>
       </p:sp>
@@ -2196,8 +2252,8 @@
         </p:nvSpPr>
         <p:spPr>
           <a:xfrm>
-            <a:off x="8092440" y="4956048"/>
-            <a:ext cx="1463040" cy="502920"/>
+            <a:off x="8092440" y="4937760"/>
+            <a:ext cx="1508760" cy="502920"/>
           </a:xfrm>
           <a:prstGeom prst="rect">
             <a:avLst/>
@@ -2235,8 +2291,8 @@
         </p:nvSpPr>
         <p:spPr>
           <a:xfrm>
-            <a:off x="8092440" y="5486400"/>
-            <a:ext cx="1508760" cy="502920"/>
+            <a:off x="8092440" y="5468112"/>
+            <a:ext cx="1508760" cy="548640"/>
           </a:xfrm>
           <a:prstGeom prst="rect">
             <a:avLst/>
@@ -2252,7 +2308,7 @@
               <a:buNone/>
             </a:pPr>
             <a:r>
-              <a:rPr lang="en-US" sz="1100" dirty="0">
+              <a:rPr lang="en-US" sz="1050" dirty="0">
                 <a:solidFill>
                   <a:srgbClr val="5B6576"/>
                 </a:solidFill>
@@ -2260,9 +2316,9 @@
                 <a:ea typeface="Calibri" pitchFamily="34" charset="-122"/>
                 <a:cs typeface="Calibri" pitchFamily="34" charset="-120"/>
               </a:rPr>
-              <a:t>customer groups to serve</a:t>
-            </a:r>
-            <a:endParaRPr lang="en-US" sz="1100" dirty="0"/>
+              <a:t>groups of users are served by one product.</a:t>
+            </a:r>
+            <a:endParaRPr lang="en-US" sz="1050" dirty="0"/>
           </a:p>
         </p:txBody>
       </p:sp>
@@ -2301,8 +2357,8 @@
         </p:nvSpPr>
         <p:spPr>
           <a:xfrm>
-            <a:off x="9966960" y="4956048"/>
-            <a:ext cx="1463040" cy="502920"/>
+            <a:off x="9966960" y="4937760"/>
+            <a:ext cx="1508760" cy="502920"/>
           </a:xfrm>
           <a:prstGeom prst="rect">
             <a:avLst/>
@@ -2340,8 +2396,8 @@
         </p:nvSpPr>
         <p:spPr>
           <a:xfrm>
-            <a:off x="9966960" y="5486400"/>
-            <a:ext cx="1508760" cy="502920"/>
+            <a:off x="9966960" y="5468112"/>
+            <a:ext cx="1508760" cy="548640"/>
           </a:xfrm>
           <a:prstGeom prst="rect">
             <a:avLst/>
@@ -2357,7 +2413,7 @@
               <a:buNone/>
             </a:pPr>
             <a:r>
-              <a:rPr lang="en-US" sz="1100" dirty="0">
+              <a:rPr lang="en-US" sz="1050" dirty="0">
                 <a:solidFill>
                   <a:srgbClr val="5B6576"/>
                 </a:solidFill>
@@ -2365,9 +2421,9 @@
                 <a:ea typeface="Calibri" pitchFamily="34" charset="-122"/>
                 <a:cs typeface="Calibri" pitchFamily="34" charset="-120"/>
               </a:rPr>
-              <a:t>shared platform for all of them</a:t>
-            </a:r>
-            <a:endParaRPr lang="en-US" sz="1100" dirty="0"/>
+              <a:t>shared base of business data sits under it all.</a:t>
+            </a:r>
+            <a:endParaRPr lang="en-US" sz="1050" dirty="0"/>
           </a:p>
         </p:txBody>
       </p:sp>
@@ -2411,8 +2467,8 @@
         </p:nvSpPr>
         <p:spPr>
           <a:xfrm>
-            <a:off x="548640" y="365760"/>
-            <a:ext cx="10972800" cy="548640"/>
+            <a:off x="548640" y="320040"/>
+            <a:ext cx="11064240" cy="548640"/>
           </a:xfrm>
           <a:prstGeom prst="rect">
             <a:avLst/>
@@ -2428,7 +2484,7 @@
               <a:buNone/>
             </a:pPr>
             <a:r>
-              <a:rPr lang="en-US" sz="3000" b="1" dirty="0">
+              <a:rPr lang="en-US" sz="2800" b="1" dirty="0">
                 <a:solidFill>
                   <a:srgbClr val="14213D"/>
                 </a:solidFill>
@@ -2438,7 +2494,7 @@
               </a:rPr>
               <a:t>Who feels the pain and why it matters</a:t>
             </a:r>
-            <a:endParaRPr lang="en-US" sz="3000" dirty="0"/>
+            <a:endParaRPr lang="en-US" sz="2800" dirty="0"/>
           </a:p>
         </p:txBody>
       </p:sp>
@@ -2450,8 +2506,8 @@
         </p:nvSpPr>
         <p:spPr>
           <a:xfrm>
-            <a:off x="548640" y="914400"/>
-            <a:ext cx="10972800" cy="365760"/>
+            <a:off x="548640" y="868680"/>
+            <a:ext cx="11064240" cy="411480"/>
           </a:xfrm>
           <a:prstGeom prst="rect">
             <a:avLst/>
@@ -2467,7 +2523,7 @@
               <a:buNone/>
             </a:pPr>
             <a:r>
-              <a:rPr lang="en-US" sz="1400" dirty="0">
+              <a:rPr lang="en-US" sz="1300" dirty="0">
                 <a:solidFill>
                   <a:srgbClr val="5B6576"/>
                 </a:solidFill>
@@ -2475,9 +2531,9 @@
                 <a:ea typeface="Calibri" pitchFamily="34" charset="-122"/>
                 <a:cs typeface="Calibri" pitchFamily="34" charset="-120"/>
               </a:rPr>
-              <a:t>The case gives two customer groups. My solution has to work for both of them at the same time.</a:t>
-            </a:r>
-            <a:endParaRPr lang="en-US" sz="1400" dirty="0"/>
+              <a:t>Two groups of people face these problems every day. IES Helm is built to serve both groups at the same time.</a:t>
+            </a:r>
+            <a:endParaRPr lang="en-US" sz="1300" dirty="0"/>
           </a:p>
         </p:txBody>
       </p:sp>
@@ -2490,11 +2546,11 @@
         <p:spPr>
           <a:xfrm>
             <a:off x="548640" y="1417320"/>
-            <a:ext cx="5486400" cy="4937760"/>
+            <a:ext cx="5486400" cy="4983480"/>
           </a:xfrm>
           <a:prstGeom prst="roundRect">
             <a:avLst>
-              <a:gd name="adj" fmla="val 2222"/>
+              <a:gd name="adj" fmla="val 1835"/>
             </a:avLst>
           </a:prstGeom>
           <a:solidFill>
@@ -2612,7 +2668,7 @@
         <p:spPr>
           <a:xfrm>
             <a:off x="1600200" y="2011680"/>
-            <a:ext cx="4297680" cy="411480"/>
+            <a:ext cx="4297680" cy="457200"/>
           </a:xfrm>
           <a:prstGeom prst="rect">
             <a:avLst/>
@@ -2636,7 +2692,7 @@
                 <a:ea typeface="Calibri" pitchFamily="34" charset="-122"/>
                 <a:cs typeface="Calibri" pitchFamily="34" charset="-120"/>
               </a:rPr>
-              <a:t>CFOs, controllers and owners. Many of them run several companies across several countries.</a:t>
+              <a:t>These are CFOs, controllers and business owners. Many of them run several companies across several countries.</a:t>
             </a:r>
             <a:endParaRPr lang="en-US" sz="1150" dirty="0"/>
           </a:p>
@@ -2700,7 +2756,7 @@
         <p:spPr>
           <a:xfrm>
             <a:off x="1417320" y="2679192"/>
-            <a:ext cx="4434840" cy="548640"/>
+            <a:ext cx="4434840" cy="566928"/>
           </a:xfrm>
           <a:prstGeom prst="rect">
             <a:avLst/>
@@ -2788,7 +2844,7 @@
         <p:spPr>
           <a:xfrm>
             <a:off x="1417320" y="3282696"/>
-            <a:ext cx="4434840" cy="548640"/>
+            <a:ext cx="4434840" cy="566928"/>
           </a:xfrm>
           <a:prstGeom prst="rect">
             <a:avLst/>
@@ -2876,7 +2932,7 @@
         <p:spPr>
           <a:xfrm>
             <a:off x="1417320" y="3886200"/>
-            <a:ext cx="4434840" cy="548640"/>
+            <a:ext cx="4434840" cy="566928"/>
           </a:xfrm>
           <a:prstGeom prst="rect">
             <a:avLst/>
@@ -2964,7 +3020,7 @@
         <p:spPr>
           <a:xfrm>
             <a:off x="1417320" y="4489704"/>
-            <a:ext cx="4434840" cy="548640"/>
+            <a:ext cx="4434840" cy="566928"/>
           </a:xfrm>
           <a:prstGeom prst="rect">
             <a:avLst/>
@@ -2988,7 +3044,7 @@
                 <a:ea typeface="Calibri" pitchFamily="34" charset="-122"/>
                 <a:cs typeface="Calibri" pitchFamily="34" charset="-120"/>
               </a:rPr>
-              <a:t>They hesitate to let AI touch the books. They need proof and control before they trust it.</a:t>
+              <a:t>They are careful about letting AI touch the books. They want proof and control before they trust it.</a:t>
             </a:r>
             <a:endParaRPr lang="en-US" sz="1200" dirty="0"/>
           </a:p>
@@ -3003,11 +3059,11 @@
         <p:spPr>
           <a:xfrm>
             <a:off x="822960" y="5166360"/>
-            <a:ext cx="4937760" cy="1005840"/>
+            <a:ext cx="4937760" cy="1051560"/>
           </a:xfrm>
           <a:prstGeom prst="roundRect">
             <a:avLst>
-              <a:gd name="adj" fmla="val 9091"/>
+              <a:gd name="adj" fmla="val 8696"/>
             </a:avLst>
           </a:prstGeom>
           <a:solidFill>
@@ -3069,7 +3125,7 @@
         <p:spPr>
           <a:xfrm>
             <a:off x="1005840" y="5532120"/>
-            <a:ext cx="4572000" cy="594360"/>
+            <a:ext cx="4572000" cy="640080"/>
           </a:xfrm>
           <a:prstGeom prst="rect">
             <a:avLst/>
@@ -3093,7 +3149,7 @@
                 <a:ea typeface="Calibri" pitchFamily="34" charset="-122"/>
                 <a:cs typeface="Calibri" pitchFamily="34" charset="-120"/>
               </a:rPr>
-              <a:t>"Let the agents close the books and flag what matters. I will decide the big things and prove every number."</a:t>
+              <a:t>Finance leaders want agents to close the books and point out what matters. They still want the final say on big decisions and proof for every number.</a:t>
             </a:r>
             <a:endParaRPr lang="en-US" sz="1200" dirty="0"/>
           </a:p>
@@ -3108,11 +3164,11 @@
         <p:spPr>
           <a:xfrm>
             <a:off x="6172200" y="1417320"/>
-            <a:ext cx="5486400" cy="4937760"/>
+            <a:ext cx="5486400" cy="4983480"/>
           </a:xfrm>
           <a:prstGeom prst="roundRect">
             <a:avLst>
-              <a:gd name="adj" fmla="val 2222"/>
+              <a:gd name="adj" fmla="val 1835"/>
             </a:avLst>
           </a:prstGeom>
           <a:solidFill>
@@ -3230,7 +3286,7 @@
         <p:spPr>
           <a:xfrm>
             <a:off x="7223760" y="2011680"/>
-            <a:ext cx="4297680" cy="411480"/>
+            <a:ext cx="4297680" cy="457200"/>
           </a:xfrm>
           <a:prstGeom prst="rect">
             <a:avLst/>
@@ -3254,7 +3310,7 @@
                 <a:ea typeface="Calibri" pitchFamily="34" charset="-122"/>
                 <a:cs typeface="Calibri" pitchFamily="34" charset="-120"/>
               </a:rPr>
-              <a:t>Startups, fintechs, consultants and software firms that build for mid-market companies.</a:t>
+              <a:t>These are startups, fintech firms, consultants and software companies that build products for mid-size businesses.</a:t>
             </a:r>
             <a:endParaRPr lang="en-US" sz="1150" dirty="0"/>
           </a:p>
@@ -3318,7 +3374,7 @@
         <p:spPr>
           <a:xfrm>
             <a:off x="7040880" y="2679192"/>
-            <a:ext cx="4434840" cy="548640"/>
+            <a:ext cx="4434840" cy="566928"/>
           </a:xfrm>
           <a:prstGeom prst="rect">
             <a:avLst/>
@@ -3342,7 +3398,7 @@
                 <a:ea typeface="Calibri" pitchFamily="34" charset="-122"/>
                 <a:cs typeface="Calibri" pitchFamily="34" charset="-120"/>
               </a:rPr>
-              <a:t>Connecting to financial systems is slow and complicated. Every integration feels like a new project.</a:t>
+              <a:t>Connecting to financial systems is slow and complicated. Every new integration feels like a big project.</a:t>
             </a:r>
             <a:endParaRPr lang="en-US" sz="1200" dirty="0"/>
           </a:p>
@@ -3406,7 +3462,7 @@
         <p:spPr>
           <a:xfrm>
             <a:off x="7040880" y="3282696"/>
-            <a:ext cx="4434840" cy="548640"/>
+            <a:ext cx="4434840" cy="566928"/>
           </a:xfrm>
           <a:prstGeom prst="rect">
             <a:avLst/>
@@ -3430,7 +3486,7 @@
                 <a:ea typeface="Calibri" pitchFamily="34" charset="-122"/>
                 <a:cs typeface="Calibri" pitchFamily="34" charset="-120"/>
               </a:rPr>
-              <a:t>Most accounting APIs return thin data and old reports. AI agents need rich and live business context.</a:t>
+              <a:t>Most accounting APIs only return thin data. AI agents need rich and live business information.</a:t>
             </a:r>
             <a:endParaRPr lang="en-US" sz="1200" dirty="0"/>
           </a:p>
@@ -3494,7 +3550,7 @@
         <p:spPr>
           <a:xfrm>
             <a:off x="7040880" y="3886200"/>
-            <a:ext cx="4434840" cy="548640"/>
+            <a:ext cx="4434840" cy="566928"/>
           </a:xfrm>
           <a:prstGeom prst="rect">
             <a:avLst/>
@@ -3518,7 +3574,7 @@
                 <a:ea typeface="Calibri" pitchFamily="34" charset="-122"/>
                 <a:cs typeface="Calibri" pitchFamily="34" charset="-120"/>
               </a:rPr>
-              <a:t>There are few good tools to build and test AI agents safely. Mistakes in finance are costly.</a:t>
+              <a:t>Few good tools exist to build and test AI agents safely. A small mistake in finance can be very costly.</a:t>
             </a:r>
             <a:endParaRPr lang="en-US" sz="1200" dirty="0"/>
           </a:p>
@@ -3582,7 +3638,7 @@
         <p:spPr>
           <a:xfrm>
             <a:off x="7040880" y="4489704"/>
-            <a:ext cx="4434840" cy="548640"/>
+            <a:ext cx="4434840" cy="566928"/>
           </a:xfrm>
           <a:prstGeom prst="rect">
             <a:avLst/>
@@ -3606,7 +3662,7 @@
                 <a:ea typeface="Calibri" pitchFamily="34" charset="-122"/>
                 <a:cs typeface="Calibri" pitchFamily="34" charset="-120"/>
               </a:rPr>
-              <a:t>It is hard to reach customers and earn money. Buyers also struggle to trust an unknown agent.</a:t>
+              <a:t>It is hard to reach customers and earn money. Buyers rarely trust an agent from an unknown company.</a:t>
             </a:r>
             <a:endParaRPr lang="en-US" sz="1200" dirty="0"/>
           </a:p>
@@ -3621,11 +3677,11 @@
         <p:spPr>
           <a:xfrm>
             <a:off x="6446520" y="5166360"/>
-            <a:ext cx="4937760" cy="1005840"/>
+            <a:ext cx="4937760" cy="1051560"/>
           </a:xfrm>
           <a:prstGeom prst="roundRect">
             <a:avLst>
-              <a:gd name="adj" fmla="val 9091"/>
+              <a:gd name="adj" fmla="val 8696"/>
             </a:avLst>
           </a:prstGeom>
           <a:solidFill>
@@ -3687,7 +3743,7 @@
         <p:spPr>
           <a:xfrm>
             <a:off x="6629400" y="5532120"/>
-            <a:ext cx="4572000" cy="594360"/>
+            <a:ext cx="4572000" cy="640080"/>
           </a:xfrm>
           <a:prstGeom prst="rect">
             <a:avLst/>
@@ -3711,7 +3767,7 @@
                 <a:ea typeface="Calibri" pitchFamily="34" charset="-122"/>
                 <a:cs typeface="Calibri" pitchFamily="34" charset="-120"/>
               </a:rPr>
-              <a:t>"Give me rich data through one API and a safe place to test. Then help me reach customers who will pay."</a:t>
+              <a:t>Developers want rich data from one API and a safe place to test. They also want an easy way to reach customers who will pay for their work.</a:t>
             </a:r>
             <a:endParaRPr lang="en-US" sz="1200" dirty="0"/>
           </a:p>
@@ -3758,7 +3814,7 @@
         <p:spPr>
           <a:xfrm>
             <a:off x="548640" y="320040"/>
-            <a:ext cx="7315200" cy="548640"/>
+            <a:ext cx="11064240" cy="548640"/>
           </a:xfrm>
           <a:prstGeom prst="rect">
             <a:avLst/>
@@ -3774,7 +3830,7 @@
               <a:buNone/>
             </a:pPr>
             <a:r>
-              <a:rPr lang="en-US" sz="3000" b="1" dirty="0">
+              <a:rPr lang="en-US" sz="2800" b="1" dirty="0">
                 <a:solidFill>
                   <a:srgbClr val="14213D"/>
                 </a:solidFill>
@@ -3784,7 +3840,7 @@
               </a:rPr>
               <a:t>The solution: IES Helm</a:t>
             </a:r>
-            <a:endParaRPr lang="en-US" sz="3000" dirty="0"/>
+            <a:endParaRPr lang="en-US" sz="2800" dirty="0"/>
           </a:p>
         </p:txBody>
       </p:sp>
@@ -3797,7 +3853,7 @@
         <p:spPr>
           <a:xfrm>
             <a:off x="548640" y="868680"/>
-            <a:ext cx="11064240" cy="502920"/>
+            <a:ext cx="11064240" cy="411480"/>
           </a:xfrm>
           <a:prstGeom prst="rect">
             <a:avLst/>
@@ -3821,7 +3877,7 @@
                 <a:ea typeface="Calibri" pitchFamily="34" charset="-122"/>
                 <a:cs typeface="Calibri" pitchFamily="34" charset="-120"/>
               </a:rPr>
-              <a:t>IES should move from software that records business activity to software that also takes action. Agents, experts and developers all work on the same business data. The finance leader stays in charge.</a:t>
+              <a:t>IES Helm turns IES from software that records business activity into software that also takes action. AI agents, human experts and outside developers all work on the same business data. The finance leader stays in charge the whole time.</a:t>
             </a:r>
             <a:endParaRPr lang="en-US" sz="1300" dirty="0"/>
           </a:p>
@@ -3835,12 +3891,12 @@
         </p:nvSpPr>
         <p:spPr>
           <a:xfrm>
-            <a:off x="548640" y="1417320"/>
-            <a:ext cx="2679192" cy="1463040"/>
+            <a:off x="548640" y="1463040"/>
+            <a:ext cx="2679192" cy="1645920"/>
           </a:xfrm>
           <a:prstGeom prst="roundRect">
             <a:avLst>
-              <a:gd name="adj" fmla="val 7500"/>
+              <a:gd name="adj" fmla="val 5556"/>
             </a:avLst>
           </a:prstGeom>
           <a:solidFill>
@@ -3862,7 +3918,7 @@
         </p:nvSpPr>
         <p:spPr>
           <a:xfrm>
-            <a:off x="731520" y="1554480"/>
+            <a:off x="731520" y="1600200"/>
             <a:ext cx="457200" cy="457200"/>
           </a:xfrm>
           <a:prstGeom prst="ellipse">
@@ -3895,7 +3951,7 @@
         </p:blipFill>
         <p:spPr>
           <a:xfrm>
-            <a:off x="845820" y="1668780"/>
+            <a:off x="845820" y="1714500"/>
             <a:ext cx="228600" cy="228600"/>
           </a:xfrm>
           <a:prstGeom prst="rect">
@@ -3911,8 +3967,8 @@
         </p:nvSpPr>
         <p:spPr>
           <a:xfrm>
-            <a:off x="1298448" y="1600200"/>
-            <a:ext cx="1828800" cy="411480"/>
+            <a:off x="1298448" y="1618488"/>
+            <a:ext cx="1828800" cy="438912"/>
           </a:xfrm>
           <a:prstGeom prst="rect">
             <a:avLst/>
@@ -3928,7 +3984,7 @@
               <a:buNone/>
             </a:pPr>
             <a:r>
-              <a:rPr lang="en-US" sz="1300" b="1" dirty="0">
+              <a:rPr lang="en-US" sz="1250" b="1" dirty="0">
                 <a:solidFill>
                   <a:srgbClr val="1B2433"/>
                 </a:solidFill>
@@ -3938,7 +3994,7 @@
               </a:rPr>
               <a:t>Agents do real work</a:t>
             </a:r>
-            <a:endParaRPr lang="en-US" sz="1300" dirty="0"/>
+            <a:endParaRPr lang="en-US" sz="1250" dirty="0"/>
           </a:p>
         </p:txBody>
       </p:sp>
@@ -3950,8 +4006,8 @@
         </p:nvSpPr>
         <p:spPr>
           <a:xfrm>
-            <a:off x="731520" y="2103120"/>
-            <a:ext cx="2377440" cy="777240"/>
+            <a:off x="731520" y="2148840"/>
+            <a:ext cx="2377440" cy="914400"/>
           </a:xfrm>
           <a:prstGeom prst="rect">
             <a:avLst/>
@@ -3975,7 +4031,7 @@
                 <a:ea typeface="Calibri" pitchFamily="34" charset="-122"/>
                 <a:cs typeface="Calibri" pitchFamily="34" charset="-120"/>
               </a:rPr>
-              <a:t>Agents close the books and chase late payments. They do not just answer questions like a chatbot.</a:t>
+              <a:t>AI agents finish real tasks such as closing the books and chasing late payments. This saves weeks of manual effort every month.</a:t>
             </a:r>
             <a:endParaRPr lang="en-US" sz="1050" dirty="0"/>
           </a:p>
@@ -3989,12 +4045,12 @@
         </p:nvSpPr>
         <p:spPr>
           <a:xfrm>
-            <a:off x="3355848" y="1417320"/>
-            <a:ext cx="2679192" cy="1463040"/>
+            <a:off x="3355848" y="1463040"/>
+            <a:ext cx="2679192" cy="1645920"/>
           </a:xfrm>
           <a:prstGeom prst="roundRect">
             <a:avLst>
-              <a:gd name="adj" fmla="val 7500"/>
+              <a:gd name="adj" fmla="val 5556"/>
             </a:avLst>
           </a:prstGeom>
           <a:solidFill>
@@ -4016,7 +4072,7 @@
         </p:nvSpPr>
         <p:spPr>
           <a:xfrm>
-            <a:off x="3538728" y="1554480"/>
+            <a:off x="3538728" y="1600200"/>
             <a:ext cx="457200" cy="457200"/>
           </a:xfrm>
           <a:prstGeom prst="ellipse">
@@ -4049,7 +4105,7 @@
         </p:blipFill>
         <p:spPr>
           <a:xfrm>
-            <a:off x="3653028" y="1668780"/>
+            <a:off x="3653028" y="1714500"/>
             <a:ext cx="228600" cy="228600"/>
           </a:xfrm>
           <a:prstGeom prst="rect">
@@ -4065,8 +4121,8 @@
         </p:nvSpPr>
         <p:spPr>
           <a:xfrm>
-            <a:off x="4105656" y="1600200"/>
-            <a:ext cx="1828800" cy="411480"/>
+            <a:off x="4105656" y="1618488"/>
+            <a:ext cx="1828800" cy="438912"/>
           </a:xfrm>
           <a:prstGeom prst="rect">
             <a:avLst/>
@@ -4082,7 +4138,7 @@
               <a:buNone/>
             </a:pPr>
             <a:r>
-              <a:rPr lang="en-US" sz="1300" b="1" dirty="0">
+              <a:rPr lang="en-US" sz="1250" b="1" dirty="0">
                 <a:solidFill>
                   <a:srgbClr val="1B2433"/>
                 </a:solidFill>
@@ -4090,9 +4146,9 @@
                 <a:ea typeface="Calibri" pitchFamily="34" charset="-122"/>
                 <a:cs typeface="Calibri" pitchFamily="34" charset="-120"/>
               </a:rPr>
-              <a:t>Experts join when needed</a:t>
-            </a:r>
-            <a:endParaRPr lang="en-US" sz="1300" dirty="0"/>
+              <a:t>Experts step in when needed</a:t>
+            </a:r>
+            <a:endParaRPr lang="en-US" sz="1250" dirty="0"/>
           </a:p>
         </p:txBody>
       </p:sp>
@@ -4104,8 +4160,8 @@
         </p:nvSpPr>
         <p:spPr>
           <a:xfrm>
-            <a:off x="3538728" y="2103120"/>
-            <a:ext cx="2377440" cy="777240"/>
+            <a:off x="3538728" y="2148840"/>
+            <a:ext cx="2377440" cy="914400"/>
           </a:xfrm>
           <a:prstGeom prst="rect">
             <a:avLst/>
@@ -4129,7 +4185,7 @@
                 <a:ea typeface="Calibri" pitchFamily="34" charset="-122"/>
                 <a:cs typeface="Calibri" pitchFamily="34" charset="-120"/>
               </a:rPr>
-              <a:t>Hard questions go to a real human expert. The agent sends a full case file so nobody repeats the story.</a:t>
+              <a:t>Hard or risky questions go to a qualified human expert. The agent sends the full file so nobody has to explain the problem twice.</a:t>
             </a:r>
             <a:endParaRPr lang="en-US" sz="1050" dirty="0"/>
           </a:p>
@@ -4143,12 +4199,12 @@
         </p:nvSpPr>
         <p:spPr>
           <a:xfrm>
-            <a:off x="6163056" y="1417320"/>
-            <a:ext cx="2679192" cy="1463040"/>
+            <a:off x="6163056" y="1463040"/>
+            <a:ext cx="2679192" cy="1645920"/>
           </a:xfrm>
           <a:prstGeom prst="roundRect">
             <a:avLst>
-              <a:gd name="adj" fmla="val 7500"/>
+              <a:gd name="adj" fmla="val 5556"/>
             </a:avLst>
           </a:prstGeom>
           <a:solidFill>
@@ -4170,7 +4226,7 @@
         </p:nvSpPr>
         <p:spPr>
           <a:xfrm>
-            <a:off x="6345936" y="1554480"/>
+            <a:off x="6345936" y="1600200"/>
             <a:ext cx="457200" cy="457200"/>
           </a:xfrm>
           <a:prstGeom prst="ellipse">
@@ -4203,7 +4259,7 @@
         </p:blipFill>
         <p:spPr>
           <a:xfrm>
-            <a:off x="6460236" y="1668780"/>
+            <a:off x="6460236" y="1714500"/>
             <a:ext cx="228600" cy="228600"/>
           </a:xfrm>
           <a:prstGeom prst="rect">
@@ -4219,8 +4275,8 @@
         </p:nvSpPr>
         <p:spPr>
           <a:xfrm>
-            <a:off x="6912864" y="1600200"/>
-            <a:ext cx="1828800" cy="411480"/>
+            <a:off x="6912864" y="1618488"/>
+            <a:ext cx="1828800" cy="438912"/>
           </a:xfrm>
           <a:prstGeom prst="rect">
             <a:avLst/>
@@ -4236,7 +4292,7 @@
               <a:buNone/>
             </a:pPr>
             <a:r>
-              <a:rPr lang="en-US" sz="1300" b="1" dirty="0">
+              <a:rPr lang="en-US" sz="1250" b="1" dirty="0">
                 <a:solidFill>
                   <a:srgbClr val="1B2433"/>
                 </a:solidFill>
@@ -4246,7 +4302,7 @@
               </a:rPr>
               <a:t>Developers build on IES</a:t>
             </a:r>
-            <a:endParaRPr lang="en-US" sz="1300" dirty="0"/>
+            <a:endParaRPr lang="en-US" sz="1250" dirty="0"/>
           </a:p>
         </p:txBody>
       </p:sp>
@@ -4258,8 +4314,8 @@
         </p:nvSpPr>
         <p:spPr>
           <a:xfrm>
-            <a:off x="6345936" y="2103120"/>
-            <a:ext cx="2377440" cy="777240"/>
+            <a:off x="6345936" y="2148840"/>
+            <a:ext cx="2377440" cy="914400"/>
           </a:xfrm>
           <a:prstGeom prst="rect">
             <a:avLst/>
@@ -4283,7 +4339,7 @@
                 <a:ea typeface="Calibri" pitchFamily="34" charset="-122"/>
                 <a:cs typeface="Calibri" pitchFamily="34" charset="-120"/>
               </a:rPr>
-              <a:t>Outside developers build, test and sell their own agents to IES customers through a marketplace.</a:t>
+              <a:t>Outside developers can build, test and sell their own agents to IES customers. This brings many more solutions than one company could build alone.</a:t>
             </a:r>
             <a:endParaRPr lang="en-US" sz="1050" dirty="0"/>
           </a:p>
@@ -4297,12 +4353,12 @@
         </p:nvSpPr>
         <p:spPr>
           <a:xfrm>
-            <a:off x="8970264" y="1417320"/>
-            <a:ext cx="2679192" cy="1463040"/>
+            <a:off x="8970264" y="1463040"/>
+            <a:ext cx="2679192" cy="1645920"/>
           </a:xfrm>
           <a:prstGeom prst="roundRect">
             <a:avLst>
-              <a:gd name="adj" fmla="val 7500"/>
+              <a:gd name="adj" fmla="val 5556"/>
             </a:avLst>
           </a:prstGeom>
           <a:solidFill>
@@ -4324,7 +4380,7 @@
         </p:nvSpPr>
         <p:spPr>
           <a:xfrm>
-            <a:off x="9153144" y="1554480"/>
+            <a:off x="9153144" y="1600200"/>
             <a:ext cx="457200" cy="457200"/>
           </a:xfrm>
           <a:prstGeom prst="ellipse">
@@ -4357,7 +4413,7 @@
         </p:blipFill>
         <p:spPr>
           <a:xfrm>
-            <a:off x="9267444" y="1668780"/>
+            <a:off x="9267444" y="1714500"/>
             <a:ext cx="228600" cy="228600"/>
           </a:xfrm>
           <a:prstGeom prst="rect">
@@ -4373,8 +4429,8 @@
         </p:nvSpPr>
         <p:spPr>
           <a:xfrm>
-            <a:off x="9720072" y="1600200"/>
-            <a:ext cx="1828800" cy="411480"/>
+            <a:off x="9720072" y="1618488"/>
+            <a:ext cx="1828800" cy="438912"/>
           </a:xfrm>
           <a:prstGeom prst="rect">
             <a:avLst/>
@@ -4390,7 +4446,7 @@
               <a:buNone/>
             </a:pPr>
             <a:r>
-              <a:rPr lang="en-US" sz="1300" b="1" dirty="0">
+              <a:rPr lang="en-US" sz="1250" b="1" dirty="0">
                 <a:solidFill>
                   <a:srgbClr val="1B2433"/>
                 </a:solidFill>
@@ -4398,9 +4454,9 @@
                 <a:ea typeface="Calibri" pitchFamily="34" charset="-122"/>
                 <a:cs typeface="Calibri" pitchFamily="34" charset="-120"/>
               </a:rPr>
-              <a:t>Trust you can see</a:t>
-            </a:r>
-            <a:endParaRPr lang="en-US" sz="1300" dirty="0"/>
+              <a:t>Trust that people can see</a:t>
+            </a:r>
+            <a:endParaRPr lang="en-US" sz="1250" dirty="0"/>
           </a:p>
         </p:txBody>
       </p:sp>
@@ -4412,8 +4468,8 @@
         </p:nvSpPr>
         <p:spPr>
           <a:xfrm>
-            <a:off x="9153144" y="2103120"/>
-            <a:ext cx="2377440" cy="777240"/>
+            <a:off x="9153144" y="2148840"/>
+            <a:ext cx="2377440" cy="914400"/>
           </a:xfrm>
           <a:prstGeom prst="rect">
             <a:avLst/>
@@ -4437,7 +4493,7 @@
                 <a:ea typeface="Calibri" pitchFamily="34" charset="-122"/>
                 <a:cs typeface="Calibri" pitchFamily="34" charset="-120"/>
               </a:rPr>
-              <a:t>Every action shows its proof, its confidence, the rule it followed and who approved it.</a:t>
+              <a:t>Every action shows its proof, its confidence level, the rule it followed and the person who approved it. Any posted entry can be undone.</a:t>
             </a:r>
             <a:endParaRPr lang="en-US" sz="1050" dirty="0"/>
           </a:p>
@@ -4451,8 +4507,8 @@
         </p:nvSpPr>
         <p:spPr>
           <a:xfrm>
-            <a:off x="548640" y="3044952"/>
-            <a:ext cx="4572000" cy="320040"/>
+            <a:off x="548640" y="3291840"/>
+            <a:ext cx="5486400" cy="320040"/>
           </a:xfrm>
           <a:prstGeom prst="rect">
             <a:avLst/>
@@ -4476,7 +4532,7 @@
                 <a:ea typeface="Calibri" pitchFamily="34" charset="-122"/>
                 <a:cs typeface="Calibri" pitchFamily="34" charset="-120"/>
               </a:rPr>
-              <a:t>How every agent works</a:t>
+              <a:t>How every agent does its job</a:t>
             </a:r>
             <a:endParaRPr lang="en-US" sz="1400" dirty="0"/>
           </a:p>
@@ -4490,12 +4546,12 @@
         </p:nvSpPr>
         <p:spPr>
           <a:xfrm>
-            <a:off x="548640" y="3401568"/>
-            <a:ext cx="932688" cy="384048"/>
+            <a:off x="548640" y="3657600"/>
+            <a:ext cx="1024128" cy="365760"/>
           </a:xfrm>
           <a:prstGeom prst="roundRect">
             <a:avLst>
-              <a:gd name="adj" fmla="val 19048"/>
+              <a:gd name="adj" fmla="val 20000"/>
             </a:avLst>
           </a:prstGeom>
           <a:solidFill>
@@ -4517,8 +4573,8 @@
         </p:nvSpPr>
         <p:spPr>
           <a:xfrm>
-            <a:off x="548640" y="3401568"/>
-            <a:ext cx="932688" cy="384048"/>
+            <a:off x="548640" y="3657600"/>
+            <a:ext cx="1024128" cy="365760"/>
           </a:xfrm>
           <a:prstGeom prst="rect">
             <a:avLst/>
@@ -4556,24 +4612,24 @@
         </p:nvSpPr>
         <p:spPr>
           <a:xfrm>
-            <a:off x="1481328" y="3401568"/>
-            <a:ext cx="182880" cy="384048"/>
-          </a:xfrm>
-          <a:prstGeom prst="rect">
-            <a:avLst/>
-          </a:prstGeom>
-          <a:noFill/>
-          <a:ln/>
-        </p:spPr>
-        <p:txBody>
-          <a:bodyPr wrap="square" lIns="0" tIns="0" rIns="0" bIns="0" rtlCol="0" anchor="ctr"/>
-          <a:lstStyle/>
-          <a:p>
-            <a:pPr algn="ctr" indent="0" marL="0">
-              <a:buNone/>
-            </a:pPr>
-            <a:r>
-              <a:rPr lang="en-US" sz="1600" dirty="0">
+            <a:off x="548640" y="4114800"/>
+            <a:ext cx="1024128" cy="1005840"/>
+          </a:xfrm>
+          <a:prstGeom prst="rect">
+            <a:avLst/>
+          </a:prstGeom>
+          <a:noFill/>
+          <a:ln/>
+        </p:spPr>
+        <p:txBody>
+          <a:bodyPr wrap="square" lIns="0" tIns="0" rIns="0" bIns="0" rtlCol="0" anchor="t"/>
+          <a:lstStyle/>
+          <a:p>
+            <a:pPr indent="0" marL="0">
+              <a:buNone/>
+            </a:pPr>
+            <a:r>
+              <a:rPr lang="en-US" sz="950" dirty="0">
                 <a:solidFill>
                   <a:srgbClr val="5B6576"/>
                 </a:solidFill>
@@ -4581,9 +4637,9 @@
                 <a:ea typeface="Calibri" pitchFamily="34" charset="-122"/>
                 <a:cs typeface="Calibri" pitchFamily="34" charset="-120"/>
               </a:rPr>
-              <a:t>›</a:t>
-            </a:r>
-            <a:endParaRPr lang="en-US" sz="1600" dirty="0"/>
+              <a:t>It learns what the task is and collects the right data.</a:t>
+            </a:r>
+            <a:endParaRPr lang="en-US" sz="950" dirty="0"/>
           </a:p>
         </p:txBody>
       </p:sp>
@@ -4595,12 +4651,12 @@
         </p:nvSpPr>
         <p:spPr>
           <a:xfrm>
-            <a:off x="1664208" y="3401568"/>
-            <a:ext cx="932688" cy="384048"/>
+            <a:off x="1655064" y="3657600"/>
+            <a:ext cx="1024128" cy="365760"/>
           </a:xfrm>
           <a:prstGeom prst="roundRect">
             <a:avLst>
-              <a:gd name="adj" fmla="val 19048"/>
+              <a:gd name="adj" fmla="val 20000"/>
             </a:avLst>
           </a:prstGeom>
           <a:solidFill>
@@ -4622,8 +4678,8 @@
         </p:nvSpPr>
         <p:spPr>
           <a:xfrm>
-            <a:off x="1664208" y="3401568"/>
-            <a:ext cx="932688" cy="384048"/>
+            <a:off x="1655064" y="3657600"/>
+            <a:ext cx="1024128" cy="365760"/>
           </a:xfrm>
           <a:prstGeom prst="rect">
             <a:avLst/>
@@ -4661,24 +4717,24 @@
         </p:nvSpPr>
         <p:spPr>
           <a:xfrm>
-            <a:off x="2596896" y="3401568"/>
-            <a:ext cx="182880" cy="384048"/>
-          </a:xfrm>
-          <a:prstGeom prst="rect">
-            <a:avLst/>
-          </a:prstGeom>
-          <a:noFill/>
-          <a:ln/>
-        </p:spPr>
-        <p:txBody>
-          <a:bodyPr wrap="square" lIns="0" tIns="0" rIns="0" bIns="0" rtlCol="0" anchor="ctr"/>
-          <a:lstStyle/>
-          <a:p>
-            <a:pPr algn="ctr" indent="0" marL="0">
-              <a:buNone/>
-            </a:pPr>
-            <a:r>
-              <a:rPr lang="en-US" sz="1600" dirty="0">
+            <a:off x="1655064" y="4114800"/>
+            <a:ext cx="1024128" cy="1005840"/>
+          </a:xfrm>
+          <a:prstGeom prst="rect">
+            <a:avLst/>
+          </a:prstGeom>
+          <a:noFill/>
+          <a:ln/>
+        </p:spPr>
+        <p:txBody>
+          <a:bodyPr wrap="square" lIns="0" tIns="0" rIns="0" bIns="0" rtlCol="0" anchor="t"/>
+          <a:lstStyle/>
+          <a:p>
+            <a:pPr indent="0" marL="0">
+              <a:buNone/>
+            </a:pPr>
+            <a:r>
+              <a:rPr lang="en-US" sz="950" dirty="0">
                 <a:solidFill>
                   <a:srgbClr val="5B6576"/>
                 </a:solidFill>
@@ -4686,9 +4742,9 @@
                 <a:ea typeface="Calibri" pitchFamily="34" charset="-122"/>
                 <a:cs typeface="Calibri" pitchFamily="34" charset="-120"/>
               </a:rPr>
-              <a:t>›</a:t>
-            </a:r>
-            <a:endParaRPr lang="en-US" sz="1600" dirty="0"/>
+              <a:t>It looks closely at the data to find what is wrong.</a:t>
+            </a:r>
+            <a:endParaRPr lang="en-US" sz="950" dirty="0"/>
           </a:p>
         </p:txBody>
       </p:sp>
@@ -4700,12 +4756,12 @@
         </p:nvSpPr>
         <p:spPr>
           <a:xfrm>
-            <a:off x="2779776" y="3401568"/>
-            <a:ext cx="932688" cy="384048"/>
+            <a:off x="2761488" y="3657600"/>
+            <a:ext cx="1024128" cy="365760"/>
           </a:xfrm>
           <a:prstGeom prst="roundRect">
             <a:avLst>
-              <a:gd name="adj" fmla="val 19048"/>
+              <a:gd name="adj" fmla="val 20000"/>
             </a:avLst>
           </a:prstGeom>
           <a:solidFill>
@@ -4727,8 +4783,8 @@
         </p:nvSpPr>
         <p:spPr>
           <a:xfrm>
-            <a:off x="2779776" y="3401568"/>
-            <a:ext cx="932688" cy="384048"/>
+            <a:off x="2761488" y="3657600"/>
+            <a:ext cx="1024128" cy="365760"/>
           </a:xfrm>
           <a:prstGeom prst="rect">
             <a:avLst/>
@@ -4766,24 +4822,24 @@
         </p:nvSpPr>
         <p:spPr>
           <a:xfrm>
-            <a:off x="3712464" y="3401568"/>
-            <a:ext cx="182880" cy="384048"/>
-          </a:xfrm>
-          <a:prstGeom prst="rect">
-            <a:avLst/>
-          </a:prstGeom>
-          <a:noFill/>
-          <a:ln/>
-        </p:spPr>
-        <p:txBody>
-          <a:bodyPr wrap="square" lIns="0" tIns="0" rIns="0" bIns="0" rtlCol="0" anchor="ctr"/>
-          <a:lstStyle/>
-          <a:p>
-            <a:pPr algn="ctr" indent="0" marL="0">
-              <a:buNone/>
-            </a:pPr>
-            <a:r>
-              <a:rPr lang="en-US" sz="1600" dirty="0">
+            <a:off x="2761488" y="4114800"/>
+            <a:ext cx="1024128" cy="1005840"/>
+          </a:xfrm>
+          <a:prstGeom prst="rect">
+            <a:avLst/>
+          </a:prstGeom>
+          <a:noFill/>
+          <a:ln/>
+        </p:spPr>
+        <p:txBody>
+          <a:bodyPr wrap="square" lIns="0" tIns="0" rIns="0" bIns="0" rtlCol="0" anchor="t"/>
+          <a:lstStyle/>
+          <a:p>
+            <a:pPr indent="0" marL="0">
+              <a:buNone/>
+            </a:pPr>
+            <a:r>
+              <a:rPr lang="en-US" sz="950" dirty="0">
                 <a:solidFill>
                   <a:srgbClr val="5B6576"/>
                 </a:solidFill>
@@ -4791,9 +4847,9 @@
                 <a:ea typeface="Calibri" pitchFamily="34" charset="-122"/>
                 <a:cs typeface="Calibri" pitchFamily="34" charset="-120"/>
               </a:rPr>
-              <a:t>›</a:t>
-            </a:r>
-            <a:endParaRPr lang="en-US" sz="1600" dirty="0"/>
+              <a:t>It picks a fix that follows the rules of the company.</a:t>
+            </a:r>
+            <a:endParaRPr lang="en-US" sz="950" dirty="0"/>
           </a:p>
         </p:txBody>
       </p:sp>
@@ -4805,12 +4861,12 @@
         </p:nvSpPr>
         <p:spPr>
           <a:xfrm>
-            <a:off x="3895344" y="3401568"/>
-            <a:ext cx="932688" cy="384048"/>
+            <a:off x="3867912" y="3657600"/>
+            <a:ext cx="1024128" cy="365760"/>
           </a:xfrm>
           <a:prstGeom prst="roundRect">
             <a:avLst>
-              <a:gd name="adj" fmla="val 19048"/>
+              <a:gd name="adj" fmla="val 20000"/>
             </a:avLst>
           </a:prstGeom>
           <a:solidFill>
@@ -4832,8 +4888,8 @@
         </p:nvSpPr>
         <p:spPr>
           <a:xfrm>
-            <a:off x="3895344" y="3401568"/>
-            <a:ext cx="932688" cy="384048"/>
+            <a:off x="3867912" y="3657600"/>
+            <a:ext cx="1024128" cy="365760"/>
           </a:xfrm>
           <a:prstGeom prst="rect">
             <a:avLst/>
@@ -4871,24 +4927,24 @@
         </p:nvSpPr>
         <p:spPr>
           <a:xfrm>
-            <a:off x="4828032" y="3401568"/>
-            <a:ext cx="182880" cy="384048"/>
-          </a:xfrm>
-          <a:prstGeom prst="rect">
-            <a:avLst/>
-          </a:prstGeom>
-          <a:noFill/>
-          <a:ln/>
-        </p:spPr>
-        <p:txBody>
-          <a:bodyPr wrap="square" lIns="0" tIns="0" rIns="0" bIns="0" rtlCol="0" anchor="ctr"/>
-          <a:lstStyle/>
-          <a:p>
-            <a:pPr algn="ctr" indent="0" marL="0">
-              <a:buNone/>
-            </a:pPr>
-            <a:r>
-              <a:rPr lang="en-US" sz="1600" dirty="0">
+            <a:off x="3867912" y="4114800"/>
+            <a:ext cx="1024128" cy="1005840"/>
+          </a:xfrm>
+          <a:prstGeom prst="rect">
+            <a:avLst/>
+          </a:prstGeom>
+          <a:noFill/>
+          <a:ln/>
+        </p:spPr>
+        <p:txBody>
+          <a:bodyPr wrap="square" lIns="0" tIns="0" rIns="0" bIns="0" rtlCol="0" anchor="t"/>
+          <a:lstStyle/>
+          <a:p>
+            <a:pPr indent="0" marL="0">
+              <a:buNone/>
+            </a:pPr>
+            <a:r>
+              <a:rPr lang="en-US" sz="950" dirty="0">
                 <a:solidFill>
                   <a:srgbClr val="5B6576"/>
                 </a:solidFill>
@@ -4896,9 +4952,9 @@
                 <a:ea typeface="Calibri" pitchFamily="34" charset="-122"/>
                 <a:cs typeface="Calibri" pitchFamily="34" charset="-120"/>
               </a:rPr>
-              <a:t>›</a:t>
-            </a:r>
-            <a:endParaRPr lang="en-US" sz="1600" dirty="0"/>
+              <a:t>It does the task or prepares it for a person to approve.</a:t>
+            </a:r>
+            <a:endParaRPr lang="en-US" sz="950" dirty="0"/>
           </a:p>
         </p:txBody>
       </p:sp>
@@ -4910,12 +4966,12 @@
         </p:nvSpPr>
         <p:spPr>
           <a:xfrm>
-            <a:off x="5010912" y="3401568"/>
-            <a:ext cx="932688" cy="384048"/>
+            <a:off x="4974336" y="3657600"/>
+            <a:ext cx="1024128" cy="365760"/>
           </a:xfrm>
           <a:prstGeom prst="roundRect">
             <a:avLst>
-              <a:gd name="adj" fmla="val 19048"/>
+              <a:gd name="adj" fmla="val 20000"/>
             </a:avLst>
           </a:prstGeom>
           <a:solidFill>
@@ -4937,8 +4993,8 @@
         </p:nvSpPr>
         <p:spPr>
           <a:xfrm>
-            <a:off x="5010912" y="3401568"/>
-            <a:ext cx="932688" cy="384048"/>
+            <a:off x="4974336" y="3657600"/>
+            <a:ext cx="1024128" cy="365760"/>
           </a:xfrm>
           <a:prstGeom prst="rect">
             <a:avLst/>
@@ -4976,8 +5032,8 @@
         </p:nvSpPr>
         <p:spPr>
           <a:xfrm>
-            <a:off x="548640" y="3886200"/>
-            <a:ext cx="5394960" cy="502920"/>
+            <a:off x="4974336" y="4114800"/>
+            <a:ext cx="1024128" cy="1005840"/>
           </a:xfrm>
           <a:prstGeom prst="rect">
             <a:avLst/>
@@ -4993,6 +5049,84 @@
               <a:buNone/>
             </a:pPr>
             <a:r>
+              <a:rPr lang="en-US" sz="950" dirty="0">
+                <a:solidFill>
+                  <a:srgbClr val="5B6576"/>
+                </a:solidFill>
+                <a:latin typeface="Calibri" pitchFamily="34" charset="0"/>
+                <a:ea typeface="Calibri" pitchFamily="34" charset="-122"/>
+                <a:cs typeface="Calibri" pitchFamily="34" charset="-120"/>
+              </a:rPr>
+              <a:t>It checks that the result is correct and saves a record.</a:t>
+            </a:r>
+            <a:endParaRPr lang="en-US" sz="950" dirty="0"/>
+          </a:p>
+        </p:txBody>
+      </p:sp>
+      <p:sp>
+        <p:nvSpPr>
+          <p:cNvPr id="40" name="Text 34"/>
+          <p:cNvSpPr txBox="1"/>
+          <p:nvPr/>
+        </p:nvSpPr>
+        <p:spPr>
+          <a:xfrm>
+            <a:off x="548640" y="5257800"/>
+            <a:ext cx="5440680" cy="548640"/>
+          </a:xfrm>
+          <a:prstGeom prst="rect">
+            <a:avLst/>
+          </a:prstGeom>
+          <a:noFill/>
+          <a:ln/>
+        </p:spPr>
+        <p:txBody>
+          <a:bodyPr wrap="square" lIns="0" tIns="0" rIns="0" bIns="0" rtlCol="0" anchor="t"/>
+          <a:lstStyle/>
+          <a:p>
+            <a:pPr indent="0" marL="0">
+              <a:buNone/>
+            </a:pPr>
+            <a:r>
+              <a:rPr lang="en-US" sz="1100" i="1" dirty="0">
+                <a:solidFill>
+                  <a:srgbClr val="1B2433"/>
+                </a:solidFill>
+                <a:latin typeface="Calibri" pitchFamily="34" charset="0"/>
+                <a:ea typeface="Calibri" pitchFamily="34" charset="-122"/>
+                <a:cs typeface="Calibri" pitchFamily="34" charset="-120"/>
+              </a:rPr>
+              <a:t>This five step pattern is what makes it an agent. A chatbot only answers questions. An agent finishes the work and proves what it did.</a:t>
+            </a:r>
+            <a:endParaRPr lang="en-US" sz="1100" dirty="0"/>
+          </a:p>
+        </p:txBody>
+      </p:sp>
+      <p:sp>
+        <p:nvSpPr>
+          <p:cNvPr id="41" name="Text 35"/>
+          <p:cNvSpPr txBox="1"/>
+          <p:nvPr/>
+        </p:nvSpPr>
+        <p:spPr>
+          <a:xfrm>
+            <a:off x="548640" y="5897880"/>
+            <a:ext cx="5440680" cy="548640"/>
+          </a:xfrm>
+          <a:prstGeom prst="rect">
+            <a:avLst/>
+          </a:prstGeom>
+          <a:noFill/>
+          <a:ln/>
+        </p:spPr>
+        <p:txBody>
+          <a:bodyPr wrap="square" lIns="0" tIns="0" rIns="0" bIns="0" rtlCol="0" anchor="t"/>
+          <a:lstStyle/>
+          <a:p>
+            <a:pPr indent="0" marL="0">
+              <a:buNone/>
+            </a:pPr>
+            <a:r>
               <a:rPr lang="en-US" sz="1100" dirty="0">
                 <a:solidFill>
                   <a:srgbClr val="5B6576"/>
@@ -5001,7 +5135,7 @@
                 <a:ea typeface="Calibri" pitchFamily="34" charset="-122"/>
                 <a:cs typeface="Calibri" pitchFamily="34" charset="-120"/>
               </a:rPr>
-              <a:t>The agent reads the data and finds the problem. It follows company rules to pick an action. Then it checks that the result is correct.</a:t>
+              <a:t>Behind the screens sits one shared base of finance, payroll and sales data. Every agent reads from it, so each one sees the full picture of the business.</a:t>
             </a:r>
             <a:endParaRPr lang="en-US" sz="1100" dirty="0"/>
           </a:p>
@@ -5009,18 +5143,57 @@
       </p:sp>
       <p:sp>
         <p:nvSpPr>
-          <p:cNvPr id="40" name="Shape 34"/>
+          <p:cNvPr id="42" name="Text 36"/>
+          <p:cNvSpPr txBox="1"/>
+          <p:nvPr/>
+        </p:nvSpPr>
+        <p:spPr>
+          <a:xfrm>
+            <a:off x="6263640" y="3291840"/>
+            <a:ext cx="5394960" cy="320040"/>
+          </a:xfrm>
+          <a:prstGeom prst="rect">
+            <a:avLst/>
+          </a:prstGeom>
+          <a:noFill/>
+          <a:ln/>
+        </p:spPr>
+        <p:txBody>
+          <a:bodyPr wrap="square" lIns="0" tIns="0" rIns="0" bIns="0" rtlCol="0" anchor="t"/>
+          <a:lstStyle/>
+          <a:p>
+            <a:pPr indent="0" marL="0">
+              <a:buNone/>
+            </a:pPr>
+            <a:r>
+              <a:rPr lang="en-US" sz="1400" b="1" dirty="0">
+                <a:solidFill>
+                  <a:srgbClr val="14213D"/>
+                </a:solidFill>
+                <a:latin typeface="Calibri" pitchFamily="34" charset="0"/>
+                <a:ea typeface="Calibri" pitchFamily="34" charset="-122"/>
+                <a:cs typeface="Calibri" pitchFamily="34" charset="-120"/>
+              </a:rPr>
+              <a:t>The leader decides how much freedom the AI gets</a:t>
+            </a:r>
+            <a:endParaRPr lang="en-US" sz="1400" dirty="0"/>
+          </a:p>
+        </p:txBody>
+      </p:sp>
+      <p:sp>
+        <p:nvSpPr>
+          <p:cNvPr id="43" name="Shape 37"/>
           <p:cNvSpPr/>
           <p:nvPr/>
         </p:nvSpPr>
         <p:spPr>
           <a:xfrm>
-            <a:off x="548640" y="4480560"/>
-            <a:ext cx="5394960" cy="457200"/>
+            <a:off x="6263640" y="3657600"/>
+            <a:ext cx="5394960" cy="621792"/>
           </a:xfrm>
           <a:prstGeom prst="roundRect">
             <a:avLst>
-              <a:gd name="adj" fmla="val 16000"/>
+              <a:gd name="adj" fmla="val 11765"/>
             </a:avLst>
           </a:prstGeom>
           <a:solidFill>
@@ -5036,14 +5209,14 @@
       </p:sp>
       <p:sp>
         <p:nvSpPr>
-          <p:cNvPr id="41" name="Text 35"/>
-          <p:cNvSpPr txBox="1"/>
-          <p:nvPr/>
-        </p:nvSpPr>
-        <p:spPr>
-          <a:xfrm>
-            <a:off x="685800" y="4480560"/>
-            <a:ext cx="1005840" cy="457200"/>
+          <p:cNvPr id="44" name="Text 38"/>
+          <p:cNvSpPr txBox="1"/>
+          <p:nvPr/>
+        </p:nvSpPr>
+        <p:spPr>
+          <a:xfrm>
+            <a:off x="6400800" y="3657600"/>
+            <a:ext cx="1051560" cy="621792"/>
           </a:xfrm>
           <a:prstGeom prst="rect">
             <a:avLst/>
@@ -5059,7 +5232,7 @@
               <a:buNone/>
             </a:pPr>
             <a:r>
-              <a:rPr lang="en-US" sz="1200" b="1" dirty="0">
+              <a:rPr lang="en-US" sz="1250" b="1" dirty="0">
                 <a:solidFill>
                   <a:srgbClr val="1B2433"/>
                 </a:solidFill>
@@ -5069,20 +5242,20 @@
               </a:rPr>
               <a:t>Assist</a:t>
             </a:r>
-            <a:endParaRPr lang="en-US" sz="1200" dirty="0"/>
-          </a:p>
-        </p:txBody>
-      </p:sp>
-      <p:sp>
-        <p:nvSpPr>
-          <p:cNvPr id="42" name="Text 36"/>
-          <p:cNvSpPr txBox="1"/>
-          <p:nvPr/>
-        </p:nvSpPr>
-        <p:spPr>
-          <a:xfrm>
-            <a:off x="1737360" y="4480560"/>
-            <a:ext cx="4114800" cy="457200"/>
+            <a:endParaRPr lang="en-US" sz="1250" dirty="0"/>
+          </a:p>
+        </p:txBody>
+      </p:sp>
+      <p:sp>
+        <p:nvSpPr>
+          <p:cNvPr id="45" name="Text 39"/>
+          <p:cNvSpPr txBox="1"/>
+          <p:nvPr/>
+        </p:nvSpPr>
+        <p:spPr>
+          <a:xfrm>
+            <a:off x="7452360" y="3657600"/>
+            <a:ext cx="4114800" cy="621792"/>
           </a:xfrm>
           <a:prstGeom prst="rect">
             <a:avLst/>
@@ -5098,7 +5271,7 @@
               <a:buNone/>
             </a:pPr>
             <a:r>
-              <a:rPr lang="en-US" sz="1100" dirty="0">
+              <a:rPr lang="en-US" sz="1050" dirty="0">
                 <a:solidFill>
                   <a:srgbClr val="1B2433"/>
                 </a:solidFill>
@@ -5106,26 +5279,26 @@
                 <a:ea typeface="Calibri" pitchFamily="34" charset="-122"/>
                 <a:cs typeface="Calibri" pitchFamily="34" charset="-120"/>
               </a:rPr>
-              <a:t>The AI only suggests. A person does every step.</a:t>
-            </a:r>
-            <a:endParaRPr lang="en-US" sz="1100" dirty="0"/>
-          </a:p>
-        </p:txBody>
-      </p:sp>
-      <p:sp>
-        <p:nvSpPr>
-          <p:cNvPr id="43" name="Shape 37"/>
+              <a:t>The AI studies the problem and suggests an answer. A person does every step and makes every change.</a:t>
+            </a:r>
+            <a:endParaRPr lang="en-US" sz="1050" dirty="0"/>
+          </a:p>
+        </p:txBody>
+      </p:sp>
+      <p:sp>
+        <p:nvSpPr>
+          <p:cNvPr id="46" name="Shape 40"/>
           <p:cNvSpPr/>
           <p:nvPr/>
         </p:nvSpPr>
         <p:spPr>
           <a:xfrm>
-            <a:off x="548640" y="4992624"/>
-            <a:ext cx="5394960" cy="457200"/>
+            <a:off x="6263640" y="4352544"/>
+            <a:ext cx="5394960" cy="621792"/>
           </a:xfrm>
           <a:prstGeom prst="roundRect">
             <a:avLst>
-              <a:gd name="adj" fmla="val 16000"/>
+              <a:gd name="adj" fmla="val 11765"/>
             </a:avLst>
           </a:prstGeom>
           <a:solidFill>
@@ -5141,14 +5314,14 @@
       </p:sp>
       <p:sp>
         <p:nvSpPr>
-          <p:cNvPr id="44" name="Text 38"/>
-          <p:cNvSpPr txBox="1"/>
-          <p:nvPr/>
-        </p:nvSpPr>
-        <p:spPr>
-          <a:xfrm>
-            <a:off x="685800" y="4992624"/>
-            <a:ext cx="1005840" cy="457200"/>
+          <p:cNvPr id="47" name="Text 41"/>
+          <p:cNvSpPr txBox="1"/>
+          <p:nvPr/>
+        </p:nvSpPr>
+        <p:spPr>
+          <a:xfrm>
+            <a:off x="6400800" y="4352544"/>
+            <a:ext cx="1051560" cy="621792"/>
           </a:xfrm>
           <a:prstGeom prst="rect">
             <a:avLst/>
@@ -5164,7 +5337,7 @@
               <a:buNone/>
             </a:pPr>
             <a:r>
-              <a:rPr lang="en-US" sz="1200" b="1" dirty="0">
+              <a:rPr lang="en-US" sz="1250" b="1" dirty="0">
                 <a:solidFill>
                   <a:srgbClr val="1B2433"/>
                 </a:solidFill>
@@ -5174,20 +5347,20 @@
               </a:rPr>
               <a:t>Approve</a:t>
             </a:r>
-            <a:endParaRPr lang="en-US" sz="1200" dirty="0"/>
-          </a:p>
-        </p:txBody>
-      </p:sp>
-      <p:sp>
-        <p:nvSpPr>
-          <p:cNvPr id="45" name="Text 39"/>
-          <p:cNvSpPr txBox="1"/>
-          <p:nvPr/>
-        </p:nvSpPr>
-        <p:spPr>
-          <a:xfrm>
-            <a:off x="1737360" y="4992624"/>
-            <a:ext cx="4114800" cy="457200"/>
+            <a:endParaRPr lang="en-US" sz="1250" dirty="0"/>
+          </a:p>
+        </p:txBody>
+      </p:sp>
+      <p:sp>
+        <p:nvSpPr>
+          <p:cNvPr id="48" name="Text 42"/>
+          <p:cNvSpPr txBox="1"/>
+          <p:nvPr/>
+        </p:nvSpPr>
+        <p:spPr>
+          <a:xfrm>
+            <a:off x="7452360" y="4352544"/>
+            <a:ext cx="4114800" cy="621792"/>
           </a:xfrm>
           <a:prstGeom prst="rect">
             <a:avLst/>
@@ -5203,7 +5376,7 @@
               <a:buNone/>
             </a:pPr>
             <a:r>
-              <a:rPr lang="en-US" sz="1100" dirty="0">
+              <a:rPr lang="en-US" sz="1050" dirty="0">
                 <a:solidFill>
                   <a:srgbClr val="1B2433"/>
                 </a:solidFill>
@@ -5211,26 +5384,26 @@
                 <a:ea typeface="Calibri" pitchFamily="34" charset="-122"/>
                 <a:cs typeface="Calibri" pitchFamily="34" charset="-120"/>
               </a:rPr>
-              <a:t>The AI prepares the work. Nothing happens until a person says yes.</a:t>
-            </a:r>
-            <a:endParaRPr lang="en-US" sz="1100" dirty="0"/>
-          </a:p>
-        </p:txBody>
-      </p:sp>
-      <p:sp>
-        <p:nvSpPr>
-          <p:cNvPr id="46" name="Shape 40"/>
+              <a:t>The AI prepares the full piece of work with its proof. Nothing is posted until a person clicks approve.</a:t>
+            </a:r>
+            <a:endParaRPr lang="en-US" sz="1050" dirty="0"/>
+          </a:p>
+        </p:txBody>
+      </p:sp>
+      <p:sp>
+        <p:nvSpPr>
+          <p:cNvPr id="49" name="Shape 43"/>
           <p:cNvSpPr/>
           <p:nvPr/>
         </p:nvSpPr>
         <p:spPr>
           <a:xfrm>
-            <a:off x="548640" y="5504688"/>
-            <a:ext cx="5394960" cy="457200"/>
+            <a:off x="6263640" y="5047488"/>
+            <a:ext cx="5394960" cy="621792"/>
           </a:xfrm>
           <a:prstGeom prst="roundRect">
             <a:avLst>
-              <a:gd name="adj" fmla="val 16000"/>
+              <a:gd name="adj" fmla="val 11765"/>
             </a:avLst>
           </a:prstGeom>
           <a:solidFill>
@@ -5246,14 +5419,14 @@
       </p:sp>
       <p:sp>
         <p:nvSpPr>
-          <p:cNvPr id="47" name="Text 41"/>
-          <p:cNvSpPr txBox="1"/>
-          <p:nvPr/>
-        </p:nvSpPr>
-        <p:spPr>
-          <a:xfrm>
-            <a:off x="685800" y="5504688"/>
-            <a:ext cx="1005840" cy="457200"/>
+          <p:cNvPr id="50" name="Text 44"/>
+          <p:cNvSpPr txBox="1"/>
+          <p:nvPr/>
+        </p:nvSpPr>
+        <p:spPr>
+          <a:xfrm>
+            <a:off x="6400800" y="5047488"/>
+            <a:ext cx="1051560" cy="621792"/>
           </a:xfrm>
           <a:prstGeom prst="rect">
             <a:avLst/>
@@ -5269,7 +5442,7 @@
               <a:buNone/>
             </a:pPr>
             <a:r>
-              <a:rPr lang="en-US" sz="1200" b="1" dirty="0">
+              <a:rPr lang="en-US" sz="1250" b="1" dirty="0">
                 <a:solidFill>
                   <a:srgbClr val="1B2433"/>
                 </a:solidFill>
@@ -5279,20 +5452,20 @@
               </a:rPr>
               <a:t>Autopilot</a:t>
             </a:r>
-            <a:endParaRPr lang="en-US" sz="1200" dirty="0"/>
-          </a:p>
-        </p:txBody>
-      </p:sp>
-      <p:sp>
-        <p:nvSpPr>
-          <p:cNvPr id="48" name="Text 42"/>
-          <p:cNvSpPr txBox="1"/>
-          <p:nvPr/>
-        </p:nvSpPr>
-        <p:spPr>
-          <a:xfrm>
-            <a:off x="1737360" y="5504688"/>
-            <a:ext cx="4114800" cy="457200"/>
+            <a:endParaRPr lang="en-US" sz="1250" dirty="0"/>
+          </a:p>
+        </p:txBody>
+      </p:sp>
+      <p:sp>
+        <p:nvSpPr>
+          <p:cNvPr id="51" name="Text 45"/>
+          <p:cNvSpPr txBox="1"/>
+          <p:nvPr/>
+        </p:nvSpPr>
+        <p:spPr>
+          <a:xfrm>
+            <a:off x="7452360" y="5047488"/>
+            <a:ext cx="4114800" cy="621792"/>
           </a:xfrm>
           <a:prstGeom prst="rect">
             <a:avLst/>
@@ -5308,7 +5481,7 @@
               <a:buNone/>
             </a:pPr>
             <a:r>
-              <a:rPr lang="en-US" sz="1100" dirty="0">
+              <a:rPr lang="en-US" sz="1050" dirty="0">
                 <a:solidFill>
                   <a:srgbClr val="1B2433"/>
                 </a:solidFill>
@@ -5316,46 +5489,7 @@
                 <a:ea typeface="Calibri" pitchFamily="34" charset="-122"/>
                 <a:cs typeface="Calibri" pitchFamily="34" charset="-120"/>
               </a:rPr>
-              <a:t>The AI finishes small and safe tasks alone. Risky ones still go to a person.</a:t>
-            </a:r>
-            <a:endParaRPr lang="en-US" sz="1100" dirty="0"/>
-          </a:p>
-        </p:txBody>
-      </p:sp>
-      <p:sp>
-        <p:nvSpPr>
-          <p:cNvPr id="49" name="Text 43"/>
-          <p:cNvSpPr txBox="1"/>
-          <p:nvPr/>
-        </p:nvSpPr>
-        <p:spPr>
-          <a:xfrm>
-            <a:off x="548640" y="6035040"/>
-            <a:ext cx="5394960" cy="457200"/>
-          </a:xfrm>
-          <a:prstGeom prst="rect">
-            <a:avLst/>
-          </a:prstGeom>
-          <a:noFill/>
-          <a:ln/>
-        </p:spPr>
-        <p:txBody>
-          <a:bodyPr wrap="square" lIns="0" tIns="0" rIns="0" bIns="0" rtlCol="0" anchor="t"/>
-          <a:lstStyle/>
-          <a:p>
-            <a:pPr indent="0" marL="0">
-              <a:buNone/>
-            </a:pPr>
-            <a:r>
-              <a:rPr lang="en-US" sz="1050" i="1" dirty="0">
-                <a:solidFill>
-                  <a:srgbClr val="5B6576"/>
-                </a:solidFill>
-                <a:latin typeface="Calibri" pitchFamily="34" charset="0"/>
-                <a:ea typeface="Calibri" pitchFamily="34" charset="-122"/>
-                <a:cs typeface="Calibri" pitchFamily="34" charset="-120"/>
-              </a:rPr>
-              <a:t>The AI acts alone only when risk is low, confidence is 95% or more and the amount is $10,000 or less. Below 70% confidence it must ask a person.</a:t>
+              <a:t>The AI finishes small and safe tasks by itself. Anything risky or unclear still goes to a person.</a:t>
             </a:r>
             <a:endParaRPr lang="en-US" sz="1050" dirty="0"/>
           </a:p>
@@ -5363,65 +5497,26 @@
       </p:sp>
       <p:sp>
         <p:nvSpPr>
-          <p:cNvPr id="50" name="Text 44"/>
-          <p:cNvSpPr txBox="1"/>
-          <p:nvPr/>
-        </p:nvSpPr>
-        <p:spPr>
-          <a:xfrm>
-            <a:off x="6263640" y="3044952"/>
-            <a:ext cx="5394960" cy="320040"/>
-          </a:xfrm>
-          <a:prstGeom prst="rect">
-            <a:avLst/>
-          </a:prstGeom>
-          <a:noFill/>
-          <a:ln/>
-        </p:spPr>
-        <p:txBody>
-          <a:bodyPr wrap="square" lIns="0" tIns="0" rIns="0" bIns="0" rtlCol="0" anchor="t"/>
-          <a:lstStyle/>
-          <a:p>
-            <a:pPr indent="0" marL="0">
-              <a:buNone/>
-            </a:pPr>
-            <a:r>
-              <a:rPr lang="en-US" sz="1400" b="1" dirty="0">
-                <a:solidFill>
-                  <a:srgbClr val="14213D"/>
-                </a:solidFill>
-                <a:latin typeface="Calibri" pitchFamily="34" charset="0"/>
-                <a:ea typeface="Calibri" pitchFamily="34" charset="-122"/>
-                <a:cs typeface="Calibri" pitchFamily="34" charset="-120"/>
-              </a:rPr>
-              <a:t>What the working prototype shows</a:t>
-            </a:r>
-            <a:endParaRPr lang="en-US" sz="1400" dirty="0"/>
-          </a:p>
-        </p:txBody>
-      </p:sp>
-      <p:sp>
-        <p:nvSpPr>
-          <p:cNvPr id="51" name="Shape 45"/>
+          <p:cNvPr id="52" name="Shape 46"/>
           <p:cNvSpPr/>
           <p:nvPr/>
         </p:nvSpPr>
         <p:spPr>
           <a:xfrm>
-            <a:off x="6263640" y="3401568"/>
-            <a:ext cx="2651760" cy="1033272"/>
+            <a:off x="6263640" y="5806440"/>
+            <a:ext cx="5394960" cy="777240"/>
           </a:xfrm>
           <a:prstGeom prst="roundRect">
             <a:avLst>
-              <a:gd name="adj" fmla="val 10619"/>
+              <a:gd name="adj" fmla="val 9412"/>
             </a:avLst>
           </a:prstGeom>
           <a:solidFill>
-            <a:srgbClr val="F6F8FB"/>
+            <a:srgbClr val="14213D"/>
           </a:solidFill>
-          <a:ln w="9525">
+          <a:ln w="12700">
             <a:solidFill>
-              <a:srgbClr val="F6F8FB"/>
+              <a:srgbClr val="14213D"/>
             </a:solidFill>
             <a:prstDash val="solid"/>
           </a:ln>
@@ -5429,63 +5524,14 @@
       </p:sp>
       <p:sp>
         <p:nvSpPr>
-          <p:cNvPr id="52" name="Shape 46"/>
-          <p:cNvSpPr/>
-          <p:nvPr/>
-        </p:nvSpPr>
-        <p:spPr>
-          <a:xfrm>
-            <a:off x="6373368" y="3511296"/>
-            <a:ext cx="329184" cy="329184"/>
-          </a:xfrm>
-          <a:prstGeom prst="ellipse">
-            <a:avLst/>
-          </a:prstGeom>
-          <a:solidFill>
-            <a:srgbClr val="FFFFFF"/>
-          </a:solidFill>
-          <a:ln w="12700">
-            <a:solidFill>
-              <a:srgbClr val="FFFFFF"/>
-            </a:solidFill>
-            <a:prstDash val="solid"/>
-          </a:ln>
-        </p:spPr>
-      </p:sp>
-      <p:pic>
-        <p:nvPicPr>
-          <p:cNvPr id="53" name="Image 4" descr="preencoded.png">    </p:cNvPr>
-          <p:cNvPicPr>
-            <a:picLocks noChangeAspect="1"/>
-          </p:cNvPicPr>
-          <p:nvPr/>
-        </p:nvPicPr>
-        <p:blipFill>
-          <a:blip r:embed="rId5"/>
-          <a:stretch>
-            <a:fillRect/>
-          </a:stretch>
-        </p:blipFill>
-        <p:spPr>
-          <a:xfrm>
-            <a:off x="6455664" y="3593592"/>
-            <a:ext cx="164592" cy="164592"/>
-          </a:xfrm>
-          <a:prstGeom prst="rect">
-            <a:avLst/>
-          </a:prstGeom>
-        </p:spPr>
-      </p:pic>
-      <p:sp>
-        <p:nvSpPr>
-          <p:cNvPr id="54" name="Text 47"/>
-          <p:cNvSpPr txBox="1"/>
-          <p:nvPr/>
-        </p:nvSpPr>
-        <p:spPr>
-          <a:xfrm>
-            <a:off x="6775704" y="3511296"/>
-            <a:ext cx="2057400" cy="329184"/>
+          <p:cNvPr id="53" name="Text 47"/>
+          <p:cNvSpPr txBox="1"/>
+          <p:nvPr/>
+        </p:nvSpPr>
+        <p:spPr>
+          <a:xfrm>
+            <a:off x="6446520" y="5806440"/>
+            <a:ext cx="5074920" cy="777240"/>
           </a:xfrm>
           <a:prstGeom prst="rect">
             <a:avLst/>
@@ -5501,826 +5547,17 @@
               <a:buNone/>
             </a:pPr>
             <a:r>
-              <a:rPr lang="en-US" sz="1150" b="1" dirty="0">
-                <a:solidFill>
-                  <a:srgbClr val="1B2433"/>
-                </a:solidFill>
-                <a:latin typeface="Calibri" pitchFamily="34" charset="0"/>
-                <a:ea typeface="Calibri" pitchFamily="34" charset="-122"/>
-                <a:cs typeface="Calibri" pitchFamily="34" charset="-120"/>
-              </a:rPr>
-              <a:t>Morning brief</a:t>
-            </a:r>
-            <a:endParaRPr lang="en-US" sz="1150" dirty="0"/>
-          </a:p>
-        </p:txBody>
-      </p:sp>
-      <p:sp>
-        <p:nvSpPr>
-          <p:cNvPr id="55" name="Text 48"/>
-          <p:cNvSpPr txBox="1"/>
-          <p:nvPr/>
-        </p:nvSpPr>
-        <p:spPr>
-          <a:xfrm>
-            <a:off x="6391656" y="3840480"/>
-            <a:ext cx="2432304" cy="566928"/>
-          </a:xfrm>
-          <a:prstGeom prst="rect">
-            <a:avLst/>
-          </a:prstGeom>
-          <a:noFill/>
-          <a:ln/>
-        </p:spPr>
-        <p:txBody>
-          <a:bodyPr wrap="square" lIns="0" tIns="0" rIns="0" bIns="0" rtlCol="0" anchor="t"/>
-          <a:lstStyle/>
-          <a:p>
-            <a:pPr indent="0" marL="0">
-              <a:buNone/>
-            </a:pPr>
-            <a:r>
-              <a:rPr lang="en-US" sz="950" dirty="0">
-                <a:solidFill>
-                  <a:srgbClr val="1B2433"/>
-                </a:solidFill>
-                <a:latin typeface="Calibri" pitchFamily="34" charset="0"/>
-                <a:ea typeface="Calibri" pitchFamily="34" charset="-122"/>
-                <a:cs typeface="Calibri" pitchFamily="34" charset="-120"/>
-              </a:rPr>
-              <a:t>Agents flag a cash risk. Cash may fall to $3.71M against a $4.0M loan limit. One click starts collections.</a:t>
-            </a:r>
-            <a:endParaRPr lang="en-US" sz="950" dirty="0"/>
-          </a:p>
-        </p:txBody>
-      </p:sp>
-      <p:sp>
-        <p:nvSpPr>
-          <p:cNvPr id="56" name="Shape 49"/>
-          <p:cNvSpPr/>
-          <p:nvPr/>
-        </p:nvSpPr>
-        <p:spPr>
-          <a:xfrm>
-            <a:off x="9025128" y="3401568"/>
-            <a:ext cx="2651760" cy="1033272"/>
-          </a:xfrm>
-          <a:prstGeom prst="roundRect">
-            <a:avLst>
-              <a:gd name="adj" fmla="val 10619"/>
-            </a:avLst>
-          </a:prstGeom>
-          <a:solidFill>
-            <a:srgbClr val="F6F8FB"/>
-          </a:solidFill>
-          <a:ln w="9525">
-            <a:solidFill>
-              <a:srgbClr val="F6F8FB"/>
-            </a:solidFill>
-            <a:prstDash val="solid"/>
-          </a:ln>
-        </p:spPr>
-      </p:sp>
-      <p:sp>
-        <p:nvSpPr>
-          <p:cNvPr id="57" name="Shape 50"/>
-          <p:cNvSpPr/>
-          <p:nvPr/>
-        </p:nvSpPr>
-        <p:spPr>
-          <a:xfrm>
-            <a:off x="9134856" y="3511296"/>
-            <a:ext cx="329184" cy="329184"/>
-          </a:xfrm>
-          <a:prstGeom prst="ellipse">
-            <a:avLst/>
-          </a:prstGeom>
-          <a:solidFill>
-            <a:srgbClr val="FFFFFF"/>
-          </a:solidFill>
-          <a:ln w="12700">
-            <a:solidFill>
-              <a:srgbClr val="FFFFFF"/>
-            </a:solidFill>
-            <a:prstDash val="solid"/>
-          </a:ln>
-        </p:spPr>
-      </p:sp>
-      <p:pic>
-        <p:nvPicPr>
-          <p:cNvPr id="58" name="Image 5" descr="preencoded.png">    </p:cNvPr>
-          <p:cNvPicPr>
-            <a:picLocks noChangeAspect="1"/>
-          </p:cNvPicPr>
-          <p:nvPr/>
-        </p:nvPicPr>
-        <p:blipFill>
-          <a:blip r:embed="rId6"/>
-          <a:stretch>
-            <a:fillRect/>
-          </a:stretch>
-        </p:blipFill>
-        <p:spPr>
-          <a:xfrm>
-            <a:off x="9217152" y="3593592"/>
-            <a:ext cx="164592" cy="164592"/>
-          </a:xfrm>
-          <a:prstGeom prst="rect">
-            <a:avLst/>
-          </a:prstGeom>
-        </p:spPr>
-      </p:pic>
-      <p:sp>
-        <p:nvSpPr>
-          <p:cNvPr id="59" name="Text 51"/>
-          <p:cNvSpPr txBox="1"/>
-          <p:nvPr/>
-        </p:nvSpPr>
-        <p:spPr>
-          <a:xfrm>
-            <a:off x="9537192" y="3511296"/>
-            <a:ext cx="2057400" cy="329184"/>
-          </a:xfrm>
-          <a:prstGeom prst="rect">
-            <a:avLst/>
-          </a:prstGeom>
-          <a:noFill/>
-          <a:ln/>
-        </p:spPr>
-        <p:txBody>
-          <a:bodyPr wrap="square" lIns="0" tIns="0" rIns="0" bIns="0" rtlCol="0" anchor="ctr"/>
-          <a:lstStyle/>
-          <a:p>
-            <a:pPr indent="0" marL="0">
-              <a:buNone/>
-            </a:pPr>
-            <a:r>
-              <a:rPr lang="en-US" sz="1150" b="1" dirty="0">
-                <a:solidFill>
-                  <a:srgbClr val="1B2433"/>
-                </a:solidFill>
-                <a:latin typeface="Calibri" pitchFamily="34" charset="0"/>
-                <a:ea typeface="Calibri" pitchFamily="34" charset="-122"/>
-                <a:cs typeface="Calibri" pitchFamily="34" charset="-120"/>
-              </a:rPr>
-              <a:t>Month-end close</a:t>
-            </a:r>
-            <a:endParaRPr lang="en-US" sz="1150" dirty="0"/>
-          </a:p>
-        </p:txBody>
-      </p:sp>
-      <p:sp>
-        <p:nvSpPr>
-          <p:cNvPr id="60" name="Text 52"/>
-          <p:cNvSpPr txBox="1"/>
-          <p:nvPr/>
-        </p:nvSpPr>
-        <p:spPr>
-          <a:xfrm>
-            <a:off x="9153144" y="3840480"/>
-            <a:ext cx="2432304" cy="566928"/>
-          </a:xfrm>
-          <a:prstGeom prst="rect">
-            <a:avLst/>
-          </a:prstGeom>
-          <a:noFill/>
-          <a:ln/>
-        </p:spPr>
-        <p:txBody>
-          <a:bodyPr wrap="square" lIns="0" tIns="0" rIns="0" bIns="0" rtlCol="0" anchor="t"/>
-          <a:lstStyle/>
-          <a:p>
-            <a:pPr indent="0" marL="0">
-              <a:buNone/>
-            </a:pPr>
-            <a:r>
-              <a:rPr lang="en-US" sz="950" dirty="0">
-                <a:solidFill>
-                  <a:srgbClr val="1B2433"/>
-                </a:solidFill>
-                <a:latin typeface="Calibri" pitchFamily="34" charset="0"/>
-                <a:ea typeface="Calibri" pitchFamily="34" charset="-122"/>
-                <a:cs typeface="Calibri" pitchFamily="34" charset="-120"/>
-              </a:rPr>
-              <a:t>Readiness goes from 62% to 73% in one run. 3 tasks finish alone. 4 wait for approval and 2 go to people.</a:t>
-            </a:r>
-            <a:endParaRPr lang="en-US" sz="950" dirty="0"/>
-          </a:p>
-        </p:txBody>
-      </p:sp>
-      <p:sp>
-        <p:nvSpPr>
-          <p:cNvPr id="61" name="Shape 53"/>
-          <p:cNvSpPr/>
-          <p:nvPr/>
-        </p:nvSpPr>
-        <p:spPr>
-          <a:xfrm>
-            <a:off x="6263640" y="4517136"/>
-            <a:ext cx="2651760" cy="1033272"/>
-          </a:xfrm>
-          <a:prstGeom prst="roundRect">
-            <a:avLst>
-              <a:gd name="adj" fmla="val 10619"/>
-            </a:avLst>
-          </a:prstGeom>
-          <a:solidFill>
-            <a:srgbClr val="F6F8FB"/>
-          </a:solidFill>
-          <a:ln w="9525">
-            <a:solidFill>
-              <a:srgbClr val="F6F8FB"/>
-            </a:solidFill>
-            <a:prstDash val="solid"/>
-          </a:ln>
-        </p:spPr>
-      </p:sp>
-      <p:sp>
-        <p:nvSpPr>
-          <p:cNvPr id="62" name="Shape 54"/>
-          <p:cNvSpPr/>
-          <p:nvPr/>
-        </p:nvSpPr>
-        <p:spPr>
-          <a:xfrm>
-            <a:off x="6373368" y="4626864"/>
-            <a:ext cx="329184" cy="329184"/>
-          </a:xfrm>
-          <a:prstGeom prst="ellipse">
-            <a:avLst/>
-          </a:prstGeom>
-          <a:solidFill>
-            <a:srgbClr val="FFFFFF"/>
-          </a:solidFill>
-          <a:ln w="12700">
-            <a:solidFill>
-              <a:srgbClr val="FFFFFF"/>
-            </a:solidFill>
-            <a:prstDash val="solid"/>
-          </a:ln>
-        </p:spPr>
-      </p:sp>
-      <p:pic>
-        <p:nvPicPr>
-          <p:cNvPr id="63" name="Image 6" descr="preencoded.png">    </p:cNvPr>
-          <p:cNvPicPr>
-            <a:picLocks noChangeAspect="1"/>
-          </p:cNvPicPr>
-          <p:nvPr/>
-        </p:nvPicPr>
-        <p:blipFill>
-          <a:blip r:embed="rId7"/>
-          <a:stretch>
-            <a:fillRect/>
-          </a:stretch>
-        </p:blipFill>
-        <p:spPr>
-          <a:xfrm>
-            <a:off x="6455664" y="4709160"/>
-            <a:ext cx="164592" cy="164592"/>
-          </a:xfrm>
-          <a:prstGeom prst="rect">
-            <a:avLst/>
-          </a:prstGeom>
-        </p:spPr>
-      </p:pic>
-      <p:sp>
-        <p:nvSpPr>
-          <p:cNvPr id="64" name="Text 55"/>
-          <p:cNvSpPr txBox="1"/>
-          <p:nvPr/>
-        </p:nvSpPr>
-        <p:spPr>
-          <a:xfrm>
-            <a:off x="6775704" y="4626864"/>
-            <a:ext cx="2057400" cy="329184"/>
-          </a:xfrm>
-          <a:prstGeom prst="rect">
-            <a:avLst/>
-          </a:prstGeom>
-          <a:noFill/>
-          <a:ln/>
-        </p:spPr>
-        <p:txBody>
-          <a:bodyPr wrap="square" lIns="0" tIns="0" rIns="0" bIns="0" rtlCol="0" anchor="ctr"/>
-          <a:lstStyle/>
-          <a:p>
-            <a:pPr indent="0" marL="0">
-              <a:buNone/>
-            </a:pPr>
-            <a:r>
-              <a:rPr lang="en-US" sz="1150" b="1" dirty="0">
-                <a:solidFill>
-                  <a:srgbClr val="1B2433"/>
-                </a:solidFill>
-                <a:latin typeface="Calibri" pitchFamily="34" charset="0"/>
-                <a:ea typeface="Calibri" pitchFamily="34" charset="-122"/>
-                <a:cs typeface="Calibri" pitchFamily="34" charset="-120"/>
-              </a:rPr>
-              <a:t>What-if lab</a:t>
-            </a:r>
-            <a:endParaRPr lang="en-US" sz="1150" dirty="0"/>
-          </a:p>
-        </p:txBody>
-      </p:sp>
-      <p:sp>
-        <p:nvSpPr>
-          <p:cNvPr id="65" name="Text 56"/>
-          <p:cNvSpPr txBox="1"/>
-          <p:nvPr/>
-        </p:nvSpPr>
-        <p:spPr>
-          <a:xfrm>
-            <a:off x="6391656" y="4956048"/>
-            <a:ext cx="2432304" cy="566928"/>
-          </a:xfrm>
-          <a:prstGeom prst="rect">
-            <a:avLst/>
-          </a:prstGeom>
-          <a:noFill/>
-          <a:ln/>
-        </p:spPr>
-        <p:txBody>
-          <a:bodyPr wrap="square" lIns="0" tIns="0" rIns="0" bIns="0" rtlCol="0" anchor="t"/>
-          <a:lstStyle/>
-          <a:p>
-            <a:pPr indent="0" marL="0">
-              <a:buNone/>
-            </a:pPr>
-            <a:r>
-              <a:rPr lang="en-US" sz="950" dirty="0">
-                <a:solidFill>
-                  <a:srgbClr val="1B2433"/>
-                </a:solidFill>
-                <a:latin typeface="Calibri" pitchFamily="34" charset="0"/>
-                <a:ea typeface="Calibri" pitchFamily="34" charset="-122"/>
-                <a:cs typeface="Calibri" pitchFamily="34" charset="-120"/>
-              </a:rPr>
-              <a:t>A plain English question shows three cases. The bad case drops to $2.05M. The fixed plan stays safe at $4.12M.</a:t>
-            </a:r>
-            <a:endParaRPr lang="en-US" sz="950" dirty="0"/>
-          </a:p>
-        </p:txBody>
-      </p:sp>
-      <p:sp>
-        <p:nvSpPr>
-          <p:cNvPr id="66" name="Shape 57"/>
-          <p:cNvSpPr/>
-          <p:nvPr/>
-        </p:nvSpPr>
-        <p:spPr>
-          <a:xfrm>
-            <a:off x="9025128" y="4517136"/>
-            <a:ext cx="2651760" cy="1033272"/>
-          </a:xfrm>
-          <a:prstGeom prst="roundRect">
-            <a:avLst>
-              <a:gd name="adj" fmla="val 10619"/>
-            </a:avLst>
-          </a:prstGeom>
-          <a:solidFill>
-            <a:srgbClr val="F6F8FB"/>
-          </a:solidFill>
-          <a:ln w="9525">
-            <a:solidFill>
-              <a:srgbClr val="F6F8FB"/>
-            </a:solidFill>
-            <a:prstDash val="solid"/>
-          </a:ln>
-        </p:spPr>
-      </p:sp>
-      <p:sp>
-        <p:nvSpPr>
-          <p:cNvPr id="67" name="Shape 58"/>
-          <p:cNvSpPr/>
-          <p:nvPr/>
-        </p:nvSpPr>
-        <p:spPr>
-          <a:xfrm>
-            <a:off x="9134856" y="4626864"/>
-            <a:ext cx="329184" cy="329184"/>
-          </a:xfrm>
-          <a:prstGeom prst="ellipse">
-            <a:avLst/>
-          </a:prstGeom>
-          <a:solidFill>
-            <a:srgbClr val="FFFFFF"/>
-          </a:solidFill>
-          <a:ln w="12700">
-            <a:solidFill>
-              <a:srgbClr val="FFFFFF"/>
-            </a:solidFill>
-            <a:prstDash val="solid"/>
-          </a:ln>
-        </p:spPr>
-      </p:sp>
-      <p:pic>
-        <p:nvPicPr>
-          <p:cNvPr id="68" name="Image 7" descr="preencoded.png">    </p:cNvPr>
-          <p:cNvPicPr>
-            <a:picLocks noChangeAspect="1"/>
-          </p:cNvPicPr>
-          <p:nvPr/>
-        </p:nvPicPr>
-        <p:blipFill>
-          <a:blip r:embed="rId8"/>
-          <a:stretch>
-            <a:fillRect/>
-          </a:stretch>
-        </p:blipFill>
-        <p:spPr>
-          <a:xfrm>
-            <a:off x="9217152" y="4709160"/>
-            <a:ext cx="164592" cy="164592"/>
-          </a:xfrm>
-          <a:prstGeom prst="rect">
-            <a:avLst/>
-          </a:prstGeom>
-        </p:spPr>
-      </p:pic>
-      <p:sp>
-        <p:nvSpPr>
-          <p:cNvPr id="69" name="Text 59"/>
-          <p:cNvSpPr txBox="1"/>
-          <p:nvPr/>
-        </p:nvSpPr>
-        <p:spPr>
-          <a:xfrm>
-            <a:off x="9537192" y="4626864"/>
-            <a:ext cx="2057400" cy="329184"/>
-          </a:xfrm>
-          <a:prstGeom prst="rect">
-            <a:avLst/>
-          </a:prstGeom>
-          <a:noFill/>
-          <a:ln/>
-        </p:spPr>
-        <p:txBody>
-          <a:bodyPr wrap="square" lIns="0" tIns="0" rIns="0" bIns="0" rtlCol="0" anchor="ctr"/>
-          <a:lstStyle/>
-          <a:p>
-            <a:pPr indent="0" marL="0">
-              <a:buNone/>
-            </a:pPr>
-            <a:r>
-              <a:rPr lang="en-US" sz="1150" b="1" dirty="0">
-                <a:solidFill>
-                  <a:srgbClr val="1B2433"/>
-                </a:solidFill>
-                <a:latin typeface="Calibri" pitchFamily="34" charset="0"/>
-                <a:ea typeface="Calibri" pitchFamily="34" charset="-122"/>
-                <a:cs typeface="Calibri" pitchFamily="34" charset="-120"/>
-              </a:rPr>
-              <a:t>Expert handoff</a:t>
-            </a:r>
-            <a:endParaRPr lang="en-US" sz="1150" dirty="0"/>
-          </a:p>
-        </p:txBody>
-      </p:sp>
-      <p:sp>
-        <p:nvSpPr>
-          <p:cNvPr id="70" name="Text 60"/>
-          <p:cNvSpPr txBox="1"/>
-          <p:nvPr/>
-        </p:nvSpPr>
-        <p:spPr>
-          <a:xfrm>
-            <a:off x="9153144" y="4956048"/>
-            <a:ext cx="2432304" cy="566928"/>
-          </a:xfrm>
-          <a:prstGeom prst="rect">
-            <a:avLst/>
-          </a:prstGeom>
-          <a:noFill/>
-          <a:ln/>
-        </p:spPr>
-        <p:txBody>
-          <a:bodyPr wrap="square" lIns="0" tIns="0" rIns="0" bIns="0" rtlCol="0" anchor="t"/>
-          <a:lstStyle/>
-          <a:p>
-            <a:pPr indent="0" marL="0">
-              <a:buNone/>
-            </a:pPr>
-            <a:r>
-              <a:rPr lang="en-US" sz="950" dirty="0">
-                <a:solidFill>
-                  <a:srgbClr val="1B2433"/>
-                </a:solidFill>
-                <a:latin typeface="Calibri" pitchFamily="34" charset="0"/>
-                <a:ea typeface="Calibri" pitchFamily="34" charset="-122"/>
-                <a:cs typeface="Calibri" pitchFamily="34" charset="-120"/>
-              </a:rPr>
-              <a:t>A $1.24M sale is too risky for the AI at 61% confidence. An expert answers with zero follow-up questions.</a:t>
-            </a:r>
-            <a:endParaRPr lang="en-US" sz="950" dirty="0"/>
-          </a:p>
-        </p:txBody>
-      </p:sp>
-      <p:sp>
-        <p:nvSpPr>
-          <p:cNvPr id="71" name="Shape 61"/>
-          <p:cNvSpPr/>
-          <p:nvPr/>
-        </p:nvSpPr>
-        <p:spPr>
-          <a:xfrm>
-            <a:off x="6263640" y="5632704"/>
-            <a:ext cx="2651760" cy="1033272"/>
-          </a:xfrm>
-          <a:prstGeom prst="roundRect">
-            <a:avLst>
-              <a:gd name="adj" fmla="val 10619"/>
-            </a:avLst>
-          </a:prstGeom>
-          <a:solidFill>
-            <a:srgbClr val="F6F8FB"/>
-          </a:solidFill>
-          <a:ln w="9525">
-            <a:solidFill>
-              <a:srgbClr val="F6F8FB"/>
-            </a:solidFill>
-            <a:prstDash val="solid"/>
-          </a:ln>
-        </p:spPr>
-      </p:sp>
-      <p:sp>
-        <p:nvSpPr>
-          <p:cNvPr id="72" name="Shape 62"/>
-          <p:cNvSpPr/>
-          <p:nvPr/>
-        </p:nvSpPr>
-        <p:spPr>
-          <a:xfrm>
-            <a:off x="6373368" y="5742432"/>
-            <a:ext cx="329184" cy="329184"/>
-          </a:xfrm>
-          <a:prstGeom prst="ellipse">
-            <a:avLst/>
-          </a:prstGeom>
-          <a:solidFill>
-            <a:srgbClr val="FFFFFF"/>
-          </a:solidFill>
-          <a:ln w="12700">
-            <a:solidFill>
-              <a:srgbClr val="FFFFFF"/>
-            </a:solidFill>
-            <a:prstDash val="solid"/>
-          </a:ln>
-        </p:spPr>
-      </p:sp>
-      <p:pic>
-        <p:nvPicPr>
-          <p:cNvPr id="73" name="Image 8" descr="preencoded.png">    </p:cNvPr>
-          <p:cNvPicPr>
-            <a:picLocks noChangeAspect="1"/>
-          </p:cNvPicPr>
-          <p:nvPr/>
-        </p:nvPicPr>
-        <p:blipFill>
-          <a:blip r:embed="rId9"/>
-          <a:stretch>
-            <a:fillRect/>
-          </a:stretch>
-        </p:blipFill>
-        <p:spPr>
-          <a:xfrm>
-            <a:off x="6455664" y="5824728"/>
-            <a:ext cx="164592" cy="164592"/>
-          </a:xfrm>
-          <a:prstGeom prst="rect">
-            <a:avLst/>
-          </a:prstGeom>
-        </p:spPr>
-      </p:pic>
-      <p:sp>
-        <p:nvSpPr>
-          <p:cNvPr id="74" name="Text 63"/>
-          <p:cNvSpPr txBox="1"/>
-          <p:nvPr/>
-        </p:nvSpPr>
-        <p:spPr>
-          <a:xfrm>
-            <a:off x="6775704" y="5742432"/>
-            <a:ext cx="2057400" cy="329184"/>
-          </a:xfrm>
-          <a:prstGeom prst="rect">
-            <a:avLst/>
-          </a:prstGeom>
-          <a:noFill/>
-          <a:ln/>
-        </p:spPr>
-        <p:txBody>
-          <a:bodyPr wrap="square" lIns="0" tIns="0" rIns="0" bIns="0" rtlCol="0" anchor="ctr"/>
-          <a:lstStyle/>
-          <a:p>
-            <a:pPr indent="0" marL="0">
-              <a:buNone/>
-            </a:pPr>
-            <a:r>
-              <a:rPr lang="en-US" sz="1150" b="1" dirty="0">
-                <a:solidFill>
-                  <a:srgbClr val="1B2433"/>
-                </a:solidFill>
-                <a:latin typeface="Calibri" pitchFamily="34" charset="0"/>
-                <a:ea typeface="Calibri" pitchFamily="34" charset="-122"/>
-                <a:cs typeface="Calibri" pitchFamily="34" charset="-120"/>
-              </a:rPr>
-              <a:t>Marketplace</a:t>
-            </a:r>
-            <a:endParaRPr lang="en-US" sz="1150" dirty="0"/>
-          </a:p>
-        </p:txBody>
-      </p:sp>
-      <p:sp>
-        <p:nvSpPr>
-          <p:cNvPr id="75" name="Text 64"/>
-          <p:cNvSpPr txBox="1"/>
-          <p:nvPr/>
-        </p:nvSpPr>
-        <p:spPr>
-          <a:xfrm>
-            <a:off x="6391656" y="6071616"/>
-            <a:ext cx="2432304" cy="566928"/>
-          </a:xfrm>
-          <a:prstGeom prst="rect">
-            <a:avLst/>
-          </a:prstGeom>
-          <a:noFill/>
-          <a:ln/>
-        </p:spPr>
-        <p:txBody>
-          <a:bodyPr wrap="square" lIns="0" tIns="0" rIns="0" bIns="0" rtlCol="0" anchor="t"/>
-          <a:lstStyle/>
-          <a:p>
-            <a:pPr indent="0" marL="0">
-              <a:buNone/>
-            </a:pPr>
-            <a:r>
-              <a:rPr lang="en-US" sz="950" dirty="0">
-                <a:solidFill>
-                  <a:srgbClr val="1B2433"/>
-                </a:solidFill>
-                <a:latin typeface="Calibri" pitchFamily="34" charset="0"/>
-                <a:ea typeface="Calibri" pitchFamily="34" charset="-122"/>
-                <a:cs typeface="Calibri" pitchFamily="34" charset="-120"/>
-              </a:rPr>
-              <a:t>A partner agent is installed with clear permissions. It soon finds $23,400 of freight overcharges.</a:t>
-            </a:r>
-            <a:endParaRPr lang="en-US" sz="950" dirty="0"/>
-          </a:p>
-        </p:txBody>
-      </p:sp>
-      <p:sp>
-        <p:nvSpPr>
-          <p:cNvPr id="76" name="Shape 65"/>
-          <p:cNvSpPr/>
-          <p:nvPr/>
-        </p:nvSpPr>
-        <p:spPr>
-          <a:xfrm>
-            <a:off x="9025128" y="5632704"/>
-            <a:ext cx="2651760" cy="1033272"/>
-          </a:xfrm>
-          <a:prstGeom prst="roundRect">
-            <a:avLst>
-              <a:gd name="adj" fmla="val 10619"/>
-            </a:avLst>
-          </a:prstGeom>
-          <a:solidFill>
-            <a:srgbClr val="F6F8FB"/>
-          </a:solidFill>
-          <a:ln w="9525">
-            <a:solidFill>
-              <a:srgbClr val="F6F8FB"/>
-            </a:solidFill>
-            <a:prstDash val="solid"/>
-          </a:ln>
-        </p:spPr>
-      </p:sp>
-      <p:sp>
-        <p:nvSpPr>
-          <p:cNvPr id="77" name="Shape 66"/>
-          <p:cNvSpPr/>
-          <p:nvPr/>
-        </p:nvSpPr>
-        <p:spPr>
-          <a:xfrm>
-            <a:off x="9134856" y="5742432"/>
-            <a:ext cx="329184" cy="329184"/>
-          </a:xfrm>
-          <a:prstGeom prst="ellipse">
-            <a:avLst/>
-          </a:prstGeom>
-          <a:solidFill>
-            <a:srgbClr val="FFFFFF"/>
-          </a:solidFill>
-          <a:ln w="12700">
-            <a:solidFill>
-              <a:srgbClr val="FFFFFF"/>
-            </a:solidFill>
-            <a:prstDash val="solid"/>
-          </a:ln>
-        </p:spPr>
-      </p:sp>
-      <p:pic>
-        <p:nvPicPr>
-          <p:cNvPr id="78" name="Image 9" descr="preencoded.png">    </p:cNvPr>
-          <p:cNvPicPr>
-            <a:picLocks noChangeAspect="1"/>
-          </p:cNvPicPr>
-          <p:nvPr/>
-        </p:nvPicPr>
-        <p:blipFill>
-          <a:blip r:embed="rId10"/>
-          <a:stretch>
-            <a:fillRect/>
-          </a:stretch>
-        </p:blipFill>
-        <p:spPr>
-          <a:xfrm>
-            <a:off x="9217152" y="5824728"/>
-            <a:ext cx="164592" cy="164592"/>
-          </a:xfrm>
-          <a:prstGeom prst="rect">
-            <a:avLst/>
-          </a:prstGeom>
-        </p:spPr>
-      </p:pic>
-      <p:sp>
-        <p:nvSpPr>
-          <p:cNvPr id="79" name="Text 67"/>
-          <p:cNvSpPr txBox="1"/>
-          <p:nvPr/>
-        </p:nvSpPr>
-        <p:spPr>
-          <a:xfrm>
-            <a:off x="9537192" y="5742432"/>
-            <a:ext cx="2057400" cy="329184"/>
-          </a:xfrm>
-          <a:prstGeom prst="rect">
-            <a:avLst/>
-          </a:prstGeom>
-          <a:noFill/>
-          <a:ln/>
-        </p:spPr>
-        <p:txBody>
-          <a:bodyPr wrap="square" lIns="0" tIns="0" rIns="0" bIns="0" rtlCol="0" anchor="ctr"/>
-          <a:lstStyle/>
-          <a:p>
-            <a:pPr indent="0" marL="0">
-              <a:buNone/>
-            </a:pPr>
-            <a:r>
-              <a:rPr lang="en-US" sz="1150" b="1" dirty="0">
-                <a:solidFill>
-                  <a:srgbClr val="1B2433"/>
-                </a:solidFill>
-                <a:latin typeface="Calibri" pitchFamily="34" charset="0"/>
-                <a:ea typeface="Calibri" pitchFamily="34" charset="-122"/>
-                <a:cs typeface="Calibri" pitchFamily="34" charset="-120"/>
-              </a:rPr>
-              <a:t>Build and test</a:t>
-            </a:r>
-            <a:endParaRPr lang="en-US" sz="1150" dirty="0"/>
-          </a:p>
-        </p:txBody>
-      </p:sp>
-      <p:sp>
-        <p:nvSpPr>
-          <p:cNvPr id="80" name="Text 68"/>
-          <p:cNvSpPr txBox="1"/>
-          <p:nvPr/>
-        </p:nvSpPr>
-        <p:spPr>
-          <a:xfrm>
-            <a:off x="9153144" y="6071616"/>
-            <a:ext cx="2432304" cy="566928"/>
-          </a:xfrm>
-          <a:prstGeom prst="rect">
-            <a:avLst/>
-          </a:prstGeom>
-          <a:noFill/>
-          <a:ln/>
-        </p:spPr>
-        <p:txBody>
-          <a:bodyPr wrap="square" lIns="0" tIns="0" rIns="0" bIns="0" rtlCol="0" anchor="t"/>
-          <a:lstStyle/>
-          <a:p>
-            <a:pPr indent="0" marL="0">
-              <a:buNone/>
-            </a:pPr>
-            <a:r>
-              <a:rPr lang="en-US" sz="950" dirty="0">
-                <a:solidFill>
-                  <a:srgbClr val="1B2433"/>
-                </a:solidFill>
-                <a:latin typeface="Calibri" pitchFamily="34" charset="0"/>
-                <a:ea typeface="Calibri" pitchFamily="34" charset="-122"/>
-                <a:cs typeface="Calibri" pitchFamily="34" charset="-120"/>
-              </a:rPr>
-              <a:t>A developer builds an agent from plain words. Tests catch a currency bug. With too little data the agent asks a human.</a:t>
-            </a:r>
-            <a:endParaRPr lang="en-US" sz="950" dirty="0"/>
+              <a:rPr lang="en-US" sz="1050" dirty="0">
+                <a:solidFill>
+                  <a:srgbClr val="FFFFFF"/>
+                </a:solidFill>
+                <a:latin typeface="Calibri" pitchFamily="34" charset="0"/>
+                <a:ea typeface="Calibri" pitchFamily="34" charset="-122"/>
+                <a:cs typeface="Calibri" pitchFamily="34" charset="-120"/>
+              </a:rPr>
+              <a:t>The safety rule is simple. The AI may act alone only when risk is low, it is at least 95% sure and the amount is $10,000 or less. When it is less than 70% sure it must always ask a person.</a:t>
+            </a:r>
+            <a:endParaRPr lang="en-US" sz="1050" dirty="0"/>
           </a:p>
         </p:txBody>
       </p:sp>
@@ -6365,7 +5602,7 @@
         <p:spPr>
           <a:xfrm>
             <a:off x="548640" y="320040"/>
-            <a:ext cx="11155680" cy="548640"/>
+            <a:ext cx="11064240" cy="548640"/>
           </a:xfrm>
           <a:prstGeom prst="rect">
             <a:avLst/>
@@ -6389,7 +5626,7 @@
                 <a:ea typeface="Cambria" pitchFamily="34" charset="-122"/>
                 <a:cs typeface="Cambria" pitchFamily="34" charset="-120"/>
               </a:rPr>
-              <a:t>Money, roadmap and how we measure success</a:t>
+              <a:t>Every part of the product, explained</a:t>
             </a:r>
             <a:endParaRPr lang="en-US" sz="2800" dirty="0"/>
           </a:p>
@@ -6403,12 +5640,12 @@
         </p:nvSpPr>
         <p:spPr>
           <a:xfrm>
-            <a:off x="548640" y="1005840"/>
-            <a:ext cx="3657600" cy="3063240"/>
+            <a:off x="548640" y="987552"/>
+            <a:ext cx="3611880" cy="1755648"/>
           </a:xfrm>
           <a:prstGeom prst="roundRect">
             <a:avLst>
-              <a:gd name="adj" fmla="val 3582"/>
+              <a:gd name="adj" fmla="val 5208"/>
             </a:avLst>
           </a:prstGeom>
           <a:solidFill>
@@ -6437,18 +5674,18 @@
         </p:nvSpPr>
         <p:spPr>
           <a:xfrm>
-            <a:off x="731520" y="1170432"/>
-            <a:ext cx="457200" cy="457200"/>
+            <a:off x="685800" y="1115568"/>
+            <a:ext cx="402336" cy="402336"/>
           </a:xfrm>
           <a:prstGeom prst="ellipse">
             <a:avLst/>
           </a:prstGeom>
           <a:solidFill>
-            <a:srgbClr val="FDF3E3"/>
+            <a:srgbClr val="E8EDFC"/>
           </a:solidFill>
           <a:ln w="12700">
             <a:solidFill>
-              <a:srgbClr val="FDF3E3"/>
+              <a:srgbClr val="E8EDFC"/>
             </a:solidFill>
             <a:prstDash val="solid"/>
           </a:ln>
@@ -6470,8 +5707,8 @@
         </p:blipFill>
         <p:spPr>
           <a:xfrm>
-            <a:off x="845820" y="1284732"/>
-            <a:ext cx="228600" cy="228600"/>
+            <a:off x="786384" y="1216152"/>
+            <a:ext cx="201168" cy="201168"/>
           </a:xfrm>
           <a:prstGeom prst="rect">
             <a:avLst/>
@@ -6486,8 +5723,8 @@
         </p:nvSpPr>
         <p:spPr>
           <a:xfrm>
-            <a:off x="1298448" y="1216152"/>
-            <a:ext cx="2743200" cy="365760"/>
+            <a:off x="1188720" y="1115568"/>
+            <a:ext cx="2834640" cy="402336"/>
           </a:xfrm>
           <a:prstGeom prst="rect">
             <a:avLst/>
@@ -6503,7 +5740,46 @@
               <a:buNone/>
             </a:pPr>
             <a:r>
-              <a:rPr lang="en-US" sz="1500" b="1" dirty="0">
+              <a:rPr lang="en-US" sz="1250" b="1" dirty="0">
+                <a:solidFill>
+                  <a:srgbClr val="14213D"/>
+                </a:solidFill>
+                <a:latin typeface="Calibri" pitchFamily="34" charset="0"/>
+                <a:ea typeface="Calibri" pitchFamily="34" charset="-122"/>
+                <a:cs typeface="Calibri" pitchFamily="34" charset="-120"/>
+              </a:rPr>
+              <a:t>AI Command Center</a:t>
+            </a:r>
+            <a:endParaRPr lang="en-US" sz="1250" dirty="0"/>
+          </a:p>
+        </p:txBody>
+      </p:sp>
+      <p:sp>
+        <p:nvSpPr>
+          <p:cNvPr id="7" name="Text 4"/>
+          <p:cNvSpPr txBox="1"/>
+          <p:nvPr/>
+        </p:nvSpPr>
+        <p:spPr>
+          <a:xfrm>
+            <a:off x="704088" y="1591056"/>
+            <a:ext cx="3319272" cy="1097280"/>
+          </a:xfrm>
+          <a:prstGeom prst="rect">
+            <a:avLst/>
+          </a:prstGeom>
+          <a:noFill/>
+          <a:ln/>
+        </p:spPr>
+        <p:txBody>
+          <a:bodyPr wrap="square" lIns="0" tIns="0" rIns="0" bIns="0" rtlCol="0" anchor="t"/>
+          <a:lstStyle/>
+          <a:p>
+            <a:pPr indent="0" marL="0">
+              <a:buNone/>
+            </a:pPr>
+            <a:r>
+              <a:rPr lang="en-US" sz="1000" dirty="0">
                 <a:solidFill>
                   <a:srgbClr val="1B2433"/>
                 </a:solidFill>
@@ -6511,173 +5787,7 @@
                 <a:ea typeface="Calibri" pitchFamily="34" charset="-122"/>
                 <a:cs typeface="Calibri" pitchFamily="34" charset="-120"/>
               </a:rPr>
-              <a:t>Five ways Intuit earns</a:t>
-            </a:r>
-            <a:endParaRPr lang="en-US" sz="1500" dirty="0"/>
-          </a:p>
-        </p:txBody>
-      </p:sp>
-      <p:sp>
-        <p:nvSpPr>
-          <p:cNvPr id="7" name="Text 4"/>
-          <p:cNvSpPr txBox="1"/>
-          <p:nvPr/>
-        </p:nvSpPr>
-        <p:spPr>
-          <a:xfrm>
-            <a:off x="731520" y="1737360"/>
-            <a:ext cx="3337560" cy="1920240"/>
-          </a:xfrm>
-          <a:prstGeom prst="rect">
-            <a:avLst/>
-          </a:prstGeom>
-          <a:noFill/>
-          <a:ln/>
-        </p:spPr>
-        <p:txBody>
-          <a:bodyPr wrap="square" lIns="0" tIns="0" rIns="0" bIns="0" rtlCol="0" anchor="t"/>
-          <a:lstStyle/>
-          <a:p>
-            <a:pPr marL="342900" indent="-342900">
-              <a:spcAft>
-                <a:spcPts val="300"/>
-              </a:spcAft>
-              <a:buSzPct val="100000"/>
-              <a:buChar char="•"/>
-            </a:pPr>
-            <a:r>
-              <a:rPr lang="en-US" sz="1100" dirty="0">
-                <a:solidFill>
-                  <a:srgbClr val="1B2433"/>
-                </a:solidFill>
-                <a:latin typeface="Calibri" pitchFamily="34" charset="0"/>
-                <a:ea typeface="Calibri" pitchFamily="34" charset="-122"/>
-                <a:cs typeface="Calibri" pitchFamily="34" charset="-120"/>
-              </a:rPr>
-              <a:t>Customers keep paying the normal IES subscription.</a:t>
-            </a:r>
-            <a:endParaRPr lang="en-US" sz="1100" dirty="0"/>
-          </a:p>
-          <a:p>
-            <a:pPr marL="342900" indent="-342900">
-              <a:spcAft>
-                <a:spcPts val="300"/>
-              </a:spcAft>
-              <a:buSzPct val="100000"/>
-              <a:buChar char="•"/>
-            </a:pPr>
-            <a:r>
-              <a:rPr lang="en-US" sz="1100" dirty="0">
-                <a:solidFill>
-                  <a:srgbClr val="1B2433"/>
-                </a:solidFill>
-                <a:latin typeface="Calibri" pitchFamily="34" charset="0"/>
-                <a:ea typeface="Calibri" pitchFamily="34" charset="-122"/>
-                <a:cs typeface="Calibri" pitchFamily="34" charset="-120"/>
-              </a:rPr>
-              <a:t>Heavy use of AI agents is charged above an included amount.</a:t>
-            </a:r>
-            <a:endParaRPr lang="en-US" sz="1100" dirty="0"/>
-          </a:p>
-          <a:p>
-            <a:pPr marL="342900" indent="-342900">
-              <a:spcAft>
-                <a:spcPts val="300"/>
-              </a:spcAft>
-              <a:buSzPct val="100000"/>
-              <a:buChar char="•"/>
-            </a:pPr>
-            <a:r>
-              <a:rPr lang="en-US" sz="1100" dirty="0">
-                <a:solidFill>
-                  <a:srgbClr val="1B2433"/>
-                </a:solidFill>
-                <a:latin typeface="Calibri" pitchFamily="34" charset="0"/>
-                <a:ea typeface="Calibri" pitchFamily="34" charset="-122"/>
-                <a:cs typeface="Calibri" pitchFamily="34" charset="-120"/>
-              </a:rPr>
-              <a:t>Developers pay for API use beyond a free level.</a:t>
-            </a:r>
-            <a:endParaRPr lang="en-US" sz="1100" dirty="0"/>
-          </a:p>
-          <a:p>
-            <a:pPr marL="342900" indent="-342900">
-              <a:spcAft>
-                <a:spcPts val="300"/>
-              </a:spcAft>
-              <a:buSzPct val="100000"/>
-              <a:buChar char="•"/>
-            </a:pPr>
-            <a:r>
-              <a:rPr lang="en-US" sz="1100" dirty="0">
-                <a:solidFill>
-                  <a:srgbClr val="1B2433"/>
-                </a:solidFill>
-                <a:latin typeface="Calibri" pitchFamily="34" charset="0"/>
-                <a:ea typeface="Calibri" pitchFamily="34" charset="-122"/>
-                <a:cs typeface="Calibri" pitchFamily="34" charset="-120"/>
-              </a:rPr>
-              <a:t>Intuit keeps a share of every marketplace sale.</a:t>
-            </a:r>
-            <a:endParaRPr lang="en-US" sz="1100" dirty="0"/>
-          </a:p>
-          <a:p>
-            <a:pPr marL="342900" indent="-342900">
-              <a:spcAft>
-                <a:spcPts val="300"/>
-              </a:spcAft>
-              <a:buSzPct val="100000"/>
-              <a:buChar char="•"/>
-            </a:pPr>
-            <a:r>
-              <a:rPr lang="en-US" sz="1100" dirty="0">
-                <a:solidFill>
-                  <a:srgbClr val="1B2433"/>
-                </a:solidFill>
-                <a:latin typeface="Calibri" pitchFamily="34" charset="0"/>
-                <a:ea typeface="Calibri" pitchFamily="34" charset="-122"/>
-                <a:cs typeface="Calibri" pitchFamily="34" charset="-120"/>
-              </a:rPr>
-              <a:t>Expert help is sold per case or per session.</a:t>
-            </a:r>
-            <a:endParaRPr lang="en-US" sz="1100" dirty="0"/>
-          </a:p>
-        </p:txBody>
-      </p:sp>
-      <p:sp>
-        <p:nvSpPr>
-          <p:cNvPr id="8" name="Text 5"/>
-          <p:cNvSpPr txBox="1"/>
-          <p:nvPr/>
-        </p:nvSpPr>
-        <p:spPr>
-          <a:xfrm>
-            <a:off x="731520" y="3749040"/>
-            <a:ext cx="3337560" cy="274320"/>
-          </a:xfrm>
-          <a:prstGeom prst="rect">
-            <a:avLst/>
-          </a:prstGeom>
-          <a:noFill/>
-          <a:ln/>
-        </p:spPr>
-        <p:txBody>
-          <a:bodyPr wrap="square" lIns="0" tIns="0" rIns="0" bIns="0" rtlCol="0" anchor="t"/>
-          <a:lstStyle/>
-          <a:p>
-            <a:pPr indent="0" marL="0">
-              <a:buNone/>
-            </a:pPr>
-            <a:r>
-              <a:rPr lang="en-US" sz="1000" i="1" dirty="0">
-                <a:solidFill>
-                  <a:srgbClr val="5B6576"/>
-                </a:solidFill>
-                <a:latin typeface="Calibri" pitchFamily="34" charset="0"/>
-                <a:ea typeface="Calibri" pitchFamily="34" charset="-122"/>
-                <a:cs typeface="Calibri" pitchFamily="34" charset="-120"/>
-              </a:rPr>
-              <a:t>All prices in the prototype are examples only.</a:t>
+              <a:t>This is the first screen a finance leader sees each morning. Agents check the business overnight and list the biggest issues with proof. They warn that cash may fall to $3.71M while the loan needs $4.0M. One click starts a collections push that brings cash back above the limit.</a:t>
             </a:r>
             <a:endParaRPr lang="en-US" sz="1000" dirty="0"/>
           </a:p>
@@ -6685,18 +5795,18 @@
       </p:sp>
       <p:sp>
         <p:nvSpPr>
-          <p:cNvPr id="9" name="Shape 6"/>
+          <p:cNvPr id="8" name="Shape 5"/>
           <p:cNvSpPr/>
           <p:nvPr/>
         </p:nvSpPr>
         <p:spPr>
           <a:xfrm>
-            <a:off x="4343400" y="1005840"/>
-            <a:ext cx="3657600" cy="3063240"/>
+            <a:off x="4270248" y="987552"/>
+            <a:ext cx="3611880" cy="1755648"/>
           </a:xfrm>
           <a:prstGeom prst="roundRect">
             <a:avLst>
-              <a:gd name="adj" fmla="val 3582"/>
+              <a:gd name="adj" fmla="val 5208"/>
             </a:avLst>
           </a:prstGeom>
           <a:solidFill>
@@ -6719,24 +5829,24 @@
       </p:sp>
       <p:sp>
         <p:nvSpPr>
-          <p:cNvPr id="10" name="Shape 7"/>
+          <p:cNvPr id="9" name="Shape 6"/>
           <p:cNvSpPr/>
           <p:nvPr/>
         </p:nvSpPr>
         <p:spPr>
           <a:xfrm>
-            <a:off x="4526280" y="1170432"/>
-            <a:ext cx="457200" cy="457200"/>
+            <a:off x="4407408" y="1115568"/>
+            <a:ext cx="402336" cy="402336"/>
           </a:xfrm>
           <a:prstGeom prst="ellipse">
             <a:avLst/>
           </a:prstGeom>
           <a:solidFill>
-            <a:srgbClr val="E8EDFC"/>
+            <a:srgbClr val="E3F5F2"/>
           </a:solidFill>
           <a:ln w="12700">
             <a:solidFill>
-              <a:srgbClr val="E8EDFC"/>
+              <a:srgbClr val="E3F5F2"/>
             </a:solidFill>
             <a:prstDash val="solid"/>
           </a:ln>
@@ -6744,7 +5854,7 @@
       </p:sp>
       <p:pic>
         <p:nvPicPr>
-          <p:cNvPr id="11" name="Image 1" descr="preencoded.png">    </p:cNvPr>
+          <p:cNvPr id="10" name="Image 1" descr="preencoded.png">    </p:cNvPr>
           <p:cNvPicPr>
             <a:picLocks noChangeAspect="1"/>
           </p:cNvPicPr>
@@ -6758,8 +5868,8 @@
         </p:blipFill>
         <p:spPr>
           <a:xfrm>
-            <a:off x="4640580" y="1284732"/>
-            <a:ext cx="228600" cy="228600"/>
+            <a:off x="4507992" y="1216152"/>
+            <a:ext cx="201168" cy="201168"/>
           </a:xfrm>
           <a:prstGeom prst="rect">
             <a:avLst/>
@@ -6768,30 +5878,69 @@
       </p:pic>
       <p:sp>
         <p:nvSpPr>
+          <p:cNvPr id="11" name="Text 7"/>
+          <p:cNvSpPr txBox="1"/>
+          <p:nvPr/>
+        </p:nvSpPr>
+        <p:spPr>
+          <a:xfrm>
+            <a:off x="4910328" y="1115568"/>
+            <a:ext cx="2834640" cy="402336"/>
+          </a:xfrm>
+          <a:prstGeom prst="rect">
+            <a:avLst/>
+          </a:prstGeom>
+          <a:noFill/>
+          <a:ln/>
+        </p:spPr>
+        <p:txBody>
+          <a:bodyPr wrap="square" lIns="0" tIns="0" rIns="0" bIns="0" rtlCol="0" anchor="ctr"/>
+          <a:lstStyle/>
+          <a:p>
+            <a:pPr indent="0" marL="0">
+              <a:buNone/>
+            </a:pPr>
+            <a:r>
+              <a:rPr lang="en-US" sz="1250" b="1" dirty="0">
+                <a:solidFill>
+                  <a:srgbClr val="14213D"/>
+                </a:solidFill>
+                <a:latin typeface="Calibri" pitchFamily="34" charset="0"/>
+                <a:ea typeface="Calibri" pitchFamily="34" charset="-122"/>
+                <a:cs typeface="Calibri" pitchFamily="34" charset="-120"/>
+              </a:rPr>
+              <a:t>Financial Close Agent</a:t>
+            </a:r>
+            <a:endParaRPr lang="en-US" sz="1250" dirty="0"/>
+          </a:p>
+        </p:txBody>
+      </p:sp>
+      <p:sp>
+        <p:nvSpPr>
           <p:cNvPr id="12" name="Text 8"/>
           <p:cNvSpPr txBox="1"/>
           <p:nvPr/>
         </p:nvSpPr>
         <p:spPr>
           <a:xfrm>
-            <a:off x="5093208" y="1216152"/>
-            <a:ext cx="2743200" cy="365760"/>
-          </a:xfrm>
-          <a:prstGeom prst="rect">
-            <a:avLst/>
-          </a:prstGeom>
-          <a:noFill/>
-          <a:ln/>
-        </p:spPr>
-        <p:txBody>
-          <a:bodyPr wrap="square" lIns="0" tIns="0" rIns="0" bIns="0" rtlCol="0" anchor="ctr"/>
-          <a:lstStyle/>
-          <a:p>
-            <a:pPr indent="0" marL="0">
-              <a:buNone/>
-            </a:pPr>
-            <a:r>
-              <a:rPr lang="en-US" sz="1500" b="1" dirty="0">
+            <a:off x="4425696" y="1591056"/>
+            <a:ext cx="3319272" cy="1097280"/>
+          </a:xfrm>
+          <a:prstGeom prst="rect">
+            <a:avLst/>
+          </a:prstGeom>
+          <a:noFill/>
+          <a:ln/>
+        </p:spPr>
+        <p:txBody>
+          <a:bodyPr wrap="square" lIns="0" tIns="0" rIns="0" bIns="0" rtlCol="0" anchor="t"/>
+          <a:lstStyle/>
+          <a:p>
+            <a:pPr indent="0" marL="0">
+              <a:buNone/>
+            </a:pPr>
+            <a:r>
+              <a:rPr lang="en-US" sz="1000" dirty="0">
                 <a:solidFill>
                   <a:srgbClr val="1B2433"/>
                 </a:solidFill>
@@ -6799,108 +5948,26 @@
                 <a:ea typeface="Calibri" pitchFamily="34" charset="-122"/>
                 <a:cs typeface="Calibri" pitchFamily="34" charset="-120"/>
               </a:rPr>
-              <a:t>Why IES can win</a:t>
-            </a:r>
-            <a:endParaRPr lang="en-US" sz="1500" dirty="0"/>
-          </a:p>
-        </p:txBody>
-      </p:sp>
-      <p:sp>
-        <p:nvSpPr>
-          <p:cNvPr id="13" name="Text 9"/>
-          <p:cNvSpPr txBox="1"/>
-          <p:nvPr/>
-        </p:nvSpPr>
-        <p:spPr>
-          <a:xfrm>
-            <a:off x="4526280" y="1737360"/>
-            <a:ext cx="3337560" cy="2240280"/>
-          </a:xfrm>
-          <a:prstGeom prst="rect">
-            <a:avLst/>
-          </a:prstGeom>
-          <a:noFill/>
-          <a:ln/>
-        </p:spPr>
-        <p:txBody>
-          <a:bodyPr wrap="square" lIns="0" tIns="0" rIns="0" bIns="0" rtlCol="0" anchor="t"/>
-          <a:lstStyle/>
-          <a:p>
-            <a:pPr indent="0" marL="0">
-              <a:spcAft>
-                <a:spcPts val="600"/>
-              </a:spcAft>
-              <a:buNone/>
-            </a:pPr>
-            <a:r>
-              <a:rPr lang="en-US" sz="1150" dirty="0">
-                <a:solidFill>
-                  <a:srgbClr val="1B2433"/>
-                </a:solidFill>
-                <a:latin typeface="Calibri" pitchFamily="34" charset="0"/>
-                <a:ea typeface="Calibri" pitchFamily="34" charset="-122"/>
-                <a:cs typeface="Calibri" pitchFamily="34" charset="-120"/>
-              </a:rPr>
-              <a:t>The case names NetSuite, SAP, Workday and new AI firms. I chose not to invent facts about them.</a:t>
-            </a:r>
-            <a:endParaRPr lang="en-US" sz="1150" dirty="0"/>
-          </a:p>
-          <a:p>
-            <a:pPr indent="0" marL="0">
-              <a:spcAft>
-                <a:spcPts val="600"/>
-              </a:spcAft>
-              <a:buNone/>
-            </a:pPr>
-            <a:r>
-              <a:rPr lang="en-US" sz="1150" dirty="0">
-                <a:solidFill>
-                  <a:srgbClr val="1B2433"/>
-                </a:solidFill>
-                <a:latin typeface="Calibri" pitchFamily="34" charset="0"/>
-                <a:ea typeface="Calibri" pitchFamily="34" charset="-122"/>
-                <a:cs typeface="Calibri" pitchFamily="34" charset="-120"/>
-              </a:rPr>
-              <a:t>My bet is on a mix that is hard to copy. IES holds finance, payroll and sales data in one place. Its agents act inside clear rules. Experts are built in. Developers can sell to IES customers. Trust is visible on every screen.</a:t>
-            </a:r>
-            <a:endParaRPr lang="en-US" sz="1150" dirty="0"/>
-          </a:p>
-          <a:p>
-            <a:pPr indent="0" marL="0">
-              <a:spcAft>
-                <a:spcPts val="600"/>
-              </a:spcAft>
-              <a:buNone/>
-            </a:pPr>
-            <a:r>
-              <a:rPr lang="en-US" sz="1150" dirty="0">
-                <a:solidFill>
-                  <a:srgbClr val="1B2433"/>
-                </a:solidFill>
-                <a:latin typeface="Calibri" pitchFamily="34" charset="0"/>
-                <a:ea typeface="Calibri" pitchFamily="34" charset="-122"/>
-                <a:cs typeface="Calibri" pitchFamily="34" charset="-120"/>
-              </a:rPr>
-              <a:t>I would check this bet through win and loss interviews.</a:t>
-            </a:r>
-            <a:endParaRPr lang="en-US" sz="1150" dirty="0"/>
-          </a:p>
-        </p:txBody>
-      </p:sp>
-      <p:sp>
-        <p:nvSpPr>
-          <p:cNvPr id="14" name="Shape 10"/>
+              <a:t>Every month the books must be checked and closed. This agent matches bank records, fixes gaps between group companies, records unbilled costs and builds the group totals. One run moves the close from 62% to 73% ready. Three tasks finish alone, four wait for approval and two go to people.</a:t>
+            </a:r>
+            <a:endParaRPr lang="en-US" sz="1000" dirty="0"/>
+          </a:p>
+        </p:txBody>
+      </p:sp>
+      <p:sp>
+        <p:nvSpPr>
+          <p:cNvPr id="13" name="Shape 9"/>
           <p:cNvSpPr/>
           <p:nvPr/>
         </p:nvSpPr>
         <p:spPr>
           <a:xfrm>
-            <a:off x="8138160" y="1005840"/>
-            <a:ext cx="3520440" cy="3063240"/>
+            <a:off x="7991856" y="987552"/>
+            <a:ext cx="3611880" cy="1755648"/>
           </a:xfrm>
           <a:prstGeom prst="roundRect">
             <a:avLst>
-              <a:gd name="adj" fmla="val 3582"/>
+              <a:gd name="adj" fmla="val 5208"/>
             </a:avLst>
           </a:prstGeom>
           <a:solidFill>
@@ -6923,14 +5990,497 @@
       </p:sp>
       <p:sp>
         <p:nvSpPr>
-          <p:cNvPr id="15" name="Shape 11"/>
+          <p:cNvPr id="14" name="Shape 10"/>
           <p:cNvSpPr/>
           <p:nvPr/>
         </p:nvSpPr>
         <p:spPr>
           <a:xfrm>
-            <a:off x="8321040" y="1170432"/>
-            <a:ext cx="457200" cy="457200"/>
+            <a:off x="8129016" y="1115568"/>
+            <a:ext cx="402336" cy="402336"/>
+          </a:xfrm>
+          <a:prstGeom prst="ellipse">
+            <a:avLst/>
+          </a:prstGeom>
+          <a:solidFill>
+            <a:srgbClr val="FDF3E3"/>
+          </a:solidFill>
+          <a:ln w="12700">
+            <a:solidFill>
+              <a:srgbClr val="FDF3E3"/>
+            </a:solidFill>
+            <a:prstDash val="solid"/>
+          </a:ln>
+        </p:spPr>
+      </p:sp>
+      <p:pic>
+        <p:nvPicPr>
+          <p:cNvPr id="15" name="Image 2" descr="preencoded.png">    </p:cNvPr>
+          <p:cNvPicPr>
+            <a:picLocks noChangeAspect="1"/>
+          </p:cNvPicPr>
+          <p:nvPr/>
+        </p:nvPicPr>
+        <p:blipFill>
+          <a:blip r:embed="rId3"/>
+          <a:stretch>
+            <a:fillRect/>
+          </a:stretch>
+        </p:blipFill>
+        <p:spPr>
+          <a:xfrm>
+            <a:off x="8229600" y="1216152"/>
+            <a:ext cx="201168" cy="201168"/>
+          </a:xfrm>
+          <a:prstGeom prst="rect">
+            <a:avLst/>
+          </a:prstGeom>
+        </p:spPr>
+      </p:pic>
+      <p:sp>
+        <p:nvSpPr>
+          <p:cNvPr id="16" name="Text 11"/>
+          <p:cNvSpPr txBox="1"/>
+          <p:nvPr/>
+        </p:nvSpPr>
+        <p:spPr>
+          <a:xfrm>
+            <a:off x="8631936" y="1115568"/>
+            <a:ext cx="2834640" cy="402336"/>
+          </a:xfrm>
+          <a:prstGeom prst="rect">
+            <a:avLst/>
+          </a:prstGeom>
+          <a:noFill/>
+          <a:ln/>
+        </p:spPr>
+        <p:txBody>
+          <a:bodyPr wrap="square" lIns="0" tIns="0" rIns="0" bIns="0" rtlCol="0" anchor="ctr"/>
+          <a:lstStyle/>
+          <a:p>
+            <a:pPr indent="0" marL="0">
+              <a:buNone/>
+            </a:pPr>
+            <a:r>
+              <a:rPr lang="en-US" sz="1250" b="1" dirty="0">
+                <a:solidFill>
+                  <a:srgbClr val="14213D"/>
+                </a:solidFill>
+                <a:latin typeface="Calibri" pitchFamily="34" charset="0"/>
+                <a:ea typeface="Calibri" pitchFamily="34" charset="-122"/>
+                <a:cs typeface="Calibri" pitchFamily="34" charset="-120"/>
+              </a:rPr>
+              <a:t>Scenario Lab</a:t>
+            </a:r>
+            <a:endParaRPr lang="en-US" sz="1250" dirty="0"/>
+          </a:p>
+        </p:txBody>
+      </p:sp>
+      <p:sp>
+        <p:nvSpPr>
+          <p:cNvPr id="17" name="Text 12"/>
+          <p:cNvSpPr txBox="1"/>
+          <p:nvPr/>
+        </p:nvSpPr>
+        <p:spPr>
+          <a:xfrm>
+            <a:off x="8147304" y="1591056"/>
+            <a:ext cx="3319272" cy="1097280"/>
+          </a:xfrm>
+          <a:prstGeom prst="rect">
+            <a:avLst/>
+          </a:prstGeom>
+          <a:noFill/>
+          <a:ln/>
+        </p:spPr>
+        <p:txBody>
+          <a:bodyPr wrap="square" lIns="0" tIns="0" rIns="0" bIns="0" rtlCol="0" anchor="t"/>
+          <a:lstStyle/>
+          <a:p>
+            <a:pPr indent="0" marL="0">
+              <a:buNone/>
+            </a:pPr>
+            <a:r>
+              <a:rPr lang="en-US" sz="1000" dirty="0">
+                <a:solidFill>
+                  <a:srgbClr val="1B2433"/>
+                </a:solidFill>
+                <a:latin typeface="Calibri" pitchFamily="34" charset="0"/>
+                <a:ea typeface="Calibri" pitchFamily="34" charset="-122"/>
+                <a:cs typeface="Calibri" pitchFamily="34" charset="-120"/>
+              </a:rPr>
+              <a:t>A leader can type a what-if question in plain English. The tool first shows what it understood and then compares a normal outlook, a bad outlook and a fixed outlook. If sales drop by 8%, cash falls to $2.05M. The suggested actions keep cash safe at $4.12M.</a:t>
+            </a:r>
+            <a:endParaRPr lang="en-US" sz="1000" dirty="0"/>
+          </a:p>
+        </p:txBody>
+      </p:sp>
+      <p:sp>
+        <p:nvSpPr>
+          <p:cNvPr id="18" name="Shape 13"/>
+          <p:cNvSpPr/>
+          <p:nvPr/>
+        </p:nvSpPr>
+        <p:spPr>
+          <a:xfrm>
+            <a:off x="548640" y="2834640"/>
+            <a:ext cx="3611880" cy="1755648"/>
+          </a:xfrm>
+          <a:prstGeom prst="roundRect">
+            <a:avLst>
+              <a:gd name="adj" fmla="val 5208"/>
+            </a:avLst>
+          </a:prstGeom>
+          <a:solidFill>
+            <a:srgbClr val="FFFFFF"/>
+          </a:solidFill>
+          <a:ln w="9525">
+            <a:solidFill>
+              <a:srgbClr val="DDE3EA"/>
+            </a:solidFill>
+            <a:prstDash val="solid"/>
+          </a:ln>
+          <a:effectLst>
+            <a:outerShdw sx="100000" sy="100000" kx="0" ky="0" algn="bl" rotWithShape="0" blurRad="76200" dist="19050" dir="5400000">
+              <a:srgbClr val="000000">
+                <a:alpha val="8000"/>
+              </a:srgbClr>
+            </a:outerShdw>
+          </a:effectLst>
+        </p:spPr>
+      </p:sp>
+      <p:sp>
+        <p:nvSpPr>
+          <p:cNvPr id="19" name="Shape 14"/>
+          <p:cNvSpPr/>
+          <p:nvPr/>
+        </p:nvSpPr>
+        <p:spPr>
+          <a:xfrm>
+            <a:off x="685800" y="2962656"/>
+            <a:ext cx="402336" cy="402336"/>
+          </a:xfrm>
+          <a:prstGeom prst="ellipse">
+            <a:avLst/>
+          </a:prstGeom>
+          <a:solidFill>
+            <a:srgbClr val="E8EDFC"/>
+          </a:solidFill>
+          <a:ln w="12700">
+            <a:solidFill>
+              <a:srgbClr val="E8EDFC"/>
+            </a:solidFill>
+            <a:prstDash val="solid"/>
+          </a:ln>
+        </p:spPr>
+      </p:sp>
+      <p:pic>
+        <p:nvPicPr>
+          <p:cNvPr id="20" name="Image 3" descr="preencoded.png">    </p:cNvPr>
+          <p:cNvPicPr>
+            <a:picLocks noChangeAspect="1"/>
+          </p:cNvPicPr>
+          <p:nvPr/>
+        </p:nvPicPr>
+        <p:blipFill>
+          <a:blip r:embed="rId4"/>
+          <a:stretch>
+            <a:fillRect/>
+          </a:stretch>
+        </p:blipFill>
+        <p:spPr>
+          <a:xfrm>
+            <a:off x="786384" y="3063240"/>
+            <a:ext cx="201168" cy="201168"/>
+          </a:xfrm>
+          <a:prstGeom prst="rect">
+            <a:avLst/>
+          </a:prstGeom>
+        </p:spPr>
+      </p:pic>
+      <p:sp>
+        <p:nvSpPr>
+          <p:cNvPr id="21" name="Text 15"/>
+          <p:cNvSpPr txBox="1"/>
+          <p:nvPr/>
+        </p:nvSpPr>
+        <p:spPr>
+          <a:xfrm>
+            <a:off x="1188720" y="2962656"/>
+            <a:ext cx="2834640" cy="402336"/>
+          </a:xfrm>
+          <a:prstGeom prst="rect">
+            <a:avLst/>
+          </a:prstGeom>
+          <a:noFill/>
+          <a:ln/>
+        </p:spPr>
+        <p:txBody>
+          <a:bodyPr wrap="square" lIns="0" tIns="0" rIns="0" bIns="0" rtlCol="0" anchor="ctr"/>
+          <a:lstStyle/>
+          <a:p>
+            <a:pPr indent="0" marL="0">
+              <a:buNone/>
+            </a:pPr>
+            <a:r>
+              <a:rPr lang="en-US" sz="1250" b="1" dirty="0">
+                <a:solidFill>
+                  <a:srgbClr val="14213D"/>
+                </a:solidFill>
+                <a:latin typeface="Calibri" pitchFamily="34" charset="0"/>
+                <a:ea typeface="Calibri" pitchFamily="34" charset="-122"/>
+                <a:cs typeface="Calibri" pitchFamily="34" charset="-120"/>
+              </a:rPr>
+              <a:t>Expert Network</a:t>
+            </a:r>
+            <a:endParaRPr lang="en-US" sz="1250" dirty="0"/>
+          </a:p>
+        </p:txBody>
+      </p:sp>
+      <p:sp>
+        <p:nvSpPr>
+          <p:cNvPr id="22" name="Text 16"/>
+          <p:cNvSpPr txBox="1"/>
+          <p:nvPr/>
+        </p:nvSpPr>
+        <p:spPr>
+          <a:xfrm>
+            <a:off x="704088" y="3438144"/>
+            <a:ext cx="3319272" cy="1097280"/>
+          </a:xfrm>
+          <a:prstGeom prst="rect">
+            <a:avLst/>
+          </a:prstGeom>
+          <a:noFill/>
+          <a:ln/>
+        </p:spPr>
+        <p:txBody>
+          <a:bodyPr wrap="square" lIns="0" tIns="0" rIns="0" bIns="0" rtlCol="0" anchor="t"/>
+          <a:lstStyle/>
+          <a:p>
+            <a:pPr indent="0" marL="0">
+              <a:buNone/>
+            </a:pPr>
+            <a:r>
+              <a:rPr lang="en-US" sz="1000" dirty="0">
+                <a:solidFill>
+                  <a:srgbClr val="1B2433"/>
+                </a:solidFill>
+                <a:latin typeface="Calibri" pitchFamily="34" charset="0"/>
+                <a:ea typeface="Calibri" pitchFamily="34" charset="-122"/>
+                <a:cs typeface="Calibri" pitchFamily="34" charset="-120"/>
+              </a:rPr>
+              <a:t>Some decisions need a qualified human. The agent puts the question, the facts, its own view and the documents into one file. It then sends the file to the best matched expert. A $1.24M sale was settled by an accountant who needed no follow-up questions.</a:t>
+            </a:r>
+            <a:endParaRPr lang="en-US" sz="1000" dirty="0"/>
+          </a:p>
+        </p:txBody>
+      </p:sp>
+      <p:sp>
+        <p:nvSpPr>
+          <p:cNvPr id="23" name="Shape 17"/>
+          <p:cNvSpPr/>
+          <p:nvPr/>
+        </p:nvSpPr>
+        <p:spPr>
+          <a:xfrm>
+            <a:off x="4270248" y="2834640"/>
+            <a:ext cx="3611880" cy="1755648"/>
+          </a:xfrm>
+          <a:prstGeom prst="roundRect">
+            <a:avLst>
+              <a:gd name="adj" fmla="val 5208"/>
+            </a:avLst>
+          </a:prstGeom>
+          <a:solidFill>
+            <a:srgbClr val="FFFFFF"/>
+          </a:solidFill>
+          <a:ln w="9525">
+            <a:solidFill>
+              <a:srgbClr val="DDE3EA"/>
+            </a:solidFill>
+            <a:prstDash val="solid"/>
+          </a:ln>
+          <a:effectLst>
+            <a:outerShdw sx="100000" sy="100000" kx="0" ky="0" algn="bl" rotWithShape="0" blurRad="76200" dist="19050" dir="5400000">
+              <a:srgbClr val="000000">
+                <a:alpha val="8000"/>
+              </a:srgbClr>
+            </a:outerShdw>
+          </a:effectLst>
+        </p:spPr>
+      </p:sp>
+      <p:sp>
+        <p:nvSpPr>
+          <p:cNvPr id="24" name="Shape 18"/>
+          <p:cNvSpPr/>
+          <p:nvPr/>
+        </p:nvSpPr>
+        <p:spPr>
+          <a:xfrm>
+            <a:off x="4407408" y="2962656"/>
+            <a:ext cx="402336" cy="402336"/>
+          </a:xfrm>
+          <a:prstGeom prst="ellipse">
+            <a:avLst/>
+          </a:prstGeom>
+          <a:solidFill>
+            <a:srgbClr val="FBEAE8"/>
+          </a:solidFill>
+          <a:ln w="12700">
+            <a:solidFill>
+              <a:srgbClr val="FBEAE8"/>
+            </a:solidFill>
+            <a:prstDash val="solid"/>
+          </a:ln>
+        </p:spPr>
+      </p:sp>
+      <p:pic>
+        <p:nvPicPr>
+          <p:cNvPr id="25" name="Image 4" descr="preencoded.png">    </p:cNvPr>
+          <p:cNvPicPr>
+            <a:picLocks noChangeAspect="1"/>
+          </p:cNvPicPr>
+          <p:nvPr/>
+        </p:nvPicPr>
+        <p:blipFill>
+          <a:blip r:embed="rId5"/>
+          <a:stretch>
+            <a:fillRect/>
+          </a:stretch>
+        </p:blipFill>
+        <p:spPr>
+          <a:xfrm>
+            <a:off x="4507992" y="3063240"/>
+            <a:ext cx="201168" cy="201168"/>
+          </a:xfrm>
+          <a:prstGeom prst="rect">
+            <a:avLst/>
+          </a:prstGeom>
+        </p:spPr>
+      </p:pic>
+      <p:sp>
+        <p:nvSpPr>
+          <p:cNvPr id="26" name="Text 19"/>
+          <p:cNvSpPr txBox="1"/>
+          <p:nvPr/>
+        </p:nvSpPr>
+        <p:spPr>
+          <a:xfrm>
+            <a:off x="4910328" y="2962656"/>
+            <a:ext cx="2834640" cy="402336"/>
+          </a:xfrm>
+          <a:prstGeom prst="rect">
+            <a:avLst/>
+          </a:prstGeom>
+          <a:noFill/>
+          <a:ln/>
+        </p:spPr>
+        <p:txBody>
+          <a:bodyPr wrap="square" lIns="0" tIns="0" rIns="0" bIns="0" rtlCol="0" anchor="ctr"/>
+          <a:lstStyle/>
+          <a:p>
+            <a:pPr indent="0" marL="0">
+              <a:buNone/>
+            </a:pPr>
+            <a:r>
+              <a:rPr lang="en-US" sz="1250" b="1" dirty="0">
+                <a:solidFill>
+                  <a:srgbClr val="14213D"/>
+                </a:solidFill>
+                <a:latin typeface="Calibri" pitchFamily="34" charset="0"/>
+                <a:ea typeface="Calibri" pitchFamily="34" charset="-122"/>
+                <a:cs typeface="Calibri" pitchFamily="34" charset="-120"/>
+              </a:rPr>
+              <a:t>Compliance Agent</a:t>
+            </a:r>
+            <a:endParaRPr lang="en-US" sz="1250" dirty="0"/>
+          </a:p>
+        </p:txBody>
+      </p:sp>
+      <p:sp>
+        <p:nvSpPr>
+          <p:cNvPr id="27" name="Text 20"/>
+          <p:cNvSpPr txBox="1"/>
+          <p:nvPr/>
+        </p:nvSpPr>
+        <p:spPr>
+          <a:xfrm>
+            <a:off x="4425696" y="3438144"/>
+            <a:ext cx="3319272" cy="1097280"/>
+          </a:xfrm>
+          <a:prstGeom prst="rect">
+            <a:avLst/>
+          </a:prstGeom>
+          <a:noFill/>
+          <a:ln/>
+        </p:spPr>
+        <p:txBody>
+          <a:bodyPr wrap="square" lIns="0" tIns="0" rIns="0" bIns="0" rtlCol="0" anchor="t"/>
+          <a:lstStyle/>
+          <a:p>
+            <a:pPr indent="0" marL="0">
+              <a:buNone/>
+            </a:pPr>
+            <a:r>
+              <a:rPr lang="en-US" sz="1000" dirty="0">
+                <a:solidFill>
+                  <a:srgbClr val="1B2433"/>
+                </a:solidFill>
+                <a:latin typeface="Calibri" pitchFamily="34" charset="0"/>
+                <a:ea typeface="Calibri" pitchFamily="34" charset="-122"/>
+                <a:cs typeface="Calibri" pitchFamily="34" charset="-120"/>
+              </a:rPr>
+              <a:t>This agent tracks tax filings, sales tax rules in each US state and internal controls. It prepares every filing for approval before it is sent. It also spots risks such as one staff member who can both create a vendor and pay that vendor.</a:t>
+            </a:r>
+            <a:endParaRPr lang="en-US" sz="1000" dirty="0"/>
+          </a:p>
+        </p:txBody>
+      </p:sp>
+      <p:sp>
+        <p:nvSpPr>
+          <p:cNvPr id="28" name="Shape 21"/>
+          <p:cNvSpPr/>
+          <p:nvPr/>
+        </p:nvSpPr>
+        <p:spPr>
+          <a:xfrm>
+            <a:off x="7991856" y="2834640"/>
+            <a:ext cx="3611880" cy="1755648"/>
+          </a:xfrm>
+          <a:prstGeom prst="roundRect">
+            <a:avLst>
+              <a:gd name="adj" fmla="val 5208"/>
+            </a:avLst>
+          </a:prstGeom>
+          <a:solidFill>
+            <a:srgbClr val="FFFFFF"/>
+          </a:solidFill>
+          <a:ln w="9525">
+            <a:solidFill>
+              <a:srgbClr val="DDE3EA"/>
+            </a:solidFill>
+            <a:prstDash val="solid"/>
+          </a:ln>
+          <a:effectLst>
+            <a:outerShdw sx="100000" sy="100000" kx="0" ky="0" algn="bl" rotWithShape="0" blurRad="76200" dist="19050" dir="5400000">
+              <a:srgbClr val="000000">
+                <a:alpha val="8000"/>
+              </a:srgbClr>
+            </a:outerShdw>
+          </a:effectLst>
+        </p:spPr>
+      </p:sp>
+      <p:sp>
+        <p:nvSpPr>
+          <p:cNvPr id="29" name="Shape 22"/>
+          <p:cNvSpPr/>
+          <p:nvPr/>
+        </p:nvSpPr>
+        <p:spPr>
+          <a:xfrm>
+            <a:off x="8129016" y="2962656"/>
+            <a:ext cx="402336" cy="402336"/>
           </a:xfrm>
           <a:prstGeom prst="ellipse">
             <a:avLst/>
@@ -6948,7 +6498,1466 @@
       </p:sp>
       <p:pic>
         <p:nvPicPr>
-          <p:cNvPr id="16" name="Image 2" descr="preencoded.png">    </p:cNvPr>
+          <p:cNvPr id="30" name="Image 5" descr="preencoded.png">    </p:cNvPr>
+          <p:cNvPicPr>
+            <a:picLocks noChangeAspect="1"/>
+          </p:cNvPicPr>
+          <p:nvPr/>
+        </p:nvPicPr>
+        <p:blipFill>
+          <a:blip r:embed="rId6"/>
+          <a:stretch>
+            <a:fillRect/>
+          </a:stretch>
+        </p:blipFill>
+        <p:spPr>
+          <a:xfrm>
+            <a:off x="8229600" y="3063240"/>
+            <a:ext cx="201168" cy="201168"/>
+          </a:xfrm>
+          <a:prstGeom prst="rect">
+            <a:avLst/>
+          </a:prstGeom>
+        </p:spPr>
+      </p:pic>
+      <p:sp>
+        <p:nvSpPr>
+          <p:cNvPr id="31" name="Text 23"/>
+          <p:cNvSpPr txBox="1"/>
+          <p:nvPr/>
+        </p:nvSpPr>
+        <p:spPr>
+          <a:xfrm>
+            <a:off x="8631936" y="2962656"/>
+            <a:ext cx="2834640" cy="402336"/>
+          </a:xfrm>
+          <a:prstGeom prst="rect">
+            <a:avLst/>
+          </a:prstGeom>
+          <a:noFill/>
+          <a:ln/>
+        </p:spPr>
+        <p:txBody>
+          <a:bodyPr wrap="square" lIns="0" tIns="0" rIns="0" bIns="0" rtlCol="0" anchor="ctr"/>
+          <a:lstStyle/>
+          <a:p>
+            <a:pPr indent="0" marL="0">
+              <a:buNone/>
+            </a:pPr>
+            <a:r>
+              <a:rPr lang="en-US" sz="1250" b="1" dirty="0">
+                <a:solidFill>
+                  <a:srgbClr val="14213D"/>
+                </a:solidFill>
+                <a:latin typeface="Calibri" pitchFamily="34" charset="0"/>
+                <a:ea typeface="Calibri" pitchFamily="34" charset="-122"/>
+                <a:cs typeface="Calibri" pitchFamily="34" charset="-120"/>
+              </a:rPr>
+              <a:t>App and Agent Marketplace</a:t>
+            </a:r>
+            <a:endParaRPr lang="en-US" sz="1250" dirty="0"/>
+          </a:p>
+        </p:txBody>
+      </p:sp>
+      <p:sp>
+        <p:nvSpPr>
+          <p:cNvPr id="32" name="Text 24"/>
+          <p:cNvSpPr txBox="1"/>
+          <p:nvPr/>
+        </p:nvSpPr>
+        <p:spPr>
+          <a:xfrm>
+            <a:off x="8147304" y="3438144"/>
+            <a:ext cx="3319272" cy="1097280"/>
+          </a:xfrm>
+          <a:prstGeom prst="rect">
+            <a:avLst/>
+          </a:prstGeom>
+          <a:noFill/>
+          <a:ln/>
+        </p:spPr>
+        <p:txBody>
+          <a:bodyPr wrap="square" lIns="0" tIns="0" rIns="0" bIns="0" rtlCol="0" anchor="t"/>
+          <a:lstStyle/>
+          <a:p>
+            <a:pPr indent="0" marL="0">
+              <a:buNone/>
+            </a:pPr>
+            <a:r>
+              <a:rPr lang="en-US" sz="1000" dirty="0">
+                <a:solidFill>
+                  <a:srgbClr val="1B2433"/>
+                </a:solidFill>
+                <a:latin typeface="Calibri" pitchFamily="34" charset="0"/>
+                <a:ea typeface="Calibri" pitchFamily="34" charset="-122"/>
+                <a:cs typeface="Calibri" pitchFamily="34" charset="-120"/>
+              </a:rPr>
+              <a:t>Customers can add agents, apps and expert services from other companies. Each item shows what data it can read and what it can change before anyone installs it. A partner agent that checks freight bills found $23,400 of overcharges soon after it was added.</a:t>
+            </a:r>
+            <a:endParaRPr lang="en-US" sz="1000" dirty="0"/>
+          </a:p>
+        </p:txBody>
+      </p:sp>
+      <p:sp>
+        <p:nvSpPr>
+          <p:cNvPr id="33" name="Shape 25"/>
+          <p:cNvSpPr/>
+          <p:nvPr/>
+        </p:nvSpPr>
+        <p:spPr>
+          <a:xfrm>
+            <a:off x="548640" y="4681728"/>
+            <a:ext cx="3611880" cy="1755648"/>
+          </a:xfrm>
+          <a:prstGeom prst="roundRect">
+            <a:avLst>
+              <a:gd name="adj" fmla="val 5208"/>
+            </a:avLst>
+          </a:prstGeom>
+          <a:solidFill>
+            <a:srgbClr val="FFFFFF"/>
+          </a:solidFill>
+          <a:ln w="9525">
+            <a:solidFill>
+              <a:srgbClr val="DDE3EA"/>
+            </a:solidFill>
+            <a:prstDash val="solid"/>
+          </a:ln>
+          <a:effectLst>
+            <a:outerShdw sx="100000" sy="100000" kx="0" ky="0" algn="bl" rotWithShape="0" blurRad="76200" dist="19050" dir="5400000">
+              <a:srgbClr val="000000">
+                <a:alpha val="8000"/>
+              </a:srgbClr>
+            </a:outerShdw>
+          </a:effectLst>
+        </p:spPr>
+      </p:sp>
+      <p:sp>
+        <p:nvSpPr>
+          <p:cNvPr id="34" name="Shape 26"/>
+          <p:cNvSpPr/>
+          <p:nvPr/>
+        </p:nvSpPr>
+        <p:spPr>
+          <a:xfrm>
+            <a:off x="685800" y="4809744"/>
+            <a:ext cx="402336" cy="402336"/>
+          </a:xfrm>
+          <a:prstGeom prst="ellipse">
+            <a:avLst/>
+          </a:prstGeom>
+          <a:solidFill>
+            <a:srgbClr val="FDF3E3"/>
+          </a:solidFill>
+          <a:ln w="12700">
+            <a:solidFill>
+              <a:srgbClr val="FDF3E3"/>
+            </a:solidFill>
+            <a:prstDash val="solid"/>
+          </a:ln>
+        </p:spPr>
+      </p:sp>
+      <p:pic>
+        <p:nvPicPr>
+          <p:cNvPr id="35" name="Image 6" descr="preencoded.png">    </p:cNvPr>
+          <p:cNvPicPr>
+            <a:picLocks noChangeAspect="1"/>
+          </p:cNvPicPr>
+          <p:nvPr/>
+        </p:nvPicPr>
+        <p:blipFill>
+          <a:blip r:embed="rId7"/>
+          <a:stretch>
+            <a:fillRect/>
+          </a:stretch>
+        </p:blipFill>
+        <p:spPr>
+          <a:xfrm>
+            <a:off x="786384" y="4910328"/>
+            <a:ext cx="201168" cy="201168"/>
+          </a:xfrm>
+          <a:prstGeom prst="rect">
+            <a:avLst/>
+          </a:prstGeom>
+        </p:spPr>
+      </p:pic>
+      <p:sp>
+        <p:nvSpPr>
+          <p:cNvPr id="36" name="Text 27"/>
+          <p:cNvSpPr txBox="1"/>
+          <p:nvPr/>
+        </p:nvSpPr>
+        <p:spPr>
+          <a:xfrm>
+            <a:off x="1188720" y="4809744"/>
+            <a:ext cx="2834640" cy="402336"/>
+          </a:xfrm>
+          <a:prstGeom prst="rect">
+            <a:avLst/>
+          </a:prstGeom>
+          <a:noFill/>
+          <a:ln/>
+        </p:spPr>
+        <p:txBody>
+          <a:bodyPr wrap="square" lIns="0" tIns="0" rIns="0" bIns="0" rtlCol="0" anchor="ctr"/>
+          <a:lstStyle/>
+          <a:p>
+            <a:pPr indent="0" marL="0">
+              <a:buNone/>
+            </a:pPr>
+            <a:r>
+              <a:rPr lang="en-US" sz="1250" b="1" dirty="0">
+                <a:solidFill>
+                  <a:srgbClr val="14213D"/>
+                </a:solidFill>
+                <a:latin typeface="Calibri" pitchFamily="34" charset="0"/>
+                <a:ea typeface="Calibri" pitchFamily="34" charset="-122"/>
+                <a:cs typeface="Calibri" pitchFamily="34" charset="-120"/>
+              </a:rPr>
+              <a:t>Agent Studio for developers</a:t>
+            </a:r>
+            <a:endParaRPr lang="en-US" sz="1250" dirty="0"/>
+          </a:p>
+        </p:txBody>
+      </p:sp>
+      <p:sp>
+        <p:nvSpPr>
+          <p:cNvPr id="37" name="Text 28"/>
+          <p:cNvSpPr txBox="1"/>
+          <p:nvPr/>
+        </p:nvSpPr>
+        <p:spPr>
+          <a:xfrm>
+            <a:off x="704088" y="5285232"/>
+            <a:ext cx="3319272" cy="1097280"/>
+          </a:xfrm>
+          <a:prstGeom prst="rect">
+            <a:avLst/>
+          </a:prstGeom>
+          <a:noFill/>
+          <a:ln/>
+        </p:spPr>
+        <p:txBody>
+          <a:bodyPr wrap="square" lIns="0" tIns="0" rIns="0" bIns="0" rtlCol="0" anchor="t"/>
+          <a:lstStyle/>
+          <a:p>
+            <a:pPr indent="0" marL="0">
+              <a:buNone/>
+            </a:pPr>
+            <a:r>
+              <a:rPr lang="en-US" sz="1000" dirty="0">
+                <a:solidFill>
+                  <a:srgbClr val="1B2433"/>
+                </a:solidFill>
+                <a:latin typeface="Calibri" pitchFamily="34" charset="0"/>
+                <a:ea typeface="Calibri" pitchFamily="34" charset="-122"/>
+                <a:cs typeface="Calibri" pitchFamily="34" charset="-120"/>
+              </a:rPr>
+              <a:t>A developer writes in plain English what a new agent should do. The studio turns that text into a clear workflow with steps, tools and safety rules. Large amounts always pass through a human approval step before anything is sent.</a:t>
+            </a:r>
+            <a:endParaRPr lang="en-US" sz="1000" dirty="0"/>
+          </a:p>
+        </p:txBody>
+      </p:sp>
+      <p:sp>
+        <p:nvSpPr>
+          <p:cNvPr id="38" name="Shape 29"/>
+          <p:cNvSpPr/>
+          <p:nvPr/>
+        </p:nvSpPr>
+        <p:spPr>
+          <a:xfrm>
+            <a:off x="4270248" y="4681728"/>
+            <a:ext cx="3611880" cy="1755648"/>
+          </a:xfrm>
+          <a:prstGeom prst="roundRect">
+            <a:avLst>
+              <a:gd name="adj" fmla="val 5208"/>
+            </a:avLst>
+          </a:prstGeom>
+          <a:solidFill>
+            <a:srgbClr val="FFFFFF"/>
+          </a:solidFill>
+          <a:ln w="9525">
+            <a:solidFill>
+              <a:srgbClr val="DDE3EA"/>
+            </a:solidFill>
+            <a:prstDash val="solid"/>
+          </a:ln>
+          <a:effectLst>
+            <a:outerShdw sx="100000" sy="100000" kx="0" ky="0" algn="bl" rotWithShape="0" blurRad="76200" dist="19050" dir="5400000">
+              <a:srgbClr val="000000">
+                <a:alpha val="8000"/>
+              </a:srgbClr>
+            </a:outerShdw>
+          </a:effectLst>
+        </p:spPr>
+      </p:sp>
+      <p:sp>
+        <p:nvSpPr>
+          <p:cNvPr id="39" name="Shape 30"/>
+          <p:cNvSpPr/>
+          <p:nvPr/>
+        </p:nvSpPr>
+        <p:spPr>
+          <a:xfrm>
+            <a:off x="4407408" y="4809744"/>
+            <a:ext cx="402336" cy="402336"/>
+          </a:xfrm>
+          <a:prstGeom prst="ellipse">
+            <a:avLst/>
+          </a:prstGeom>
+          <a:solidFill>
+            <a:srgbClr val="E8EDFC"/>
+          </a:solidFill>
+          <a:ln w="12700">
+            <a:solidFill>
+              <a:srgbClr val="E8EDFC"/>
+            </a:solidFill>
+            <a:prstDash val="solid"/>
+          </a:ln>
+        </p:spPr>
+      </p:sp>
+      <p:pic>
+        <p:nvPicPr>
+          <p:cNvPr id="40" name="Image 7" descr="preencoded.png">    </p:cNvPr>
+          <p:cNvPicPr>
+            <a:picLocks noChangeAspect="1"/>
+          </p:cNvPicPr>
+          <p:nvPr/>
+        </p:nvPicPr>
+        <p:blipFill>
+          <a:blip r:embed="rId8"/>
+          <a:stretch>
+            <a:fillRect/>
+          </a:stretch>
+        </p:blipFill>
+        <p:spPr>
+          <a:xfrm>
+            <a:off x="4507992" y="4910328"/>
+            <a:ext cx="201168" cy="201168"/>
+          </a:xfrm>
+          <a:prstGeom prst="rect">
+            <a:avLst/>
+          </a:prstGeom>
+        </p:spPr>
+      </p:pic>
+      <p:sp>
+        <p:nvSpPr>
+          <p:cNvPr id="41" name="Text 31"/>
+          <p:cNvSpPr txBox="1"/>
+          <p:nvPr/>
+        </p:nvSpPr>
+        <p:spPr>
+          <a:xfrm>
+            <a:off x="4910328" y="4809744"/>
+            <a:ext cx="2834640" cy="402336"/>
+          </a:xfrm>
+          <a:prstGeom prst="rect">
+            <a:avLst/>
+          </a:prstGeom>
+          <a:noFill/>
+          <a:ln/>
+        </p:spPr>
+        <p:txBody>
+          <a:bodyPr wrap="square" lIns="0" tIns="0" rIns="0" bIns="0" rtlCol="0" anchor="ctr"/>
+          <a:lstStyle/>
+          <a:p>
+            <a:pPr indent="0" marL="0">
+              <a:buNone/>
+            </a:pPr>
+            <a:r>
+              <a:rPr lang="en-US" sz="1250" b="1" dirty="0">
+                <a:solidFill>
+                  <a:srgbClr val="14213D"/>
+                </a:solidFill>
+                <a:latin typeface="Calibri" pitchFamily="34" charset="0"/>
+                <a:ea typeface="Calibri" pitchFamily="34" charset="-122"/>
+                <a:cs typeface="Calibri" pitchFamily="34" charset="-120"/>
+              </a:rPr>
+              <a:t>Test Lab and Publishing</a:t>
+            </a:r>
+            <a:endParaRPr lang="en-US" sz="1250" dirty="0"/>
+          </a:p>
+        </p:txBody>
+      </p:sp>
+      <p:sp>
+        <p:nvSpPr>
+          <p:cNvPr id="42" name="Text 32"/>
+          <p:cNvSpPr txBox="1"/>
+          <p:nvPr/>
+        </p:nvSpPr>
+        <p:spPr>
+          <a:xfrm>
+            <a:off x="4425696" y="5285232"/>
+            <a:ext cx="3319272" cy="1097280"/>
+          </a:xfrm>
+          <a:prstGeom prst="rect">
+            <a:avLst/>
+          </a:prstGeom>
+          <a:noFill/>
+          <a:ln/>
+        </p:spPr>
+        <p:txBody>
+          <a:bodyPr wrap="square" lIns="0" tIns="0" rIns="0" bIns="0" rtlCol="0" anchor="t"/>
+          <a:lstStyle/>
+          <a:p>
+            <a:pPr indent="0" marL="0">
+              <a:buNone/>
+            </a:pPr>
+            <a:r>
+              <a:rPr lang="en-US" sz="1000" dirty="0">
+                <a:solidFill>
+                  <a:srgbClr val="1B2433"/>
+                </a:solidFill>
+                <a:latin typeface="Calibri" pitchFamily="34" charset="0"/>
+                <a:ea typeface="Calibri" pitchFamily="34" charset="-122"/>
+                <a:cs typeface="Calibri" pitchFamily="34" charset="-120"/>
+              </a:rPr>
+              <a:t>Each agent is tested on eight tricky situations before it can be sold. The tests caught a currency mistake that was fixed with one click. When data was missing the agent asked a human instead of guessing. The developer then sets a price and publishes the agent.</a:t>
+            </a:r>
+            <a:endParaRPr lang="en-US" sz="1000" dirty="0"/>
+          </a:p>
+        </p:txBody>
+      </p:sp>
+      <p:sp>
+        <p:nvSpPr>
+          <p:cNvPr id="43" name="Shape 33"/>
+          <p:cNvSpPr/>
+          <p:nvPr/>
+        </p:nvSpPr>
+        <p:spPr>
+          <a:xfrm>
+            <a:off x="7991856" y="4681728"/>
+            <a:ext cx="3611880" cy="1755648"/>
+          </a:xfrm>
+          <a:prstGeom prst="roundRect">
+            <a:avLst>
+              <a:gd name="adj" fmla="val 5208"/>
+            </a:avLst>
+          </a:prstGeom>
+          <a:solidFill>
+            <a:srgbClr val="FFFFFF"/>
+          </a:solidFill>
+          <a:ln w="9525">
+            <a:solidFill>
+              <a:srgbClr val="DDE3EA"/>
+            </a:solidFill>
+            <a:prstDash val="solid"/>
+          </a:ln>
+          <a:effectLst>
+            <a:outerShdw sx="100000" sy="100000" kx="0" ky="0" algn="bl" rotWithShape="0" blurRad="76200" dist="19050" dir="5400000">
+              <a:srgbClr val="000000">
+                <a:alpha val="8000"/>
+              </a:srgbClr>
+            </a:outerShdw>
+          </a:effectLst>
+        </p:spPr>
+      </p:sp>
+      <p:sp>
+        <p:nvSpPr>
+          <p:cNvPr id="44" name="Shape 34"/>
+          <p:cNvSpPr/>
+          <p:nvPr/>
+        </p:nvSpPr>
+        <p:spPr>
+          <a:xfrm>
+            <a:off x="8129016" y="4809744"/>
+            <a:ext cx="402336" cy="402336"/>
+          </a:xfrm>
+          <a:prstGeom prst="ellipse">
+            <a:avLst/>
+          </a:prstGeom>
+          <a:solidFill>
+            <a:srgbClr val="FBEAE8"/>
+          </a:solidFill>
+          <a:ln w="12700">
+            <a:solidFill>
+              <a:srgbClr val="FBEAE8"/>
+            </a:solidFill>
+            <a:prstDash val="solid"/>
+          </a:ln>
+        </p:spPr>
+      </p:sp>
+      <p:pic>
+        <p:nvPicPr>
+          <p:cNvPr id="45" name="Image 8" descr="preencoded.png">    </p:cNvPr>
+          <p:cNvPicPr>
+            <a:picLocks noChangeAspect="1"/>
+          </p:cNvPicPr>
+          <p:nvPr/>
+        </p:nvPicPr>
+        <p:blipFill>
+          <a:blip r:embed="rId9"/>
+          <a:stretch>
+            <a:fillRect/>
+          </a:stretch>
+        </p:blipFill>
+        <p:spPr>
+          <a:xfrm>
+            <a:off x="8229600" y="4910328"/>
+            <a:ext cx="201168" cy="201168"/>
+          </a:xfrm>
+          <a:prstGeom prst="rect">
+            <a:avLst/>
+          </a:prstGeom>
+        </p:spPr>
+      </p:pic>
+      <p:sp>
+        <p:nvSpPr>
+          <p:cNvPr id="46" name="Text 35"/>
+          <p:cNvSpPr txBox="1"/>
+          <p:nvPr/>
+        </p:nvSpPr>
+        <p:spPr>
+          <a:xfrm>
+            <a:off x="8631936" y="4809744"/>
+            <a:ext cx="2834640" cy="402336"/>
+          </a:xfrm>
+          <a:prstGeom prst="rect">
+            <a:avLst/>
+          </a:prstGeom>
+          <a:noFill/>
+          <a:ln/>
+        </p:spPr>
+        <p:txBody>
+          <a:bodyPr wrap="square" lIns="0" tIns="0" rIns="0" bIns="0" rtlCol="0" anchor="ctr"/>
+          <a:lstStyle/>
+          <a:p>
+            <a:pPr indent="0" marL="0">
+              <a:buNone/>
+            </a:pPr>
+            <a:r>
+              <a:rPr lang="en-US" sz="1250" b="1" dirty="0">
+                <a:solidFill>
+                  <a:srgbClr val="14213D"/>
+                </a:solidFill>
+                <a:latin typeface="Calibri" pitchFamily="34" charset="0"/>
+                <a:ea typeface="Calibri" pitchFamily="34" charset="-122"/>
+                <a:cs typeface="Calibri" pitchFamily="34" charset="-120"/>
+              </a:rPr>
+              <a:t>Trust Center and Audit Log</a:t>
+            </a:r>
+            <a:endParaRPr lang="en-US" sz="1250" dirty="0"/>
+          </a:p>
+        </p:txBody>
+      </p:sp>
+      <p:sp>
+        <p:nvSpPr>
+          <p:cNvPr id="47" name="Text 36"/>
+          <p:cNvSpPr txBox="1"/>
+          <p:nvPr/>
+        </p:nvSpPr>
+        <p:spPr>
+          <a:xfrm>
+            <a:off x="8147304" y="5285232"/>
+            <a:ext cx="3319272" cy="1097280"/>
+          </a:xfrm>
+          <a:prstGeom prst="rect">
+            <a:avLst/>
+          </a:prstGeom>
+          <a:noFill/>
+          <a:ln/>
+        </p:spPr>
+        <p:txBody>
+          <a:bodyPr wrap="square" lIns="0" tIns="0" rIns="0" bIns="0" rtlCol="0" anchor="t"/>
+          <a:lstStyle/>
+          <a:p>
+            <a:pPr indent="0" marL="0">
+              <a:buNone/>
+            </a:pPr>
+            <a:r>
+              <a:rPr lang="en-US" sz="1000" dirty="0">
+                <a:solidFill>
+                  <a:srgbClr val="1B2433"/>
+                </a:solidFill>
+                <a:latin typeface="Calibri" pitchFamily="34" charset="0"/>
+                <a:ea typeface="Calibri" pitchFamily="34" charset="-122"/>
+                <a:cs typeface="Calibri" pitchFamily="34" charset="-120"/>
+              </a:rPr>
+              <a:t>One screen controls every agent from Intuit or from partners. Leaders set money limits, choose what data each agent can see and can pause any agent at once. Every action is saved with its proof, its confidence and the person who approved it.</a:t>
+            </a:r>
+            <a:endParaRPr lang="en-US" sz="1000" dirty="0"/>
+          </a:p>
+        </p:txBody>
+      </p:sp>
+    </p:spTree>
+  </p:cSld>
+  <p:clrMapOvr>
+    <a:masterClrMapping/>
+  </p:clrMapOvr>
+</p:sld>
+</file>
+
+<file path=ppt/slides/slide5.xml><?xml version="1.0" encoding="utf-8"?>
+<p:sld xmlns:a="http://schemas.openxmlformats.org/drawingml/2006/main" xmlns:r="http://schemas.openxmlformats.org/officeDocument/2006/relationships" xmlns:p="http://schemas.openxmlformats.org/presentationml/2006/main">
+  <p:cSld name="Slide 5">
+    <p:bg>
+      <p:bgPr>
+        <a:solidFill>
+          <a:srgbClr val="FFFFFF"/>
+        </a:solidFill>
+      </p:bgPr>
+    </p:bg>
+    <p:spTree>
+      <p:nvGrpSpPr>
+        <p:cNvPr id="1" name=""/>
+        <p:cNvGrpSpPr/>
+        <p:nvPr/>
+      </p:nvGrpSpPr>
+      <p:grpSpPr>
+        <a:xfrm>
+          <a:off x="0" y="0"/>
+          <a:ext cx="0" cy="0"/>
+          <a:chOff x="0" y="0"/>
+          <a:chExt cx="0" cy="0"/>
+        </a:xfrm>
+      </p:grpSpPr>
+      <p:sp>
+        <p:nvSpPr>
+          <p:cNvPr id="2" name="Text 0"/>
+          <p:cNvSpPr txBox="1"/>
+          <p:nvPr/>
+        </p:nvSpPr>
+        <p:spPr>
+          <a:xfrm>
+            <a:off x="548640" y="320040"/>
+            <a:ext cx="11064240" cy="548640"/>
+          </a:xfrm>
+          <a:prstGeom prst="rect">
+            <a:avLst/>
+          </a:prstGeom>
+          <a:noFill/>
+          <a:ln/>
+        </p:spPr>
+        <p:txBody>
+          <a:bodyPr wrap="square" lIns="0" tIns="0" rIns="0" bIns="0" rtlCol="0" anchor="t"/>
+          <a:lstStyle/>
+          <a:p>
+            <a:pPr indent="0" marL="0">
+              <a:buNone/>
+            </a:pPr>
+            <a:r>
+              <a:rPr lang="en-US" sz="2800" b="1" dirty="0">
+                <a:solidFill>
+                  <a:srgbClr val="14213D"/>
+                </a:solidFill>
+                <a:latin typeface="Cambria" pitchFamily="34" charset="0"/>
+                <a:ea typeface="Cambria" pitchFamily="34" charset="-122"/>
+                <a:cs typeface="Cambria" pitchFamily="34" charset="-120"/>
+              </a:rPr>
+              <a:t>Why IES Helm wins and how it grows</a:t>
+            </a:r>
+            <a:endParaRPr lang="en-US" sz="2800" dirty="0"/>
+          </a:p>
+        </p:txBody>
+      </p:sp>
+      <p:sp>
+        <p:nvSpPr>
+          <p:cNvPr id="3" name="Shape 1"/>
+          <p:cNvSpPr/>
+          <p:nvPr/>
+        </p:nvSpPr>
+        <p:spPr>
+          <a:xfrm>
+            <a:off x="548640" y="987552"/>
+            <a:ext cx="6903720" cy="3429000"/>
+          </a:xfrm>
+          <a:prstGeom prst="roundRect">
+            <a:avLst>
+              <a:gd name="adj" fmla="val 2667"/>
+            </a:avLst>
+          </a:prstGeom>
+          <a:solidFill>
+            <a:srgbClr val="F6F8FB"/>
+          </a:solidFill>
+          <a:ln w="9525">
+            <a:solidFill>
+              <a:srgbClr val="F6F8FB"/>
+            </a:solidFill>
+            <a:prstDash val="solid"/>
+          </a:ln>
+        </p:spPr>
+      </p:sp>
+      <p:sp>
+        <p:nvSpPr>
+          <p:cNvPr id="4" name="Shape 2"/>
+          <p:cNvSpPr/>
+          <p:nvPr/>
+        </p:nvSpPr>
+        <p:spPr>
+          <a:xfrm>
+            <a:off x="731520" y="1115568"/>
+            <a:ext cx="420624" cy="420624"/>
+          </a:xfrm>
+          <a:prstGeom prst="ellipse">
+            <a:avLst/>
+          </a:prstGeom>
+          <a:solidFill>
+            <a:srgbClr val="FDF3E3"/>
+          </a:solidFill>
+          <a:ln w="12700">
+            <a:solidFill>
+              <a:srgbClr val="FDF3E3"/>
+            </a:solidFill>
+            <a:prstDash val="solid"/>
+          </a:ln>
+        </p:spPr>
+      </p:sp>
+      <p:pic>
+        <p:nvPicPr>
+          <p:cNvPr id="5" name="Image 0" descr="preencoded.png">    </p:cNvPr>
+          <p:cNvPicPr>
+            <a:picLocks noChangeAspect="1"/>
+          </p:cNvPicPr>
+          <p:nvPr/>
+        </p:nvPicPr>
+        <p:blipFill>
+          <a:blip r:embed="rId1"/>
+          <a:stretch>
+            <a:fillRect/>
+          </a:stretch>
+        </p:blipFill>
+        <p:spPr>
+          <a:xfrm>
+            <a:off x="836676" y="1220724"/>
+            <a:ext cx="210312" cy="210312"/>
+          </a:xfrm>
+          <a:prstGeom prst="rect">
+            <a:avLst/>
+          </a:prstGeom>
+        </p:spPr>
+      </p:pic>
+      <p:sp>
+        <p:nvSpPr>
+          <p:cNvPr id="6" name="Text 3"/>
+          <p:cNvSpPr txBox="1"/>
+          <p:nvPr/>
+        </p:nvSpPr>
+        <p:spPr>
+          <a:xfrm>
+            <a:off x="1261872" y="1115568"/>
+            <a:ext cx="4572000" cy="420624"/>
+          </a:xfrm>
+          <a:prstGeom prst="rect">
+            <a:avLst/>
+          </a:prstGeom>
+          <a:noFill/>
+          <a:ln/>
+        </p:spPr>
+        <p:txBody>
+          <a:bodyPr wrap="square" lIns="0" tIns="0" rIns="0" bIns="0" rtlCol="0" anchor="ctr"/>
+          <a:lstStyle/>
+          <a:p>
+            <a:pPr indent="0" marL="0">
+              <a:buNone/>
+            </a:pPr>
+            <a:r>
+              <a:rPr lang="en-US" sz="1500" b="1" dirty="0">
+                <a:solidFill>
+                  <a:srgbClr val="14213D"/>
+                </a:solidFill>
+                <a:latin typeface="Calibri" pitchFamily="34" charset="0"/>
+                <a:ea typeface="Calibri" pitchFamily="34" charset="-122"/>
+                <a:cs typeface="Calibri" pitchFamily="34" charset="-120"/>
+              </a:rPr>
+              <a:t>Why IES Helm wins</a:t>
+            </a:r>
+            <a:endParaRPr lang="en-US" sz="1500" dirty="0"/>
+          </a:p>
+        </p:txBody>
+      </p:sp>
+      <p:sp>
+        <p:nvSpPr>
+          <p:cNvPr id="7" name="Text 4"/>
+          <p:cNvSpPr txBox="1"/>
+          <p:nvPr/>
+        </p:nvSpPr>
+        <p:spPr>
+          <a:xfrm>
+            <a:off x="731520" y="1664208"/>
+            <a:ext cx="3200400" cy="256032"/>
+          </a:xfrm>
+          <a:prstGeom prst="rect">
+            <a:avLst/>
+          </a:prstGeom>
+          <a:noFill/>
+          <a:ln/>
+        </p:spPr>
+        <p:txBody>
+          <a:bodyPr wrap="square" lIns="0" tIns="0" rIns="0" bIns="0" rtlCol="0" anchor="t"/>
+          <a:lstStyle/>
+          <a:p>
+            <a:pPr indent="0" marL="0">
+              <a:buNone/>
+            </a:pPr>
+            <a:r>
+              <a:rPr lang="en-US" sz="1150" b="1" dirty="0">
+                <a:solidFill>
+                  <a:srgbClr val="0F9D8A"/>
+                </a:solidFill>
+                <a:latin typeface="Calibri" pitchFamily="34" charset="0"/>
+                <a:ea typeface="Calibri" pitchFamily="34" charset="-122"/>
+                <a:cs typeface="Calibri" pitchFamily="34" charset="-120"/>
+              </a:rPr>
+              <a:t>One view of the business</a:t>
+            </a:r>
+            <a:endParaRPr lang="en-US" sz="1150" dirty="0"/>
+          </a:p>
+        </p:txBody>
+      </p:sp>
+      <p:sp>
+        <p:nvSpPr>
+          <p:cNvPr id="8" name="Text 5"/>
+          <p:cNvSpPr txBox="1"/>
+          <p:nvPr/>
+        </p:nvSpPr>
+        <p:spPr>
+          <a:xfrm>
+            <a:off x="731520" y="1920240"/>
+            <a:ext cx="3200400" cy="640080"/>
+          </a:xfrm>
+          <a:prstGeom prst="rect">
+            <a:avLst/>
+          </a:prstGeom>
+          <a:noFill/>
+          <a:ln/>
+        </p:spPr>
+        <p:txBody>
+          <a:bodyPr wrap="square" lIns="0" tIns="0" rIns="0" bIns="0" rtlCol="0" anchor="t"/>
+          <a:lstStyle/>
+          <a:p>
+            <a:pPr indent="0" marL="0">
+              <a:buNone/>
+            </a:pPr>
+            <a:r>
+              <a:rPr lang="en-US" sz="1000" dirty="0">
+                <a:solidFill>
+                  <a:srgbClr val="1B2433"/>
+                </a:solidFill>
+                <a:latin typeface="Calibri" pitchFamily="34" charset="0"/>
+                <a:ea typeface="Calibri" pitchFamily="34" charset="-122"/>
+                <a:cs typeface="Calibri" pitchFamily="34" charset="-120"/>
+              </a:rPr>
+              <a:t>Finance, payroll and sales data live in one place. Agents that see the full picture make better decisions than tools that see only one part.</a:t>
+            </a:r>
+            <a:endParaRPr lang="en-US" sz="1000" dirty="0"/>
+          </a:p>
+        </p:txBody>
+      </p:sp>
+      <p:sp>
+        <p:nvSpPr>
+          <p:cNvPr id="9" name="Text 6"/>
+          <p:cNvSpPr txBox="1"/>
+          <p:nvPr/>
+        </p:nvSpPr>
+        <p:spPr>
+          <a:xfrm>
+            <a:off x="4114800" y="1664208"/>
+            <a:ext cx="3200400" cy="256032"/>
+          </a:xfrm>
+          <a:prstGeom prst="rect">
+            <a:avLst/>
+          </a:prstGeom>
+          <a:noFill/>
+          <a:ln/>
+        </p:spPr>
+        <p:txBody>
+          <a:bodyPr wrap="square" lIns="0" tIns="0" rIns="0" bIns="0" rtlCol="0" anchor="t"/>
+          <a:lstStyle/>
+          <a:p>
+            <a:pPr indent="0" marL="0">
+              <a:buNone/>
+            </a:pPr>
+            <a:r>
+              <a:rPr lang="en-US" sz="1150" b="1" dirty="0">
+                <a:solidFill>
+                  <a:srgbClr val="0F9D8A"/>
+                </a:solidFill>
+                <a:latin typeface="Calibri" pitchFamily="34" charset="0"/>
+                <a:ea typeface="Calibri" pitchFamily="34" charset="-122"/>
+                <a:cs typeface="Calibri" pitchFamily="34" charset="-120"/>
+              </a:rPr>
+              <a:t>Agents that finish work</a:t>
+            </a:r>
+            <a:endParaRPr lang="en-US" sz="1150" dirty="0"/>
+          </a:p>
+        </p:txBody>
+      </p:sp>
+      <p:sp>
+        <p:nvSpPr>
+          <p:cNvPr id="10" name="Text 7"/>
+          <p:cNvSpPr txBox="1"/>
+          <p:nvPr/>
+        </p:nvSpPr>
+        <p:spPr>
+          <a:xfrm>
+            <a:off x="4114800" y="1920240"/>
+            <a:ext cx="3200400" cy="640080"/>
+          </a:xfrm>
+          <a:prstGeom prst="rect">
+            <a:avLst/>
+          </a:prstGeom>
+          <a:noFill/>
+          <a:ln/>
+        </p:spPr>
+        <p:txBody>
+          <a:bodyPr wrap="square" lIns="0" tIns="0" rIns="0" bIns="0" rtlCol="0" anchor="t"/>
+          <a:lstStyle/>
+          <a:p>
+            <a:pPr indent="0" marL="0">
+              <a:buNone/>
+            </a:pPr>
+            <a:r>
+              <a:rPr lang="en-US" sz="1000" dirty="0">
+                <a:solidFill>
+                  <a:srgbClr val="1B2433"/>
+                </a:solidFill>
+                <a:latin typeface="Calibri" pitchFamily="34" charset="0"/>
+                <a:ea typeface="Calibri" pitchFamily="34" charset="-122"/>
+                <a:cs typeface="Calibri" pitchFamily="34" charset="-120"/>
+              </a:rPr>
+              <a:t>Many AI tools only answer questions. IES Helm agents complete real tasks and still stay inside limits set by the business.</a:t>
+            </a:r>
+            <a:endParaRPr lang="en-US" sz="1000" dirty="0"/>
+          </a:p>
+        </p:txBody>
+      </p:sp>
+      <p:sp>
+        <p:nvSpPr>
+          <p:cNvPr id="11" name="Text 8"/>
+          <p:cNvSpPr txBox="1"/>
+          <p:nvPr/>
+        </p:nvSpPr>
+        <p:spPr>
+          <a:xfrm>
+            <a:off x="731520" y="2578608"/>
+            <a:ext cx="3200400" cy="256032"/>
+          </a:xfrm>
+          <a:prstGeom prst="rect">
+            <a:avLst/>
+          </a:prstGeom>
+          <a:noFill/>
+          <a:ln/>
+        </p:spPr>
+        <p:txBody>
+          <a:bodyPr wrap="square" lIns="0" tIns="0" rIns="0" bIns="0" rtlCol="0" anchor="t"/>
+          <a:lstStyle/>
+          <a:p>
+            <a:pPr indent="0" marL="0">
+              <a:buNone/>
+            </a:pPr>
+            <a:r>
+              <a:rPr lang="en-US" sz="1150" b="1" dirty="0">
+                <a:solidFill>
+                  <a:srgbClr val="0F9D8A"/>
+                </a:solidFill>
+                <a:latin typeface="Calibri" pitchFamily="34" charset="0"/>
+                <a:ea typeface="Calibri" pitchFamily="34" charset="-122"/>
+                <a:cs typeface="Calibri" pitchFamily="34" charset="-120"/>
+              </a:rPr>
+              <a:t>Experts are built in</a:t>
+            </a:r>
+            <a:endParaRPr lang="en-US" sz="1150" dirty="0"/>
+          </a:p>
+        </p:txBody>
+      </p:sp>
+      <p:sp>
+        <p:nvSpPr>
+          <p:cNvPr id="12" name="Text 9"/>
+          <p:cNvSpPr txBox="1"/>
+          <p:nvPr/>
+        </p:nvSpPr>
+        <p:spPr>
+          <a:xfrm>
+            <a:off x="731520" y="2834640"/>
+            <a:ext cx="3200400" cy="640080"/>
+          </a:xfrm>
+          <a:prstGeom prst="rect">
+            <a:avLst/>
+          </a:prstGeom>
+          <a:noFill/>
+          <a:ln/>
+        </p:spPr>
+        <p:txBody>
+          <a:bodyPr wrap="square" lIns="0" tIns="0" rIns="0" bIns="0" rtlCol="0" anchor="t"/>
+          <a:lstStyle/>
+          <a:p>
+            <a:pPr indent="0" marL="0">
+              <a:buNone/>
+            </a:pPr>
+            <a:r>
+              <a:rPr lang="en-US" sz="1000" dirty="0">
+                <a:solidFill>
+                  <a:srgbClr val="1B2433"/>
+                </a:solidFill>
+                <a:latin typeface="Calibri" pitchFamily="34" charset="0"/>
+                <a:ea typeface="Calibri" pitchFamily="34" charset="-122"/>
+                <a:cs typeface="Calibri" pitchFamily="34" charset="-120"/>
+              </a:rPr>
+              <a:t>Hard questions reach a qualified expert with the full file. Companies get a safe answer without hiring a full-time specialist.</a:t>
+            </a:r>
+            <a:endParaRPr lang="en-US" sz="1000" dirty="0"/>
+          </a:p>
+        </p:txBody>
+      </p:sp>
+      <p:sp>
+        <p:nvSpPr>
+          <p:cNvPr id="13" name="Text 10"/>
+          <p:cNvSpPr txBox="1"/>
+          <p:nvPr/>
+        </p:nvSpPr>
+        <p:spPr>
+          <a:xfrm>
+            <a:off x="4114800" y="2578608"/>
+            <a:ext cx="3200400" cy="256032"/>
+          </a:xfrm>
+          <a:prstGeom prst="rect">
+            <a:avLst/>
+          </a:prstGeom>
+          <a:noFill/>
+          <a:ln/>
+        </p:spPr>
+        <p:txBody>
+          <a:bodyPr wrap="square" lIns="0" tIns="0" rIns="0" bIns="0" rtlCol="0" anchor="t"/>
+          <a:lstStyle/>
+          <a:p>
+            <a:pPr indent="0" marL="0">
+              <a:buNone/>
+            </a:pPr>
+            <a:r>
+              <a:rPr lang="en-US" sz="1150" b="1" dirty="0">
+                <a:solidFill>
+                  <a:srgbClr val="0F9D8A"/>
+                </a:solidFill>
+                <a:latin typeface="Calibri" pitchFamily="34" charset="0"/>
+                <a:ea typeface="Calibri" pitchFamily="34" charset="-122"/>
+                <a:cs typeface="Calibri" pitchFamily="34" charset="-120"/>
+              </a:rPr>
+              <a:t>Partners add more value</a:t>
+            </a:r>
+            <a:endParaRPr lang="en-US" sz="1150" dirty="0"/>
+          </a:p>
+        </p:txBody>
+      </p:sp>
+      <p:sp>
+        <p:nvSpPr>
+          <p:cNvPr id="14" name="Text 11"/>
+          <p:cNvSpPr txBox="1"/>
+          <p:nvPr/>
+        </p:nvSpPr>
+        <p:spPr>
+          <a:xfrm>
+            <a:off x="4114800" y="2834640"/>
+            <a:ext cx="3200400" cy="640080"/>
+          </a:xfrm>
+          <a:prstGeom prst="rect">
+            <a:avLst/>
+          </a:prstGeom>
+          <a:noFill/>
+          <a:ln/>
+        </p:spPr>
+        <p:txBody>
+          <a:bodyPr wrap="square" lIns="0" tIns="0" rIns="0" bIns="0" rtlCol="0" anchor="t"/>
+          <a:lstStyle/>
+          <a:p>
+            <a:pPr indent="0" marL="0">
+              <a:buNone/>
+            </a:pPr>
+            <a:r>
+              <a:rPr lang="en-US" sz="1000" dirty="0">
+                <a:solidFill>
+                  <a:srgbClr val="1B2433"/>
+                </a:solidFill>
+                <a:latin typeface="Calibri" pitchFamily="34" charset="0"/>
+                <a:ea typeface="Calibri" pitchFamily="34" charset="-122"/>
+                <a:cs typeface="Calibri" pitchFamily="34" charset="-120"/>
+              </a:rPr>
+              <a:t>Outside developers build agents for special needs. Every new agent makes the platform more useful for every customer.</a:t>
+            </a:r>
+            <a:endParaRPr lang="en-US" sz="1000" dirty="0"/>
+          </a:p>
+        </p:txBody>
+      </p:sp>
+      <p:sp>
+        <p:nvSpPr>
+          <p:cNvPr id="15" name="Text 12"/>
+          <p:cNvSpPr txBox="1"/>
+          <p:nvPr/>
+        </p:nvSpPr>
+        <p:spPr>
+          <a:xfrm>
+            <a:off x="731520" y="3493008"/>
+            <a:ext cx="3200400" cy="256032"/>
+          </a:xfrm>
+          <a:prstGeom prst="rect">
+            <a:avLst/>
+          </a:prstGeom>
+          <a:noFill/>
+          <a:ln/>
+        </p:spPr>
+        <p:txBody>
+          <a:bodyPr wrap="square" lIns="0" tIns="0" rIns="0" bIns="0" rtlCol="0" anchor="t"/>
+          <a:lstStyle/>
+          <a:p>
+            <a:pPr indent="0" marL="0">
+              <a:buNone/>
+            </a:pPr>
+            <a:r>
+              <a:rPr lang="en-US" sz="1150" b="1" dirty="0">
+                <a:solidFill>
+                  <a:srgbClr val="0F9D8A"/>
+                </a:solidFill>
+                <a:latin typeface="Calibri" pitchFamily="34" charset="0"/>
+                <a:ea typeface="Calibri" pitchFamily="34" charset="-122"/>
+                <a:cs typeface="Calibri" pitchFamily="34" charset="-120"/>
+              </a:rPr>
+              <a:t>Trust that can be checked</a:t>
+            </a:r>
+            <a:endParaRPr lang="en-US" sz="1150" dirty="0"/>
+          </a:p>
+        </p:txBody>
+      </p:sp>
+      <p:sp>
+        <p:nvSpPr>
+          <p:cNvPr id="16" name="Text 13"/>
+          <p:cNvSpPr txBox="1"/>
+          <p:nvPr/>
+        </p:nvSpPr>
+        <p:spPr>
+          <a:xfrm>
+            <a:off x="731520" y="3749040"/>
+            <a:ext cx="3200400" cy="640080"/>
+          </a:xfrm>
+          <a:prstGeom prst="rect">
+            <a:avLst/>
+          </a:prstGeom>
+          <a:noFill/>
+          <a:ln/>
+        </p:spPr>
+        <p:txBody>
+          <a:bodyPr wrap="square" lIns="0" tIns="0" rIns="0" bIns="0" rtlCol="0" anchor="t"/>
+          <a:lstStyle/>
+          <a:p>
+            <a:pPr indent="0" marL="0">
+              <a:buNone/>
+            </a:pPr>
+            <a:r>
+              <a:rPr lang="en-US" sz="1000" dirty="0">
+                <a:solidFill>
+                  <a:srgbClr val="1B2433"/>
+                </a:solidFill>
+                <a:latin typeface="Calibri" pitchFamily="34" charset="0"/>
+                <a:ea typeface="Calibri" pitchFamily="34" charset="-122"/>
+                <a:cs typeface="Calibri" pitchFamily="34" charset="-120"/>
+              </a:rPr>
+              <a:t>Finance teams only adopt tools they can verify. Every action shows its proof and can be undone, so adoption becomes easier.</a:t>
+            </a:r>
+            <a:endParaRPr lang="en-US" sz="1000" dirty="0"/>
+          </a:p>
+        </p:txBody>
+      </p:sp>
+      <p:sp>
+        <p:nvSpPr>
+          <p:cNvPr id="17" name="Text 14"/>
+          <p:cNvSpPr txBox="1"/>
+          <p:nvPr/>
+        </p:nvSpPr>
+        <p:spPr>
+          <a:xfrm>
+            <a:off x="4114800" y="3493008"/>
+            <a:ext cx="3200400" cy="256032"/>
+          </a:xfrm>
+          <a:prstGeom prst="rect">
+            <a:avLst/>
+          </a:prstGeom>
+          <a:noFill/>
+          <a:ln/>
+        </p:spPr>
+        <p:txBody>
+          <a:bodyPr wrap="square" lIns="0" tIns="0" rIns="0" bIns="0" rtlCol="0" anchor="t"/>
+          <a:lstStyle/>
+          <a:p>
+            <a:pPr indent="0" marL="0">
+              <a:buNone/>
+            </a:pPr>
+            <a:r>
+              <a:rPr lang="en-US" sz="1150" b="1" dirty="0">
+                <a:solidFill>
+                  <a:srgbClr val="0F9D8A"/>
+                </a:solidFill>
+                <a:latin typeface="Calibri" pitchFamily="34" charset="0"/>
+                <a:ea typeface="Calibri" pitchFamily="34" charset="-122"/>
+                <a:cs typeface="Calibri" pitchFamily="34" charset="-120"/>
+              </a:rPr>
+              <a:t>Right size for mid-size firms</a:t>
+            </a:r>
+            <a:endParaRPr lang="en-US" sz="1150" dirty="0"/>
+          </a:p>
+        </p:txBody>
+      </p:sp>
+      <p:sp>
+        <p:nvSpPr>
+          <p:cNvPr id="18" name="Text 15"/>
+          <p:cNvSpPr txBox="1"/>
+          <p:nvPr/>
+        </p:nvSpPr>
+        <p:spPr>
+          <a:xfrm>
+            <a:off x="4114800" y="3749040"/>
+            <a:ext cx="3200400" cy="640080"/>
+          </a:xfrm>
+          <a:prstGeom prst="rect">
+            <a:avLst/>
+          </a:prstGeom>
+          <a:noFill/>
+          <a:ln/>
+        </p:spPr>
+        <p:txBody>
+          <a:bodyPr wrap="square" lIns="0" tIns="0" rIns="0" bIns="0" rtlCol="0" anchor="t"/>
+          <a:lstStyle/>
+          <a:p>
+            <a:pPr indent="0" marL="0">
+              <a:buNone/>
+            </a:pPr>
+            <a:r>
+              <a:rPr lang="en-US" sz="1000" dirty="0">
+                <a:solidFill>
+                  <a:srgbClr val="1B2433"/>
+                </a:solidFill>
+                <a:latin typeface="Calibri" pitchFamily="34" charset="0"/>
+                <a:ea typeface="Calibri" pitchFamily="34" charset="-122"/>
+                <a:cs typeface="Calibri" pitchFamily="34" charset="-120"/>
+              </a:rPr>
+              <a:t>Large ERP systems are powerful but slow to set up. IES Helm is simpler to start and grows with the company.</a:t>
+            </a:r>
+            <a:endParaRPr lang="en-US" sz="1000" dirty="0"/>
+          </a:p>
+        </p:txBody>
+      </p:sp>
+      <p:sp>
+        <p:nvSpPr>
+          <p:cNvPr id="19" name="Shape 16"/>
+          <p:cNvSpPr/>
+          <p:nvPr/>
+        </p:nvSpPr>
+        <p:spPr>
+          <a:xfrm>
+            <a:off x="7589520" y="987552"/>
+            <a:ext cx="4069080" cy="1783080"/>
+          </a:xfrm>
+          <a:prstGeom prst="roundRect">
+            <a:avLst>
+              <a:gd name="adj" fmla="val 5128"/>
+            </a:avLst>
+          </a:prstGeom>
+          <a:solidFill>
+            <a:srgbClr val="FFFFFF"/>
+          </a:solidFill>
+          <a:ln w="9525">
+            <a:solidFill>
+              <a:srgbClr val="DDE3EA"/>
+            </a:solidFill>
+            <a:prstDash val="solid"/>
+          </a:ln>
+          <a:effectLst>
+            <a:outerShdw sx="100000" sy="100000" kx="0" ky="0" algn="bl" rotWithShape="0" blurRad="76200" dist="19050" dir="5400000">
+              <a:srgbClr val="000000">
+                <a:alpha val="8000"/>
+              </a:srgbClr>
+            </a:outerShdw>
+          </a:effectLst>
+        </p:spPr>
+      </p:sp>
+      <p:sp>
+        <p:nvSpPr>
+          <p:cNvPr id="20" name="Shape 17"/>
+          <p:cNvSpPr/>
+          <p:nvPr/>
+        </p:nvSpPr>
+        <p:spPr>
+          <a:xfrm>
+            <a:off x="7726680" y="1097280"/>
+            <a:ext cx="384048" cy="384048"/>
+          </a:xfrm>
+          <a:prstGeom prst="ellipse">
+            <a:avLst/>
+          </a:prstGeom>
+          <a:solidFill>
+            <a:srgbClr val="FDF3E3"/>
+          </a:solidFill>
+          <a:ln w="12700">
+            <a:solidFill>
+              <a:srgbClr val="FDF3E3"/>
+            </a:solidFill>
+            <a:prstDash val="solid"/>
+          </a:ln>
+        </p:spPr>
+      </p:sp>
+      <p:pic>
+        <p:nvPicPr>
+          <p:cNvPr id="21" name="Image 1" descr="preencoded.png">    </p:cNvPr>
+          <p:cNvPicPr>
+            <a:picLocks noChangeAspect="1"/>
+          </p:cNvPicPr>
+          <p:nvPr/>
+        </p:nvPicPr>
+        <p:blipFill>
+          <a:blip r:embed="rId2"/>
+          <a:stretch>
+            <a:fillRect/>
+          </a:stretch>
+        </p:blipFill>
+        <p:spPr>
+          <a:xfrm>
+            <a:off x="7822692" y="1193292"/>
+            <a:ext cx="192024" cy="192024"/>
+          </a:xfrm>
+          <a:prstGeom prst="rect">
+            <a:avLst/>
+          </a:prstGeom>
+        </p:spPr>
+      </p:pic>
+      <p:sp>
+        <p:nvSpPr>
+          <p:cNvPr id="22" name="Text 18"/>
+          <p:cNvSpPr txBox="1"/>
+          <p:nvPr/>
+        </p:nvSpPr>
+        <p:spPr>
+          <a:xfrm>
+            <a:off x="8211312" y="1097280"/>
+            <a:ext cx="3291840" cy="384048"/>
+          </a:xfrm>
+          <a:prstGeom prst="rect">
+            <a:avLst/>
+          </a:prstGeom>
+          <a:noFill/>
+          <a:ln/>
+        </p:spPr>
+        <p:txBody>
+          <a:bodyPr wrap="square" lIns="0" tIns="0" rIns="0" bIns="0" rtlCol="0" anchor="ctr"/>
+          <a:lstStyle/>
+          <a:p>
+            <a:pPr indent="0" marL="0">
+              <a:buNone/>
+            </a:pPr>
+            <a:r>
+              <a:rPr lang="en-US" sz="1300" b="1" dirty="0">
+                <a:solidFill>
+                  <a:srgbClr val="14213D"/>
+                </a:solidFill>
+                <a:latin typeface="Calibri" pitchFamily="34" charset="0"/>
+                <a:ea typeface="Calibri" pitchFamily="34" charset="-122"/>
+                <a:cs typeface="Calibri" pitchFamily="34" charset="-120"/>
+              </a:rPr>
+              <a:t>How it earns money</a:t>
+            </a:r>
+            <a:endParaRPr lang="en-US" sz="1300" dirty="0"/>
+          </a:p>
+        </p:txBody>
+      </p:sp>
+      <p:sp>
+        <p:nvSpPr>
+          <p:cNvPr id="23" name="Text 19"/>
+          <p:cNvSpPr txBox="1"/>
+          <p:nvPr/>
+        </p:nvSpPr>
+        <p:spPr>
+          <a:xfrm>
+            <a:off x="7744968" y="1554480"/>
+            <a:ext cx="3794760" cy="1188720"/>
+          </a:xfrm>
+          <a:prstGeom prst="rect">
+            <a:avLst/>
+          </a:prstGeom>
+          <a:noFill/>
+          <a:ln/>
+        </p:spPr>
+        <p:txBody>
+          <a:bodyPr wrap="square" lIns="0" tIns="0" rIns="0" bIns="0" rtlCol="0" anchor="t"/>
+          <a:lstStyle/>
+          <a:p>
+            <a:pPr indent="0" marL="0">
+              <a:buNone/>
+            </a:pPr>
+            <a:r>
+              <a:rPr lang="en-US" sz="1050" dirty="0">
+                <a:solidFill>
+                  <a:srgbClr val="1B2433"/>
+                </a:solidFill>
+                <a:latin typeface="Calibri" pitchFamily="34" charset="0"/>
+                <a:ea typeface="Calibri" pitchFamily="34" charset="-122"/>
+                <a:cs typeface="Calibri" pitchFamily="34" charset="-120"/>
+              </a:rPr>
+              <a:t>Customers pay the normal IES subscription and pay extra for heavy AI use. Developers pay for API use above a free level. Intuit keeps a share of each marketplace sale and earns fees from expert help.</a:t>
+            </a:r>
+            <a:endParaRPr lang="en-US" sz="1050" dirty="0"/>
+          </a:p>
+        </p:txBody>
+      </p:sp>
+      <p:sp>
+        <p:nvSpPr>
+          <p:cNvPr id="24" name="Shape 20"/>
+          <p:cNvSpPr/>
+          <p:nvPr/>
+        </p:nvSpPr>
+        <p:spPr>
+          <a:xfrm>
+            <a:off x="7589520" y="2862072"/>
+            <a:ext cx="4069080" cy="1554480"/>
+          </a:xfrm>
+          <a:prstGeom prst="roundRect">
+            <a:avLst>
+              <a:gd name="adj" fmla="val 5882"/>
+            </a:avLst>
+          </a:prstGeom>
+          <a:solidFill>
+            <a:srgbClr val="FFFFFF"/>
+          </a:solidFill>
+          <a:ln w="9525">
+            <a:solidFill>
+              <a:srgbClr val="DDE3EA"/>
+            </a:solidFill>
+            <a:prstDash val="solid"/>
+          </a:ln>
+          <a:effectLst>
+            <a:outerShdw sx="100000" sy="100000" kx="0" ky="0" algn="bl" rotWithShape="0" blurRad="76200" dist="19050" dir="5400000">
+              <a:srgbClr val="000000">
+                <a:alpha val="8000"/>
+              </a:srgbClr>
+            </a:outerShdw>
+          </a:effectLst>
+        </p:spPr>
+      </p:sp>
+      <p:sp>
+        <p:nvSpPr>
+          <p:cNvPr id="25" name="Shape 21"/>
+          <p:cNvSpPr/>
+          <p:nvPr/>
+        </p:nvSpPr>
+        <p:spPr>
+          <a:xfrm>
+            <a:off x="7726680" y="2971800"/>
+            <a:ext cx="384048" cy="384048"/>
+          </a:xfrm>
+          <a:prstGeom prst="ellipse">
+            <a:avLst/>
+          </a:prstGeom>
+          <a:solidFill>
+            <a:srgbClr val="E3F5F2"/>
+          </a:solidFill>
+          <a:ln w="12700">
+            <a:solidFill>
+              <a:srgbClr val="E3F5F2"/>
+            </a:solidFill>
+            <a:prstDash val="solid"/>
+          </a:ln>
+        </p:spPr>
+      </p:sp>
+      <p:pic>
+        <p:nvPicPr>
+          <p:cNvPr id="26" name="Image 2" descr="preencoded.png">    </p:cNvPr>
           <p:cNvPicPr>
             <a:picLocks noChangeAspect="1"/>
           </p:cNvPicPr>
@@ -6962,8 +7971,8 @@
         </p:blipFill>
         <p:spPr>
           <a:xfrm>
-            <a:off x="8435340" y="1284732"/>
-            <a:ext cx="228600" cy="228600"/>
+            <a:off x="7822692" y="3067812"/>
+            <a:ext cx="192024" cy="192024"/>
           </a:xfrm>
           <a:prstGeom prst="rect">
             <a:avLst/>
@@ -6972,14 +7981,14 @@
       </p:pic>
       <p:sp>
         <p:nvSpPr>
-          <p:cNvPr id="17" name="Text 12"/>
-          <p:cNvSpPr txBox="1"/>
-          <p:nvPr/>
-        </p:nvSpPr>
-        <p:spPr>
-          <a:xfrm>
-            <a:off x="8887968" y="1216152"/>
-            <a:ext cx="2651760" cy="365760"/>
+          <p:cNvPr id="27" name="Text 22"/>
+          <p:cNvSpPr txBox="1"/>
+          <p:nvPr/>
+        </p:nvSpPr>
+        <p:spPr>
+          <a:xfrm>
+            <a:off x="8211312" y="2971800"/>
+            <a:ext cx="3291840" cy="384048"/>
           </a:xfrm>
           <a:prstGeom prst="rect">
             <a:avLst/>
@@ -6995,7 +8004,46 @@
               <a:buNone/>
             </a:pPr>
             <a:r>
-              <a:rPr lang="en-US" sz="1500" b="1" dirty="0">
+              <a:rPr lang="en-US" sz="1300" b="1" dirty="0">
+                <a:solidFill>
+                  <a:srgbClr val="14213D"/>
+                </a:solidFill>
+                <a:latin typeface="Calibri" pitchFamily="34" charset="0"/>
+                <a:ea typeface="Calibri" pitchFamily="34" charset="-122"/>
+                <a:cs typeface="Calibri" pitchFamily="34" charset="-120"/>
+              </a:rPr>
+              <a:t>How success is measured</a:t>
+            </a:r>
+            <a:endParaRPr lang="en-US" sz="1300" dirty="0"/>
+          </a:p>
+        </p:txBody>
+      </p:sp>
+      <p:sp>
+        <p:nvSpPr>
+          <p:cNvPr id="28" name="Text 23"/>
+          <p:cNvSpPr txBox="1"/>
+          <p:nvPr/>
+        </p:nvSpPr>
+        <p:spPr>
+          <a:xfrm>
+            <a:off x="7744968" y="3429000"/>
+            <a:ext cx="3794760" cy="960120"/>
+          </a:xfrm>
+          <a:prstGeom prst="rect">
+            <a:avLst/>
+          </a:prstGeom>
+          <a:noFill/>
+          <a:ln/>
+        </p:spPr>
+        <p:txBody>
+          <a:bodyPr wrap="square" lIns="0" tIns="0" rIns="0" bIns="0" rtlCol="0" anchor="t"/>
+          <a:lstStyle/>
+          <a:p>
+            <a:pPr indent="0" marL="0">
+              <a:buNone/>
+            </a:pPr>
+            <a:r>
+              <a:rPr lang="en-US" sz="1050" dirty="0">
                 <a:solidFill>
                   <a:srgbClr val="1B2433"/>
                 </a:solidFill>
@@ -7003,22 +8051,22 @@
                 <a:ea typeface="Calibri" pitchFamily="34" charset="-122"/>
                 <a:cs typeface="Calibri" pitchFamily="34" charset="-120"/>
               </a:rPr>
-              <a:t>How we know it works</a:t>
-            </a:r>
-            <a:endParaRPr lang="en-US" sz="1500" dirty="0"/>
-          </a:p>
-        </p:txBody>
-      </p:sp>
-      <p:sp>
-        <p:nvSpPr>
-          <p:cNvPr id="18" name="Text 13"/>
-          <p:cNvSpPr txBox="1"/>
-          <p:nvPr/>
-        </p:nvSpPr>
-        <p:spPr>
-          <a:xfrm>
-            <a:off x="8321040" y="1737360"/>
-            <a:ext cx="3200400" cy="2286000"/>
+              <a:t>The main number is the hours of finance work that agents finish with proof and without a person fixing it. It shows value and trust together.</a:t>
+            </a:r>
+            <a:endParaRPr lang="en-US" sz="1050" dirty="0"/>
+          </a:p>
+        </p:txBody>
+      </p:sp>
+      <p:sp>
+        <p:nvSpPr>
+          <p:cNvPr id="29" name="Text 24"/>
+          <p:cNvSpPr txBox="1"/>
+          <p:nvPr/>
+        </p:nvSpPr>
+        <p:spPr>
+          <a:xfrm>
+            <a:off x="548640" y="4572000"/>
+            <a:ext cx="5486400" cy="292608"/>
           </a:xfrm>
           <a:prstGeom prst="rect">
             <a:avLst/>
@@ -7031,126 +8079,10 @@
           <a:lstStyle/>
           <a:p>
             <a:pPr indent="0" marL="0">
-              <a:spcAft>
-                <a:spcPts val="600"/>
-              </a:spcAft>
-              <a:buNone/>
-            </a:pPr>
-            <a:r>
-              <a:rPr lang="en-US" sz="1150" b="1" dirty="0">
-                <a:solidFill>
-                  <a:srgbClr val="1B2433"/>
-                </a:solidFill>
-                <a:latin typeface="Calibri" pitchFamily="34" charset="0"/>
-                <a:ea typeface="Calibri" pitchFamily="34" charset="-122"/>
-                <a:cs typeface="Calibri" pitchFamily="34" charset="-120"/>
-              </a:rPr>
-              <a:t>Main goal: </a:t>
-            </a:r>
-            <a:pPr indent="0" marL="0">
-              <a:spcAft>
-                <a:spcPts val="600"/>
-              </a:spcAft>
-              <a:buNone/>
-            </a:pPr>
-            <a:r>
-              <a:rPr lang="en-US" sz="1150" dirty="0">
-                <a:solidFill>
-                  <a:srgbClr val="1B2433"/>
-                </a:solidFill>
-                <a:latin typeface="Calibri" pitchFamily="34" charset="0"/>
-                <a:ea typeface="Calibri" pitchFamily="34" charset="-122"/>
-                <a:cs typeface="Calibri" pitchFamily="34" charset="-120"/>
-              </a:rPr>
-              <a:t>count the hours of finance work agents finish with proof and without a human fixing it.</a:t>
-            </a:r>
-            <a:endParaRPr lang="en-US" sz="1150" dirty="0"/>
-          </a:p>
-          <a:p>
-            <a:pPr indent="0" marL="0">
-              <a:spcAft>
-                <a:spcPts val="600"/>
-              </a:spcAft>
-              <a:buNone/>
-            </a:pPr>
-            <a:r>
-              <a:rPr lang="en-US" sz="1150" dirty="0">
-                <a:solidFill>
-                  <a:srgbClr val="1B2433"/>
-                </a:solidFill>
-                <a:latin typeface="Calibri" pitchFamily="34" charset="0"/>
-                <a:ea typeface="Calibri" pitchFamily="34" charset="-122"/>
-                <a:cs typeface="Calibri" pitchFamily="34" charset="-120"/>
-              </a:rPr>
-              <a:t>We also track close speed, how often people override the AI, developers joined, agents installed and ecosystem revenue.</a:t>
-            </a:r>
-            <a:endParaRPr lang="en-US" sz="1150" dirty="0"/>
-          </a:p>
-          <a:p>
-            <a:pPr indent="0" marL="0">
-              <a:spcAft>
-                <a:spcPts val="600"/>
-              </a:spcAft>
-              <a:buNone/>
-            </a:pPr>
-            <a:r>
-              <a:rPr lang="en-US" sz="1150" b="1" dirty="0">
-                <a:solidFill>
-                  <a:srgbClr val="1B2433"/>
-                </a:solidFill>
-                <a:latin typeface="Calibri" pitchFamily="34" charset="0"/>
-                <a:ea typeface="Calibri" pitchFamily="34" charset="-122"/>
-                <a:cs typeface="Calibri" pitchFamily="34" charset="-120"/>
-              </a:rPr>
-              <a:t>Riskiest belief: </a:t>
-            </a:r>
-            <a:pPr indent="0" marL="0">
-              <a:spcAft>
-                <a:spcPts val="600"/>
-              </a:spcAft>
-              <a:buNone/>
-            </a:pPr>
-            <a:r>
-              <a:rPr lang="en-US" sz="1150" dirty="0">
-                <a:solidFill>
-                  <a:srgbClr val="1B2433"/>
-                </a:solidFill>
-                <a:latin typeface="Calibri" pitchFamily="34" charset="0"/>
-                <a:ea typeface="Calibri" pitchFamily="34" charset="-122"/>
-                <a:cs typeface="Calibri" pitchFamily="34" charset="-120"/>
-              </a:rPr>
-              <a:t>controllers will approve work that an agent prepared. I would test this first with 8 controllers and this prototype.</a:t>
-            </a:r>
-            <a:endParaRPr lang="en-US" sz="1150" dirty="0"/>
-          </a:p>
-        </p:txBody>
-      </p:sp>
-      <p:sp>
-        <p:nvSpPr>
-          <p:cNvPr id="19" name="Text 14"/>
-          <p:cNvSpPr txBox="1"/>
-          <p:nvPr/>
-        </p:nvSpPr>
-        <p:spPr>
-          <a:xfrm>
-            <a:off x="548640" y="4251960"/>
-            <a:ext cx="5486400" cy="320040"/>
-          </a:xfrm>
-          <a:prstGeom prst="rect">
-            <a:avLst/>
-          </a:prstGeom>
-          <a:noFill/>
-          <a:ln/>
-        </p:spPr>
-        <p:txBody>
-          <a:bodyPr wrap="square" lIns="0" tIns="0" rIns="0" bIns="0" rtlCol="0" anchor="t"/>
-          <a:lstStyle/>
-          <a:p>
-            <a:pPr indent="0" marL="0">
-              <a:buNone/>
-            </a:pPr>
-            <a:r>
-              <a:rPr lang="en-US" sz="1400" b="1" dirty="0">
+              <a:buNone/>
+            </a:pPr>
+            <a:r>
+              <a:rPr lang="en-US" sz="1300" b="1" dirty="0">
                 <a:solidFill>
                   <a:srgbClr val="14213D"/>
                 </a:solidFill>
@@ -7160,19 +8092,19 @@
               </a:rPr>
               <a:t>Roadmap in four steps</a:t>
             </a:r>
-            <a:endParaRPr lang="en-US" sz="1400" dirty="0"/>
-          </a:p>
-        </p:txBody>
-      </p:sp>
-      <p:sp>
-        <p:nvSpPr>
-          <p:cNvPr id="20" name="Shape 15"/>
+            <a:endParaRPr lang="en-US" sz="1300" dirty="0"/>
+          </a:p>
+        </p:txBody>
+      </p:sp>
+      <p:sp>
+        <p:nvSpPr>
+          <p:cNvPr id="30" name="Shape 25"/>
           <p:cNvSpPr/>
           <p:nvPr/>
         </p:nvSpPr>
         <p:spPr>
           <a:xfrm>
-            <a:off x="731520" y="4828032"/>
+            <a:off x="731520" y="5074920"/>
             <a:ext cx="10698480" cy="0"/>
           </a:xfrm>
           <a:prstGeom prst="line">
@@ -7189,13 +8121,13 @@
       </p:sp>
       <p:sp>
         <p:nvSpPr>
-          <p:cNvPr id="21" name="Shape 16"/>
+          <p:cNvPr id="31" name="Shape 26"/>
           <p:cNvSpPr/>
           <p:nvPr/>
         </p:nvSpPr>
         <p:spPr>
           <a:xfrm>
-            <a:off x="658368" y="4709160"/>
+            <a:off x="658368" y="4956048"/>
             <a:ext cx="237744" cy="237744"/>
           </a:xfrm>
           <a:prstGeom prst="ellipse">
@@ -7214,13 +8146,13 @@
       </p:sp>
       <p:sp>
         <p:nvSpPr>
-          <p:cNvPr id="22" name="Text 17"/>
-          <p:cNvSpPr txBox="1"/>
-          <p:nvPr/>
-        </p:nvSpPr>
-        <p:spPr>
-          <a:xfrm>
-            <a:off x="1005840" y="4681728"/>
+          <p:cNvPr id="32" name="Text 27"/>
+          <p:cNvSpPr txBox="1"/>
+          <p:nvPr/>
+        </p:nvSpPr>
+        <p:spPr>
+          <a:xfrm>
+            <a:off x="1005840" y="4937760"/>
             <a:ext cx="2194560" cy="274320"/>
           </a:xfrm>
           <a:prstGeom prst="rect">
@@ -7253,14 +8185,14 @@
       </p:sp>
       <p:sp>
         <p:nvSpPr>
-          <p:cNvPr id="23" name="Text 18"/>
-          <p:cNvSpPr txBox="1"/>
-          <p:nvPr/>
-        </p:nvSpPr>
-        <p:spPr>
-          <a:xfrm>
-            <a:off x="548640" y="5047488"/>
-            <a:ext cx="2651760" cy="274320"/>
+          <p:cNvPr id="33" name="Text 28"/>
+          <p:cNvSpPr txBox="1"/>
+          <p:nvPr/>
+        </p:nvSpPr>
+        <p:spPr>
+          <a:xfrm>
+            <a:off x="548640" y="5285232"/>
+            <a:ext cx="2651760" cy="256032"/>
           </a:xfrm>
           <a:prstGeom prst="rect">
             <a:avLst/>
@@ -7276,7 +8208,7 @@
               <a:buNone/>
             </a:pPr>
             <a:r>
-              <a:rPr lang="en-US" sz="1300" b="1" dirty="0">
+              <a:rPr lang="en-US" sz="1200" b="1" dirty="0">
                 <a:solidFill>
                   <a:srgbClr val="1B2433"/>
                 </a:solidFill>
@@ -7286,20 +8218,20 @@
               </a:rPr>
               <a:t>Validate</a:t>
             </a:r>
-            <a:endParaRPr lang="en-US" sz="1300" dirty="0"/>
-          </a:p>
-        </p:txBody>
-      </p:sp>
-      <p:sp>
-        <p:nvSpPr>
-          <p:cNvPr id="24" name="Text 19"/>
-          <p:cNvSpPr txBox="1"/>
-          <p:nvPr/>
-        </p:nvSpPr>
-        <p:spPr>
-          <a:xfrm>
-            <a:off x="548640" y="5349240"/>
-            <a:ext cx="2606040" cy="640080"/>
+            <a:endParaRPr lang="en-US" sz="1200" dirty="0"/>
+          </a:p>
+        </p:txBody>
+      </p:sp>
+      <p:sp>
+        <p:nvSpPr>
+          <p:cNvPr id="34" name="Text 29"/>
+          <p:cNvSpPr txBox="1"/>
+          <p:nvPr/>
+        </p:nvSpPr>
+        <p:spPr>
+          <a:xfrm>
+            <a:off x="548640" y="5550408"/>
+            <a:ext cx="2651760" cy="566928"/>
           </a:xfrm>
           <a:prstGeom prst="rect">
             <a:avLst/>
@@ -7315,7 +8247,7 @@
               <a:buNone/>
             </a:pPr>
             <a:r>
-              <a:rPr lang="en-US" sz="1100" dirty="0">
+              <a:rPr lang="en-US" sz="1000" dirty="0">
                 <a:solidFill>
                   <a:srgbClr val="1B2433"/>
                 </a:solidFill>
@@ -7323,21 +8255,21 @@
                 <a:ea typeface="Calibri" pitchFamily="34" charset="-122"/>
                 <a:cs typeface="Calibri" pitchFamily="34" charset="-120"/>
               </a:rPr>
-              <a:t>Talk to finance leaders and developers. Test this prototype with them.</a:t>
-            </a:r>
-            <a:endParaRPr lang="en-US" sz="1100" dirty="0"/>
-          </a:p>
-        </p:txBody>
-      </p:sp>
-      <p:sp>
-        <p:nvSpPr>
-          <p:cNvPr id="25" name="Shape 20"/>
+              <a:t>Finance leaders and developers try the prototype. Their feedback shapes the first release.</a:t>
+            </a:r>
+            <a:endParaRPr lang="en-US" sz="1000" dirty="0"/>
+          </a:p>
+        </p:txBody>
+      </p:sp>
+      <p:sp>
+        <p:nvSpPr>
+          <p:cNvPr id="35" name="Shape 30"/>
           <p:cNvSpPr/>
           <p:nvPr/>
         </p:nvSpPr>
         <p:spPr>
           <a:xfrm>
-            <a:off x="3447288" y="4709160"/>
+            <a:off x="3447288" y="4956048"/>
             <a:ext cx="237744" cy="237744"/>
           </a:xfrm>
           <a:prstGeom prst="ellipse">
@@ -7356,13 +8288,13 @@
       </p:sp>
       <p:sp>
         <p:nvSpPr>
-          <p:cNvPr id="26" name="Text 21"/>
-          <p:cNvSpPr txBox="1"/>
-          <p:nvPr/>
-        </p:nvSpPr>
-        <p:spPr>
-          <a:xfrm>
-            <a:off x="3794760" y="4681728"/>
+          <p:cNvPr id="36" name="Text 31"/>
+          <p:cNvSpPr txBox="1"/>
+          <p:nvPr/>
+        </p:nvSpPr>
+        <p:spPr>
+          <a:xfrm>
+            <a:off x="3794760" y="4937760"/>
             <a:ext cx="2194560" cy="274320"/>
           </a:xfrm>
           <a:prstGeom prst="rect">
@@ -7395,14 +8327,14 @@
       </p:sp>
       <p:sp>
         <p:nvSpPr>
-          <p:cNvPr id="27" name="Text 22"/>
-          <p:cNvSpPr txBox="1"/>
-          <p:nvPr/>
-        </p:nvSpPr>
-        <p:spPr>
-          <a:xfrm>
-            <a:off x="3337560" y="5047488"/>
-            <a:ext cx="2651760" cy="274320"/>
+          <p:cNvPr id="37" name="Text 32"/>
+          <p:cNvSpPr txBox="1"/>
+          <p:nvPr/>
+        </p:nvSpPr>
+        <p:spPr>
+          <a:xfrm>
+            <a:off x="3337560" y="5285232"/>
+            <a:ext cx="2651760" cy="256032"/>
           </a:xfrm>
           <a:prstGeom prst="rect">
             <a:avLst/>
@@ -7418,7 +8350,7 @@
               <a:buNone/>
             </a:pPr>
             <a:r>
-              <a:rPr lang="en-US" sz="1300" b="1" dirty="0">
+              <a:rPr lang="en-US" sz="1200" b="1" dirty="0">
                 <a:solidFill>
                   <a:srgbClr val="1B2433"/>
                 </a:solidFill>
@@ -7426,22 +8358,22 @@
                 <a:ea typeface="Calibri" pitchFamily="34" charset="-122"/>
                 <a:cs typeface="Calibri" pitchFamily="34" charset="-120"/>
               </a:rPr>
-              <a:t>First version</a:t>
-            </a:r>
-            <a:endParaRPr lang="en-US" sz="1300" dirty="0"/>
-          </a:p>
-        </p:txBody>
-      </p:sp>
-      <p:sp>
-        <p:nvSpPr>
-          <p:cNvPr id="28" name="Text 23"/>
-          <p:cNvSpPr txBox="1"/>
-          <p:nvPr/>
-        </p:nvSpPr>
-        <p:spPr>
-          <a:xfrm>
-            <a:off x="3337560" y="5349240"/>
-            <a:ext cx="2606040" cy="640080"/>
+              <a:t>First release</a:t>
+            </a:r>
+            <a:endParaRPr lang="en-US" sz="1200" dirty="0"/>
+          </a:p>
+        </p:txBody>
+      </p:sp>
+      <p:sp>
+        <p:nvSpPr>
+          <p:cNvPr id="38" name="Text 33"/>
+          <p:cNvSpPr txBox="1"/>
+          <p:nvPr/>
+        </p:nvSpPr>
+        <p:spPr>
+          <a:xfrm>
+            <a:off x="3337560" y="5550408"/>
+            <a:ext cx="2651760" cy="566928"/>
           </a:xfrm>
           <a:prstGeom prst="rect">
             <a:avLst/>
@@ -7457,7 +8389,7 @@
               <a:buNone/>
             </a:pPr>
             <a:r>
-              <a:rPr lang="en-US" sz="1100" dirty="0">
+              <a:rPr lang="en-US" sz="1000" dirty="0">
                 <a:solidFill>
                   <a:srgbClr val="1B2433"/>
                 </a:solidFill>
@@ -7465,21 +8397,21 @@
                 <a:ea typeface="Calibri" pitchFamily="34" charset="-122"/>
                 <a:cs typeface="Calibri" pitchFamily="34" charset="-120"/>
               </a:rPr>
-              <a:t>Launch the close agent with Assist and Approve. Add the Trust Center and core APIs.</a:t>
-            </a:r>
-            <a:endParaRPr lang="en-US" sz="1100" dirty="0"/>
-          </a:p>
-        </p:txBody>
-      </p:sp>
-      <p:sp>
-        <p:nvSpPr>
-          <p:cNvPr id="29" name="Shape 24"/>
+              <a:t>The close agent launches in Assist and Approve modes. The Trust Center and core APIs launch with it.</a:t>
+            </a:r>
+            <a:endParaRPr lang="en-US" sz="1000" dirty="0"/>
+          </a:p>
+        </p:txBody>
+      </p:sp>
+      <p:sp>
+        <p:nvSpPr>
+          <p:cNvPr id="39" name="Shape 34"/>
           <p:cNvSpPr/>
           <p:nvPr/>
         </p:nvSpPr>
         <p:spPr>
           <a:xfrm>
-            <a:off x="6236208" y="4709160"/>
+            <a:off x="6236208" y="4956048"/>
             <a:ext cx="237744" cy="237744"/>
           </a:xfrm>
           <a:prstGeom prst="ellipse">
@@ -7498,13 +8430,13 @@
       </p:sp>
       <p:sp>
         <p:nvSpPr>
-          <p:cNvPr id="30" name="Text 25"/>
-          <p:cNvSpPr txBox="1"/>
-          <p:nvPr/>
-        </p:nvSpPr>
-        <p:spPr>
-          <a:xfrm>
-            <a:off x="6583680" y="4681728"/>
+          <p:cNvPr id="40" name="Text 35"/>
+          <p:cNvSpPr txBox="1"/>
+          <p:nvPr/>
+        </p:nvSpPr>
+        <p:spPr>
+          <a:xfrm>
+            <a:off x="6583680" y="4937760"/>
             <a:ext cx="2194560" cy="274320"/>
           </a:xfrm>
           <a:prstGeom prst="rect">
@@ -7537,14 +8469,14 @@
       </p:sp>
       <p:sp>
         <p:nvSpPr>
-          <p:cNvPr id="31" name="Text 26"/>
-          <p:cNvSpPr txBox="1"/>
-          <p:nvPr/>
-        </p:nvSpPr>
-        <p:spPr>
-          <a:xfrm>
-            <a:off x="6126480" y="5047488"/>
-            <a:ext cx="2651760" cy="274320"/>
+          <p:cNvPr id="41" name="Text 36"/>
+          <p:cNvSpPr txBox="1"/>
+          <p:nvPr/>
+        </p:nvSpPr>
+        <p:spPr>
+          <a:xfrm>
+            <a:off x="6126480" y="5285232"/>
+            <a:ext cx="2651760" cy="256032"/>
           </a:xfrm>
           <a:prstGeom prst="rect">
             <a:avLst/>
@@ -7560,7 +8492,7 @@
               <a:buNone/>
             </a:pPr>
             <a:r>
-              <a:rPr lang="en-US" sz="1300" b="1" dirty="0">
+              <a:rPr lang="en-US" sz="1200" b="1" dirty="0">
                 <a:solidFill>
                   <a:srgbClr val="1B2433"/>
                 </a:solidFill>
@@ -7570,20 +8502,20 @@
               </a:rPr>
               <a:t>Expand</a:t>
             </a:r>
-            <a:endParaRPr lang="en-US" sz="1300" dirty="0"/>
-          </a:p>
-        </p:txBody>
-      </p:sp>
-      <p:sp>
-        <p:nvSpPr>
-          <p:cNvPr id="32" name="Text 27"/>
-          <p:cNvSpPr txBox="1"/>
-          <p:nvPr/>
-        </p:nvSpPr>
-        <p:spPr>
-          <a:xfrm>
-            <a:off x="6126480" y="5349240"/>
-            <a:ext cx="2606040" cy="640080"/>
+            <a:endParaRPr lang="en-US" sz="1200" dirty="0"/>
+          </a:p>
+        </p:txBody>
+      </p:sp>
+      <p:sp>
+        <p:nvSpPr>
+          <p:cNvPr id="42" name="Text 37"/>
+          <p:cNvSpPr txBox="1"/>
+          <p:nvPr/>
+        </p:nvSpPr>
+        <p:spPr>
+          <a:xfrm>
+            <a:off x="6126480" y="5550408"/>
+            <a:ext cx="2651760" cy="566928"/>
           </a:xfrm>
           <a:prstGeom prst="rect">
             <a:avLst/>
@@ -7599,7 +8531,7 @@
               <a:buNone/>
             </a:pPr>
             <a:r>
-              <a:rPr lang="en-US" sz="1100" dirty="0">
+              <a:rPr lang="en-US" sz="1000" dirty="0">
                 <a:solidFill>
                   <a:srgbClr val="1B2433"/>
                 </a:solidFill>
@@ -7607,21 +8539,21 @@
                 <a:ea typeface="Calibri" pitchFamily="34" charset="-122"/>
                 <a:cs typeface="Calibri" pitchFamily="34" charset="-120"/>
               </a:rPr>
-              <a:t>Add the what-if lab, compliance help, the expert network and the full marketplace.</a:t>
-            </a:r>
-            <a:endParaRPr lang="en-US" sz="1100" dirty="0"/>
-          </a:p>
-        </p:txBody>
-      </p:sp>
-      <p:sp>
-        <p:nvSpPr>
-          <p:cNvPr id="33" name="Shape 28"/>
+              <a:t>The Scenario Lab, compliance help, expert network and full marketplace go live.</a:t>
+            </a:r>
+            <a:endParaRPr lang="en-US" sz="1000" dirty="0"/>
+          </a:p>
+        </p:txBody>
+      </p:sp>
+      <p:sp>
+        <p:nvSpPr>
+          <p:cNvPr id="43" name="Shape 38"/>
           <p:cNvSpPr/>
           <p:nvPr/>
         </p:nvSpPr>
         <p:spPr>
           <a:xfrm>
-            <a:off x="9025128" y="4709160"/>
+            <a:off x="9025128" y="4956048"/>
             <a:ext cx="237744" cy="237744"/>
           </a:xfrm>
           <a:prstGeom prst="ellipse">
@@ -7640,13 +8572,13 @@
       </p:sp>
       <p:sp>
         <p:nvSpPr>
-          <p:cNvPr id="34" name="Text 29"/>
-          <p:cNvSpPr txBox="1"/>
-          <p:nvPr/>
-        </p:nvSpPr>
-        <p:spPr>
-          <a:xfrm>
-            <a:off x="9372600" y="4681728"/>
+          <p:cNvPr id="44" name="Text 39"/>
+          <p:cNvSpPr txBox="1"/>
+          <p:nvPr/>
+        </p:nvSpPr>
+        <p:spPr>
+          <a:xfrm>
+            <a:off x="9372600" y="4937760"/>
             <a:ext cx="2194560" cy="274320"/>
           </a:xfrm>
           <a:prstGeom prst="rect">
@@ -7679,14 +8611,14 @@
       </p:sp>
       <p:sp>
         <p:nvSpPr>
-          <p:cNvPr id="35" name="Text 30"/>
-          <p:cNvSpPr txBox="1"/>
-          <p:nvPr/>
-        </p:nvSpPr>
-        <p:spPr>
-          <a:xfrm>
-            <a:off x="8915400" y="5047488"/>
-            <a:ext cx="2651760" cy="274320"/>
+          <p:cNvPr id="45" name="Text 40"/>
+          <p:cNvSpPr txBox="1"/>
+          <p:nvPr/>
+        </p:nvSpPr>
+        <p:spPr>
+          <a:xfrm>
+            <a:off x="8915400" y="5285232"/>
+            <a:ext cx="2651760" cy="256032"/>
           </a:xfrm>
           <a:prstGeom prst="rect">
             <a:avLst/>
@@ -7702,7 +8634,7 @@
               <a:buNone/>
             </a:pPr>
             <a:r>
-              <a:rPr lang="en-US" sz="1300" b="1" dirty="0">
+              <a:rPr lang="en-US" sz="1200" b="1" dirty="0">
                 <a:solidFill>
                   <a:srgbClr val="1B2433"/>
                 </a:solidFill>
@@ -7712,20 +8644,20 @@
               </a:rPr>
               <a:t>Platform</a:t>
             </a:r>
-            <a:endParaRPr lang="en-US" sz="1300" dirty="0"/>
-          </a:p>
-        </p:txBody>
-      </p:sp>
-      <p:sp>
-        <p:nvSpPr>
-          <p:cNvPr id="36" name="Text 31"/>
-          <p:cNvSpPr txBox="1"/>
-          <p:nvPr/>
-        </p:nvSpPr>
-        <p:spPr>
-          <a:xfrm>
-            <a:off x="8915400" y="5349240"/>
-            <a:ext cx="2606040" cy="640080"/>
+            <a:endParaRPr lang="en-US" sz="1200" dirty="0"/>
+          </a:p>
+        </p:txBody>
+      </p:sp>
+      <p:sp>
+        <p:nvSpPr>
+          <p:cNvPr id="46" name="Text 41"/>
+          <p:cNvSpPr txBox="1"/>
+          <p:nvPr/>
+        </p:nvSpPr>
+        <p:spPr>
+          <a:xfrm>
+            <a:off x="8915400" y="5550408"/>
+            <a:ext cx="2651760" cy="566928"/>
           </a:xfrm>
           <a:prstGeom prst="rect">
             <a:avLst/>
@@ -7741,7 +8673,7 @@
               <a:buNone/>
             </a:pPr>
             <a:r>
-              <a:rPr lang="en-US" sz="1100" dirty="0">
+              <a:rPr lang="en-US" sz="1000" dirty="0">
                 <a:solidFill>
                   <a:srgbClr val="1B2433"/>
                 </a:solidFill>
@@ -7749,26 +8681,26 @@
                 <a:ea typeface="Calibri" pitchFamily="34" charset="-122"/>
                 <a:cs typeface="Calibri" pitchFamily="34" charset="-120"/>
               </a:rPr>
-              <a:t>Grow the partner ecosystem. Turn on Autopilot only where tasks have proven accurate.</a:t>
-            </a:r>
-            <a:endParaRPr lang="en-US" sz="1100" dirty="0"/>
-          </a:p>
-        </p:txBody>
-      </p:sp>
-      <p:sp>
-        <p:nvSpPr>
-          <p:cNvPr id="37" name="Shape 32"/>
+              <a:t>The partner ecosystem grows. Autopilot turns on only for tasks that have proven accurate.</a:t>
+            </a:r>
+            <a:endParaRPr lang="en-US" sz="1000" dirty="0"/>
+          </a:p>
+        </p:txBody>
+      </p:sp>
+      <p:sp>
+        <p:nvSpPr>
+          <p:cNvPr id="47" name="Shape 42"/>
           <p:cNvSpPr/>
           <p:nvPr/>
         </p:nvSpPr>
         <p:spPr>
           <a:xfrm>
-            <a:off x="548640" y="6053328"/>
-            <a:ext cx="11109960" cy="594360"/>
+            <a:off x="548640" y="6199632"/>
+            <a:ext cx="11109960" cy="475488"/>
           </a:xfrm>
           <a:prstGeom prst="roundRect">
             <a:avLst>
-              <a:gd name="adj" fmla="val 15385"/>
+              <a:gd name="adj" fmla="val 19231"/>
             </a:avLst>
           </a:prstGeom>
           <a:solidFill>
@@ -7784,14 +8716,14 @@
       </p:sp>
       <p:sp>
         <p:nvSpPr>
-          <p:cNvPr id="38" name="Text 33"/>
-          <p:cNvSpPr txBox="1"/>
-          <p:nvPr/>
-        </p:nvSpPr>
-        <p:spPr>
-          <a:xfrm>
-            <a:off x="777240" y="6053328"/>
-            <a:ext cx="10698480" cy="594360"/>
+          <p:cNvPr id="48" name="Text 43"/>
+          <p:cNvSpPr txBox="1"/>
+          <p:nvPr/>
+        </p:nvSpPr>
+        <p:spPr>
+          <a:xfrm>
+            <a:off x="777240" y="6199632"/>
+            <a:ext cx="10698480" cy="475488"/>
           </a:xfrm>
           <a:prstGeom prst="rect">
             <a:avLst/>
@@ -7807,7 +8739,7 @@
               <a:buNone/>
             </a:pPr>
             <a:r>
-              <a:rPr lang="en-US" sz="1400" b="1" dirty="0">
+              <a:rPr lang="en-US" sz="1300" b="1" dirty="0">
                 <a:solidFill>
                   <a:srgbClr val="FFFFFF"/>
                 </a:solidFill>
@@ -7815,9 +8747,9 @@
                 <a:ea typeface="Calibri" pitchFamily="34" charset="-122"/>
                 <a:cs typeface="Calibri" pitchFamily="34" charset="-120"/>
               </a:rPr>
-              <a:t>IES Helm lets Intuit grow from software that records the past into a trusted AI platform that helps businesses decide and act.</a:t>
-            </a:r>
-            <a:endParaRPr lang="en-US" sz="1400" dirty="0"/>
+              <a:t>IES Helm helps IES grow from software that records the past into a trusted AI platform that helps businesses decide and act.</a:t>
+            </a:r>
+            <a:endParaRPr lang="en-US" sz="1300" dirty="0"/>
           </a:p>
         </p:txBody>
       </p:sp>
